--- a/reports/Generative_Presentation_Group8.pptx
+++ b/reports/Generative_Presentation_Group8.pptx
@@ -1937,7 +1937,7 @@
               <a:buNone/>
             </a:pPr>
             <a:r>
-              <a:rPr lang="en-US" sz="5200" b="1" dirty="0">
+              <a:rPr lang="en-US" sz="5200" b="1" dirty="0" err="1">
                 <a:solidFill>
                   <a:srgbClr val="FFFFFF"/>
                 </a:solidFill>
@@ -1978,7 +1978,7 @@
             <a:r>
               <a:rPr lang="en-US" sz="2200" i="1" dirty="0">
                 <a:solidFill>
-                  <a:srgbClr val="F7B731"/>
+                  <a:srgbClr val="FFFF00"/>
                 </a:solidFill>
                 <a:latin typeface="Calibri" pitchFamily="34" charset="0"/>
                 <a:ea typeface="Calibri" pitchFamily="34" charset="-122"/>
@@ -1986,7 +1986,11 @@
               </a:rPr>
               <a:t>Image-to-Text Generation</a:t>
             </a:r>
-            <a:endParaRPr lang="en-US" sz="2200" dirty="0"/>
+            <a:endParaRPr lang="en-US" sz="2200" dirty="0">
+              <a:solidFill>
+                <a:srgbClr val="FFFF00"/>
+              </a:solidFill>
+            </a:endParaRPr>
           </a:p>
         </p:txBody>
       </p:sp>
@@ -2015,9 +2019,9 @@
               <a:buNone/>
             </a:pPr>
             <a:r>
-              <a:rPr lang="en-US" sz="1400" dirty="0">
-                <a:solidFill>
-                  <a:srgbClr val="DCE5EF"/>
+              <a:rPr lang="en-US" sz="1600" dirty="0">
+                <a:solidFill>
+                  <a:schemeClr val="bg2"/>
                 </a:solidFill>
                 <a:latin typeface="Calibri" pitchFamily="34" charset="0"/>
                 <a:ea typeface="Calibri" pitchFamily="34" charset="-122"/>
@@ -2025,7 +2029,11 @@
               </a:rPr>
               <a:t>Using CLIP Vision Encoders and GPT-2 Language Decoders</a:t>
             </a:r>
-            <a:endParaRPr lang="en-US" sz="1400" dirty="0"/>
+            <a:endParaRPr lang="en-US" sz="1600" dirty="0">
+              <a:solidFill>
+                <a:schemeClr val="bg2"/>
+              </a:solidFill>
+            </a:endParaRPr>
           </a:p>
         </p:txBody>
       </p:sp>
@@ -2037,7 +2045,7 @@
         </p:nvSpPr>
         <p:spPr>
           <a:xfrm>
-            <a:off x="365760" y="2971800"/>
+            <a:off x="365760" y="2234808"/>
             <a:ext cx="3200400" cy="36576"/>
           </a:xfrm>
           <a:prstGeom prst="rect">
@@ -2086,7 +2094,7 @@
               <a:buNone/>
             </a:pPr>
             <a:r>
-              <a:rPr lang="en-US" sz="1200" dirty="0">
+              <a:rPr lang="en-US" sz="1400" dirty="0">
                 <a:solidFill>
                   <a:srgbClr val="DCE5EF"/>
                 </a:solidFill>
@@ -2096,14 +2104,10 @@
               </a:rPr>
               <a:t>IE 7615 Deep Learning for AI</a:t>
             </a:r>
-            <a:endParaRPr lang="en-US" sz="1200" dirty="0"/>
-          </a:p>
-          <a:p>
-            <a:pPr marL="0" indent="0" algn="l">
-              <a:buNone/>
-            </a:pPr>
-            <a:r>
-              <a:rPr lang="en-US" sz="1200" dirty="0">
+          </a:p>
+          <a:p>
+            <a:r>
+              <a:rPr lang="en-US" sz="1400" dirty="0">
                 <a:solidFill>
                   <a:srgbClr val="DCE5EF"/>
                 </a:solidFill>
@@ -2111,16 +2115,10 @@
                 <a:ea typeface="Calibri" pitchFamily="34" charset="-122"/>
                 <a:cs typeface="Calibri" pitchFamily="34" charset="-120"/>
               </a:rPr>
-              <a:t>Northeastern University  |  Spring 2026</a:t>
-            </a:r>
-            <a:endParaRPr lang="en-US" sz="1200" dirty="0"/>
-          </a:p>
-          <a:p>
-            <a:pPr marL="0" indent="0" algn="l">
-              <a:buNone/>
-            </a:pPr>
-            <a:r>
-              <a:rPr lang="en-US" sz="1200" dirty="0">
+              <a:t>Instructor: Prof. </a:t>
+            </a:r>
+            <a:r>
+              <a:rPr lang="en-US" sz="1400" dirty="0" err="1">
                 <a:solidFill>
                   <a:srgbClr val="DCE5EF"/>
                 </a:solidFill>
@@ -2128,16 +2126,10 @@
                 <a:ea typeface="Calibri" pitchFamily="34" charset="-122"/>
                 <a:cs typeface="Calibri" pitchFamily="34" charset="-120"/>
               </a:rPr>
-              <a:t>Group 8: Quoc Hung Le, Khoa Tran, Hassan Alfareed</a:t>
-            </a:r>
-            <a:endParaRPr lang="en-US" sz="1200" dirty="0"/>
-          </a:p>
-          <a:p>
-            <a:pPr marL="0" indent="0" algn="l">
-              <a:buNone/>
-            </a:pPr>
-            <a:r>
-              <a:rPr lang="en-US" sz="1200" dirty="0">
+              <a:t>Xuemin</a:t>
+            </a:r>
+            <a:r>
+              <a:rPr lang="en-US" sz="1400" dirty="0">
                 <a:solidFill>
                   <a:srgbClr val="DCE5EF"/>
                 </a:solidFill>
@@ -2145,9 +2137,37 @@
                 <a:ea typeface="Calibri" pitchFamily="34" charset="-122"/>
                 <a:cs typeface="Calibri" pitchFamily="34" charset="-120"/>
               </a:rPr>
-              <a:t>Instructor: Prof. Xuemin Jin</a:t>
-            </a:r>
-            <a:endParaRPr lang="en-US" sz="1200" dirty="0"/>
+              <a:t> Jin</a:t>
+            </a:r>
+            <a:endParaRPr lang="en-US" sz="1400" dirty="0"/>
+          </a:p>
+          <a:p>
+            <a:pPr marL="0" indent="0" algn="l">
+              <a:buNone/>
+            </a:pPr>
+            <a:r>
+              <a:rPr lang="en-US" sz="1400" dirty="0">
+                <a:solidFill>
+                  <a:srgbClr val="DCE5EF"/>
+                </a:solidFill>
+                <a:latin typeface="Calibri" pitchFamily="34" charset="0"/>
+                <a:ea typeface="Calibri" pitchFamily="34" charset="-122"/>
+                <a:cs typeface="Calibri" pitchFamily="34" charset="-120"/>
+              </a:rPr>
+              <a:t>Group 8: Quoc Hung Le, Khoa Tran, Hassan </a:t>
+            </a:r>
+            <a:r>
+              <a:rPr lang="en-US" sz="1400" dirty="0" err="1">
+                <a:solidFill>
+                  <a:srgbClr val="DCE5EF"/>
+                </a:solidFill>
+                <a:latin typeface="Calibri" pitchFamily="34" charset="0"/>
+                <a:ea typeface="Calibri" pitchFamily="34" charset="-122"/>
+                <a:cs typeface="Calibri" pitchFamily="34" charset="-120"/>
+              </a:rPr>
+              <a:t>Alfaree</a:t>
+            </a:r>
+            <a:endParaRPr lang="en-US" sz="1400" dirty="0"/>
           </a:p>
         </p:txBody>
       </p:sp>
@@ -2176,14 +2196,18 @@
               <a:buNone/>
             </a:pPr>
             <a:r>
-              <a:rPr lang="en-US" sz="1000" b="1" dirty="0">
-                <a:solidFill>
-                  <a:srgbClr val="8A9BB0"/>
+              <a:rPr lang="en-US" sz="1400" b="1" dirty="0">
+                <a:solidFill>
+                  <a:schemeClr val="bg2"/>
                 </a:solidFill>
               </a:rPr>
               <a:t>COCO 2017</a:t>
             </a:r>
-            <a:endParaRPr lang="en-US" sz="1000" dirty="0"/>
+            <a:endParaRPr lang="en-US" sz="1400" dirty="0">
+              <a:solidFill>
+                <a:schemeClr val="bg2"/>
+              </a:solidFill>
+            </a:endParaRPr>
           </a:p>
         </p:txBody>
       </p:sp>
@@ -2246,12 +2270,16 @@
             <a:r>
               <a:rPr lang="en-US" sz="2600" b="1" dirty="0">
                 <a:solidFill>
-                  <a:srgbClr val="F7B731"/>
+                  <a:srgbClr val="FF0000"/>
                 </a:solidFill>
               </a:rPr>
               <a:t>118 K</a:t>
             </a:r>
-            <a:endParaRPr lang="en-US" sz="2600" dirty="0"/>
+            <a:endParaRPr lang="en-US" sz="2600" dirty="0">
+              <a:solidFill>
+                <a:srgbClr val="FF0000"/>
+              </a:solidFill>
+            </a:endParaRPr>
           </a:p>
         </p:txBody>
       </p:sp>
@@ -2280,14 +2308,13 @@
               <a:buNone/>
             </a:pPr>
             <a:r>
-              <a:rPr lang="en-US" sz="1000" dirty="0">
-                <a:solidFill>
-                  <a:srgbClr val="8A9BB0"/>
+              <a:rPr lang="en-US" sz="1200" dirty="0">
+                <a:solidFill>
+                  <a:schemeClr val="bg2"/>
                 </a:solidFill>
               </a:rPr>
               <a:t>Training Images</a:t>
             </a:r>
-            <a:endParaRPr lang="en-US" sz="1000" dirty="0"/>
           </a:p>
         </p:txBody>
       </p:sp>
@@ -2350,12 +2377,16 @@
             <a:r>
               <a:rPr lang="en-US" sz="2600" b="1" dirty="0">
                 <a:solidFill>
-                  <a:srgbClr val="F7B731"/>
-                </a:solidFill>
-              </a:rPr>
-              <a:t>500</a:t>
-            </a:r>
-            <a:endParaRPr lang="en-US" sz="2600" dirty="0"/>
+                  <a:schemeClr val="accent6"/>
+                </a:solidFill>
+              </a:rPr>
+              <a:t>5000</a:t>
+            </a:r>
+            <a:endParaRPr lang="en-US" sz="2600" dirty="0">
+              <a:solidFill>
+                <a:schemeClr val="accent6"/>
+              </a:solidFill>
+            </a:endParaRPr>
           </a:p>
         </p:txBody>
       </p:sp>
@@ -2384,14 +2415,13 @@
               <a:buNone/>
             </a:pPr>
             <a:r>
-              <a:rPr lang="en-US" sz="1000" dirty="0">
-                <a:solidFill>
-                  <a:srgbClr val="8A9BB0"/>
+              <a:rPr lang="en-US" sz="1200" dirty="0">
+                <a:solidFill>
+                  <a:schemeClr val="bg2"/>
                 </a:solidFill>
               </a:rPr>
               <a:t>Val Images Evaluated</a:t>
             </a:r>
-            <a:endParaRPr lang="en-US" sz="1000" dirty="0"/>
           </a:p>
         </p:txBody>
       </p:sp>
@@ -2454,12 +2484,16 @@
             <a:r>
               <a:rPr lang="en-US" sz="2600" b="1" dirty="0">
                 <a:solidFill>
-                  <a:srgbClr val="F7B731"/>
+                  <a:schemeClr val="accent2"/>
                 </a:solidFill>
               </a:rPr>
               <a:t>3</a:t>
             </a:r>
-            <a:endParaRPr lang="en-US" sz="2600" dirty="0"/>
+            <a:endParaRPr lang="en-US" sz="2600" dirty="0">
+              <a:solidFill>
+                <a:schemeClr val="accent2"/>
+              </a:solidFill>
+            </a:endParaRPr>
           </a:p>
         </p:txBody>
       </p:sp>
@@ -2488,14 +2522,13 @@
               <a:buNone/>
             </a:pPr>
             <a:r>
-              <a:rPr lang="en-US" sz="1000" dirty="0">
-                <a:solidFill>
-                  <a:srgbClr val="8A9BB0"/>
+              <a:rPr lang="en-US" sz="1200" dirty="0">
+                <a:solidFill>
+                  <a:schemeClr val="bg2"/>
                 </a:solidFill>
               </a:rPr>
               <a:t>Fine-tuning Strategies</a:t>
             </a:r>
-            <a:endParaRPr lang="en-US" sz="1000" dirty="0"/>
           </a:p>
         </p:txBody>
       </p:sp>
@@ -2558,12 +2591,16 @@
             <a:r>
               <a:rPr lang="en-US" sz="2600" b="1" dirty="0">
                 <a:solidFill>
-                  <a:srgbClr val="F7B731"/>
+                  <a:srgbClr val="FFFF00"/>
                 </a:solidFill>
               </a:rPr>
               <a:t>0.9364</a:t>
             </a:r>
-            <a:endParaRPr lang="en-US" sz="2600" dirty="0"/>
+            <a:endParaRPr lang="en-US" sz="2600" dirty="0">
+              <a:solidFill>
+                <a:srgbClr val="FFFF00"/>
+              </a:solidFill>
+            </a:endParaRPr>
           </a:p>
         </p:txBody>
       </p:sp>
@@ -2592,14 +2629,13 @@
               <a:buNone/>
             </a:pPr>
             <a:r>
-              <a:rPr lang="en-US" sz="1000" dirty="0">
-                <a:solidFill>
-                  <a:srgbClr val="8A9BB0"/>
+              <a:rPr lang="en-US" sz="1200" dirty="0">
+                <a:solidFill>
+                  <a:schemeClr val="bg2"/>
                 </a:solidFill>
               </a:rPr>
               <a:t>Best CIDEr Score</a:t>
             </a:r>
-            <a:endParaRPr lang="en-US" sz="1000" dirty="0"/>
           </a:p>
         </p:txBody>
       </p:sp>
@@ -2661,14 +2697,14 @@
               <a:buNone/>
             </a:pPr>
             <a:r>
-              <a:rPr lang="en-US" sz="900" dirty="0">
+              <a:rPr lang="en-US" sz="1200" dirty="0">
                 <a:solidFill>
                   <a:srgbClr val="8A9BB0"/>
                 </a:solidFill>
               </a:rPr>
               <a:t>10</a:t>
             </a:r>
-            <a:endParaRPr lang="en-US" sz="900" dirty="0"/>
+            <a:endParaRPr lang="en-US" sz="1200" dirty="0"/>
           </a:p>
         </p:txBody>
       </p:sp>
@@ -2729,14 +2765,14 @@
               <a:buNone/>
             </a:pPr>
             <a:r>
-              <a:rPr lang="en-US" sz="800" b="1" dirty="0">
+              <a:rPr lang="en-US" sz="1600" b="1" dirty="0">
                 <a:solidFill>
                   <a:srgbClr val="FFFFFF"/>
                 </a:solidFill>
               </a:rPr>
               <a:t>05 SENSITIVITY</a:t>
             </a:r>
-            <a:endParaRPr lang="en-US" sz="800" dirty="0"/>
+            <a:endParaRPr lang="en-US" sz="1600" dirty="0"/>
           </a:p>
         </p:txBody>
       </p:sp>
@@ -2761,7 +2797,7 @@
           <a:bodyPr wrap="square" lIns="0" tIns="0" rIns="0" bIns="0" rtlCol="0" anchor="ctr"/>
           <a:lstStyle/>
           <a:p>
-            <a:pPr marL="0" indent="0" algn="l">
+            <a:pPr marL="0" indent="0" algn="ctr">
               <a:buNone/>
             </a:pPr>
             <a:r>
@@ -2773,7 +2809,7 @@
                 <a:ea typeface="Calibri" pitchFamily="34" charset="-122"/>
                 <a:cs typeface="Calibri" pitchFamily="34" charset="-120"/>
               </a:rPr>
-              <a:t>Beam Width Sweep — CIDEr and BLEU-4</a:t>
+              <a:t>Beam Width Sweep: CIDEr and BLEU-4</a:t>
             </a:r>
             <a:endParaRPr lang="en-US" sz="2600" dirty="0"/>
           </a:p>
@@ -2788,14 +2824,26 @@
           <p:nvPr/>
         </p:nvPicPr>
         <p:blipFill>
-          <a:blip r:embed="rId3"/>
+          <a:blip r:embed="rId3">
+            <a:extLst>
+              <a:ext uri="{BEBA8EAE-BF5A-486C-A8C5-ECC9F3942E4B}">
+                <a14:imgProps xmlns:a14="http://schemas.microsoft.com/office/drawing/2010/main">
+                  <a14:imgLayer r:embed="rId4">
+                    <a14:imgEffect>
+                      <a14:brightnessContrast contrast="-40000"/>
+                    </a14:imgEffect>
+                  </a14:imgLayer>
+                </a14:imgProps>
+              </a:ext>
+            </a:extLst>
+          </a:blip>
           <a:srcRect/>
           <a:stretch/>
         </p:blipFill>
         <p:spPr>
           <a:xfrm>
             <a:off x="365760" y="1627632"/>
-            <a:ext cx="5852160" cy="3108960"/>
+            <a:ext cx="5852160" cy="2715768"/>
           </a:xfrm>
           <a:prstGeom prst="rect">
             <a:avLst/>
@@ -2827,14 +2875,14 @@
               <a:buNone/>
             </a:pPr>
             <a:r>
-              <a:rPr lang="en-US" sz="1100" b="1" dirty="0">
+              <a:rPr lang="en-US" sz="1600" b="1" dirty="0">
                 <a:solidFill>
                   <a:srgbClr val="0D1B2A"/>
                 </a:solidFill>
               </a:rPr>
               <a:t>Beam Sweep Results</a:t>
             </a:r>
-            <a:endParaRPr lang="en-US" sz="1100" dirty="0"/>
+            <a:endParaRPr lang="en-US" sz="1600" dirty="0"/>
           </a:p>
         </p:txBody>
       </p:sp>
@@ -2866,7 +2914,7 @@
           <a:bodyPr/>
           <a:lstStyle/>
           <a:p>
-            <a:endParaRPr lang="en-US"/>
+            <a:endParaRPr lang="en-US" sz="1200"/>
           </a:p>
         </p:txBody>
       </p:sp>
@@ -2895,14 +2943,14 @@
               <a:buNone/>
             </a:pPr>
             <a:r>
-              <a:rPr lang="en-US" sz="1100" dirty="0">
+              <a:rPr lang="en-US" sz="1200" dirty="0">
                 <a:solidFill>
                   <a:srgbClr val="1C2B3A"/>
                 </a:solidFill>
               </a:rPr>
               <a:t>w=1</a:t>
             </a:r>
-            <a:endParaRPr lang="en-US" sz="1100" dirty="0"/>
+            <a:endParaRPr lang="en-US" sz="1200" dirty="0"/>
           </a:p>
         </p:txBody>
       </p:sp>
@@ -2931,14 +2979,14 @@
               <a:buNone/>
             </a:pPr>
             <a:r>
-              <a:rPr lang="en-US" sz="1100" dirty="0">
+              <a:rPr lang="en-US" sz="1200" dirty="0">
                 <a:solidFill>
                   <a:srgbClr val="0B6E4F"/>
                 </a:solidFill>
               </a:rPr>
               <a:t>0.5109</a:t>
             </a:r>
-            <a:endParaRPr lang="en-US" sz="1100" dirty="0"/>
+            <a:endParaRPr lang="en-US" sz="1200" dirty="0"/>
           </a:p>
         </p:txBody>
       </p:sp>
@@ -2967,14 +3015,14 @@
               <a:buNone/>
             </a:pPr>
             <a:r>
-              <a:rPr lang="en-US" sz="1100" dirty="0">
+              <a:rPr lang="en-US" sz="1200" dirty="0">
                 <a:solidFill>
                   <a:srgbClr val="1C2B3A"/>
                 </a:solidFill>
               </a:rPr>
               <a:t>0.1553</a:t>
             </a:r>
-            <a:endParaRPr lang="en-US" sz="1100" dirty="0"/>
+            <a:endParaRPr lang="en-US" sz="1200" dirty="0"/>
           </a:p>
         </p:txBody>
       </p:sp>
@@ -3006,7 +3054,7 @@
           <a:bodyPr/>
           <a:lstStyle/>
           <a:p>
-            <a:endParaRPr lang="en-US"/>
+            <a:endParaRPr lang="en-US" sz="1200"/>
           </a:p>
         </p:txBody>
       </p:sp>
@@ -3035,14 +3083,14 @@
               <a:buNone/>
             </a:pPr>
             <a:r>
-              <a:rPr lang="en-US" sz="1100" dirty="0">
+              <a:rPr lang="en-US" sz="1200" dirty="0">
                 <a:solidFill>
                   <a:srgbClr val="1C2B3A"/>
                 </a:solidFill>
               </a:rPr>
               <a:t>w=2</a:t>
             </a:r>
-            <a:endParaRPr lang="en-US" sz="1100" dirty="0"/>
+            <a:endParaRPr lang="en-US" sz="1200" dirty="0"/>
           </a:p>
         </p:txBody>
       </p:sp>
@@ -3071,14 +3119,14 @@
               <a:buNone/>
             </a:pPr>
             <a:r>
-              <a:rPr lang="en-US" sz="1100" dirty="0">
+              <a:rPr lang="en-US" sz="1200" dirty="0">
                 <a:solidFill>
                   <a:srgbClr val="0B6E4F"/>
                 </a:solidFill>
               </a:rPr>
               <a:t>0.5638</a:t>
             </a:r>
-            <a:endParaRPr lang="en-US" sz="1100" dirty="0"/>
+            <a:endParaRPr lang="en-US" sz="1200" dirty="0"/>
           </a:p>
         </p:txBody>
       </p:sp>
@@ -3107,14 +3155,14 @@
               <a:buNone/>
             </a:pPr>
             <a:r>
-              <a:rPr lang="en-US" sz="1100" dirty="0">
+              <a:rPr lang="en-US" sz="1200" dirty="0">
                 <a:solidFill>
                   <a:srgbClr val="1C2B3A"/>
                 </a:solidFill>
               </a:rPr>
               <a:t>0.1690</a:t>
             </a:r>
-            <a:endParaRPr lang="en-US" sz="1100" dirty="0"/>
+            <a:endParaRPr lang="en-US" sz="1200" dirty="0"/>
           </a:p>
         </p:txBody>
       </p:sp>
@@ -3146,7 +3194,7 @@
           <a:bodyPr/>
           <a:lstStyle/>
           <a:p>
-            <a:endParaRPr lang="en-US"/>
+            <a:endParaRPr lang="en-US" sz="1200"/>
           </a:p>
         </p:txBody>
       </p:sp>
@@ -3175,14 +3223,14 @@
               <a:buNone/>
             </a:pPr>
             <a:r>
-              <a:rPr lang="en-US" sz="1100" dirty="0">
+              <a:rPr lang="en-US" sz="1200" dirty="0">
                 <a:solidFill>
                   <a:srgbClr val="1C2B3A"/>
                 </a:solidFill>
               </a:rPr>
               <a:t>w=3</a:t>
             </a:r>
-            <a:endParaRPr lang="en-US" sz="1100" dirty="0"/>
+            <a:endParaRPr lang="en-US" sz="1200" dirty="0"/>
           </a:p>
         </p:txBody>
       </p:sp>
@@ -3211,14 +3259,14 @@
               <a:buNone/>
             </a:pPr>
             <a:r>
-              <a:rPr lang="en-US" sz="1100" dirty="0">
+              <a:rPr lang="en-US" sz="1200" dirty="0">
                 <a:solidFill>
                   <a:srgbClr val="0B6E4F"/>
                 </a:solidFill>
               </a:rPr>
               <a:t>0.5861</a:t>
             </a:r>
-            <a:endParaRPr lang="en-US" sz="1100" dirty="0"/>
+            <a:endParaRPr lang="en-US" sz="1200" dirty="0"/>
           </a:p>
         </p:txBody>
       </p:sp>
@@ -3247,14 +3295,14 @@
               <a:buNone/>
             </a:pPr>
             <a:r>
-              <a:rPr lang="en-US" sz="1100" dirty="0">
+              <a:rPr lang="en-US" sz="1200" dirty="0">
                 <a:solidFill>
                   <a:srgbClr val="1C2B3A"/>
                 </a:solidFill>
               </a:rPr>
               <a:t>0.1739</a:t>
             </a:r>
-            <a:endParaRPr lang="en-US" sz="1100" dirty="0"/>
+            <a:endParaRPr lang="en-US" sz="1200" dirty="0"/>
           </a:p>
         </p:txBody>
       </p:sp>
@@ -3286,7 +3334,7 @@
           <a:bodyPr/>
           <a:lstStyle/>
           <a:p>
-            <a:endParaRPr lang="en-US"/>
+            <a:endParaRPr lang="en-US" sz="1200"/>
           </a:p>
         </p:txBody>
       </p:sp>
@@ -3315,14 +3363,14 @@
               <a:buNone/>
             </a:pPr>
             <a:r>
-              <a:rPr lang="en-US" sz="1100" b="1" dirty="0">
+              <a:rPr lang="en-US" sz="1200" b="1" dirty="0">
                 <a:solidFill>
                   <a:srgbClr val="FFFFFF"/>
                 </a:solidFill>
               </a:rPr>
               <a:t>w=5</a:t>
             </a:r>
-            <a:endParaRPr lang="en-US" sz="1100" dirty="0"/>
+            <a:endParaRPr lang="en-US" sz="1200" dirty="0"/>
           </a:p>
         </p:txBody>
       </p:sp>
@@ -3351,14 +3399,14 @@
               <a:buNone/>
             </a:pPr>
             <a:r>
-              <a:rPr lang="en-US" sz="1100" b="1" dirty="0">
+              <a:rPr lang="en-US" sz="1200" b="1" dirty="0">
                 <a:solidFill>
                   <a:srgbClr val="F7B731"/>
                 </a:solidFill>
               </a:rPr>
               <a:t>0.6099</a:t>
             </a:r>
-            <a:endParaRPr lang="en-US" sz="1100" dirty="0"/>
+            <a:endParaRPr lang="en-US" sz="1200" dirty="0"/>
           </a:p>
         </p:txBody>
       </p:sp>
@@ -3387,14 +3435,14 @@
               <a:buNone/>
             </a:pPr>
             <a:r>
-              <a:rPr lang="en-US" sz="1100" dirty="0">
+              <a:rPr lang="en-US" sz="1200" dirty="0">
                 <a:solidFill>
                   <a:srgbClr val="FFFFFF"/>
                 </a:solidFill>
               </a:rPr>
               <a:t>0.1775</a:t>
             </a:r>
-            <a:endParaRPr lang="en-US" sz="1100" dirty="0"/>
+            <a:endParaRPr lang="en-US" sz="1200" dirty="0"/>
           </a:p>
         </p:txBody>
       </p:sp>
@@ -3426,7 +3474,7 @@
           <a:bodyPr/>
           <a:lstStyle/>
           <a:p>
-            <a:endParaRPr lang="en-US"/>
+            <a:endParaRPr lang="en-US" sz="1200"/>
           </a:p>
         </p:txBody>
       </p:sp>
@@ -3455,14 +3503,14 @@
               <a:buNone/>
             </a:pPr>
             <a:r>
-              <a:rPr lang="en-US" sz="1100" dirty="0">
+              <a:rPr lang="en-US" sz="1200" dirty="0">
                 <a:solidFill>
                   <a:srgbClr val="1C2B3A"/>
                 </a:solidFill>
               </a:rPr>
               <a:t>w=8</a:t>
             </a:r>
-            <a:endParaRPr lang="en-US" sz="1100" dirty="0"/>
+            <a:endParaRPr lang="en-US" sz="1200" dirty="0"/>
           </a:p>
         </p:txBody>
       </p:sp>
@@ -3491,14 +3539,14 @@
               <a:buNone/>
             </a:pPr>
             <a:r>
-              <a:rPr lang="en-US" sz="1100" dirty="0">
+              <a:rPr lang="en-US" sz="1200" dirty="0">
                 <a:solidFill>
                   <a:srgbClr val="0B6E4F"/>
                 </a:solidFill>
               </a:rPr>
               <a:t>0.5718</a:t>
             </a:r>
-            <a:endParaRPr lang="en-US" sz="1100" dirty="0"/>
+            <a:endParaRPr lang="en-US" sz="1200" dirty="0"/>
           </a:p>
         </p:txBody>
       </p:sp>
@@ -3527,14 +3575,14 @@
               <a:buNone/>
             </a:pPr>
             <a:r>
-              <a:rPr lang="en-US" sz="1100" dirty="0">
+              <a:rPr lang="en-US" sz="1200" dirty="0">
                 <a:solidFill>
                   <a:srgbClr val="1C2B3A"/>
                 </a:solidFill>
               </a:rPr>
               <a:t>0.1654</a:t>
             </a:r>
-            <a:endParaRPr lang="en-US" sz="1100" dirty="0"/>
+            <a:endParaRPr lang="en-US" sz="1200" dirty="0"/>
           </a:p>
         </p:txBody>
       </p:sp>
@@ -3566,7 +3614,7 @@
           <a:bodyPr/>
           <a:lstStyle/>
           <a:p>
-            <a:endParaRPr lang="en-US"/>
+            <a:endParaRPr lang="en-US" sz="1200"/>
           </a:p>
         </p:txBody>
       </p:sp>
@@ -3595,14 +3643,14 @@
               <a:buNone/>
             </a:pPr>
             <a:r>
-              <a:rPr lang="en-US" sz="1100" dirty="0">
+              <a:rPr lang="en-US" sz="1200" dirty="0">
                 <a:solidFill>
                   <a:srgbClr val="1C2B3A"/>
                 </a:solidFill>
               </a:rPr>
               <a:t>w=10</a:t>
             </a:r>
-            <a:endParaRPr lang="en-US" sz="1100" dirty="0"/>
+            <a:endParaRPr lang="en-US" sz="1200" dirty="0"/>
           </a:p>
         </p:txBody>
       </p:sp>
@@ -3631,14 +3679,14 @@
               <a:buNone/>
             </a:pPr>
             <a:r>
-              <a:rPr lang="en-US" sz="1100" dirty="0">
+              <a:rPr lang="en-US" sz="1200" dirty="0">
                 <a:solidFill>
                   <a:srgbClr val="0B6E4F"/>
                 </a:solidFill>
               </a:rPr>
               <a:t>0.5684</a:t>
             </a:r>
-            <a:endParaRPr lang="en-US" sz="1100" dirty="0"/>
+            <a:endParaRPr lang="en-US" sz="1200" dirty="0"/>
           </a:p>
         </p:txBody>
       </p:sp>
@@ -3667,14 +3715,14 @@
               <a:buNone/>
             </a:pPr>
             <a:r>
-              <a:rPr lang="en-US" sz="1100" dirty="0">
+              <a:rPr lang="en-US" sz="1200" dirty="0">
                 <a:solidFill>
                   <a:srgbClr val="1C2B3A"/>
                 </a:solidFill>
               </a:rPr>
               <a:t>0.1639</a:t>
             </a:r>
-            <a:endParaRPr lang="en-US" sz="1100" dirty="0"/>
+            <a:endParaRPr lang="en-US" sz="1200" dirty="0"/>
           </a:p>
         </p:txBody>
       </p:sp>
@@ -3706,7 +3754,7 @@
           <a:bodyPr/>
           <a:lstStyle/>
           <a:p>
-            <a:endParaRPr lang="en-US"/>
+            <a:endParaRPr lang="en-US" sz="1200"/>
           </a:p>
         </p:txBody>
       </p:sp>
@@ -3735,14 +3783,14 @@
               <a:buNone/>
             </a:pPr>
             <a:r>
-              <a:rPr lang="en-US" sz="1200" b="1" dirty="0">
+              <a:rPr lang="en-US" sz="1600" b="1" dirty="0">
                 <a:solidFill>
                   <a:srgbClr val="F7B731"/>
                 </a:solidFill>
               </a:rPr>
               <a:t>Recommended: w = 5</a:t>
             </a:r>
-            <a:endParaRPr lang="en-US" sz="1200" dirty="0"/>
+            <a:endParaRPr lang="en-US" sz="1600" dirty="0"/>
           </a:p>
         </p:txBody>
       </p:sp>
@@ -3804,14 +3852,14 @@
               <a:buNone/>
             </a:pPr>
             <a:r>
-              <a:rPr lang="en-US" sz="900" dirty="0">
+              <a:rPr lang="en-US" sz="1200" dirty="0">
                 <a:solidFill>
                   <a:srgbClr val="8A9BB0"/>
                 </a:solidFill>
               </a:rPr>
               <a:t>11</a:t>
             </a:r>
-            <a:endParaRPr lang="en-US" sz="900" dirty="0"/>
+            <a:endParaRPr lang="en-US" sz="1200" dirty="0"/>
           </a:p>
         </p:txBody>
       </p:sp>
@@ -3872,14 +3920,14 @@
               <a:buNone/>
             </a:pPr>
             <a:r>
-              <a:rPr lang="en-US" sz="800" b="1" dirty="0">
+              <a:rPr lang="en-US" sz="1600" b="1" dirty="0">
                 <a:solidFill>
                   <a:srgbClr val="FFFFFF"/>
                 </a:solidFill>
               </a:rPr>
               <a:t>05 SENSITIVITY</a:t>
             </a:r>
-            <a:endParaRPr lang="en-US" sz="800" dirty="0"/>
+            <a:endParaRPr lang="en-US" sz="1600" dirty="0"/>
           </a:p>
         </p:txBody>
       </p:sp>
@@ -3904,7 +3952,7 @@
           <a:bodyPr wrap="square" lIns="0" tIns="0" rIns="0" bIns="0" rtlCol="0" anchor="ctr"/>
           <a:lstStyle/>
           <a:p>
-            <a:pPr marL="0" indent="0" algn="l">
+            <a:pPr marL="0" indent="0" algn="ctr">
               <a:buNone/>
             </a:pPr>
             <a:r>
@@ -3916,7 +3964,7 @@
                 <a:ea typeface="Calibri" pitchFamily="34" charset="-122"/>
                 <a:cs typeface="Calibri" pitchFamily="34" charset="-120"/>
               </a:rPr>
-              <a:t>Temperature Sweep — Accuracy vs. Diversity Trade-off</a:t>
+              <a:t>Temperature Sweep: Accuracy vs. Diversity Trade-off</a:t>
             </a:r>
             <a:endParaRPr lang="en-US" sz="2600" dirty="0"/>
           </a:p>
@@ -3937,7 +3985,7 @@
         </p:blipFill>
         <p:spPr>
           <a:xfrm>
-            <a:off x="365760" y="1753386"/>
+            <a:off x="365760" y="1630554"/>
             <a:ext cx="5852160" cy="2983206"/>
           </a:xfrm>
           <a:prstGeom prst="rect">
@@ -3970,14 +4018,14 @@
               <a:buNone/>
             </a:pPr>
             <a:r>
-              <a:rPr lang="en-US" sz="1100" b="1" dirty="0">
+              <a:rPr lang="en-US" sz="1600" b="1" dirty="0">
                 <a:solidFill>
                   <a:srgbClr val="0D1B2A"/>
                 </a:solidFill>
               </a:rPr>
               <a:t>Accuracy - Diversity</a:t>
             </a:r>
-            <a:endParaRPr lang="en-US" sz="1100" dirty="0"/>
+            <a:endParaRPr lang="en-US" sz="1600" dirty="0"/>
           </a:p>
         </p:txBody>
       </p:sp>
@@ -4009,7 +4057,7 @@
           <a:bodyPr/>
           <a:lstStyle/>
           <a:p>
-            <a:endParaRPr lang="en-US"/>
+            <a:endParaRPr lang="en-US" sz="1200"/>
           </a:p>
         </p:txBody>
       </p:sp>
@@ -4038,14 +4086,14 @@
               <a:buNone/>
             </a:pPr>
             <a:r>
-              <a:rPr lang="en-US" sz="1000" b="1" dirty="0">
+              <a:rPr lang="en-US" sz="1200" b="1" dirty="0">
                 <a:solidFill>
                   <a:srgbClr val="FFFFFF"/>
                 </a:solidFill>
               </a:rPr>
               <a:t>t=0.3</a:t>
             </a:r>
-            <a:endParaRPr lang="en-US" sz="1000" dirty="0"/>
+            <a:endParaRPr lang="en-US" sz="1200" dirty="0"/>
           </a:p>
         </p:txBody>
       </p:sp>
@@ -4074,14 +4122,14 @@
               <a:buNone/>
             </a:pPr>
             <a:r>
-              <a:rPr lang="en-US" sz="1000" b="1" dirty="0">
+              <a:rPr lang="en-US" sz="1200" b="1" dirty="0">
                 <a:solidFill>
                   <a:srgbClr val="F7B731"/>
                 </a:solidFill>
               </a:rPr>
               <a:t>0.464</a:t>
             </a:r>
-            <a:endParaRPr lang="en-US" sz="1000" dirty="0"/>
+            <a:endParaRPr lang="en-US" sz="1200" dirty="0"/>
           </a:p>
         </p:txBody>
       </p:sp>
@@ -4110,14 +4158,14 @@
               <a:buNone/>
             </a:pPr>
             <a:r>
-              <a:rPr lang="en-US" sz="1000" dirty="0">
+              <a:rPr lang="en-US" sz="1200" dirty="0">
                 <a:solidFill>
                   <a:srgbClr val="DCE5EF"/>
                 </a:solidFill>
               </a:rPr>
               <a:t>0.552</a:t>
             </a:r>
-            <a:endParaRPr lang="en-US" sz="1000" dirty="0"/>
+            <a:endParaRPr lang="en-US" sz="1200" dirty="0"/>
           </a:p>
         </p:txBody>
       </p:sp>
@@ -4149,7 +4197,7 @@
           <a:bodyPr/>
           <a:lstStyle/>
           <a:p>
-            <a:endParaRPr lang="en-US"/>
+            <a:endParaRPr lang="en-US" sz="1200"/>
           </a:p>
         </p:txBody>
       </p:sp>
@@ -4178,14 +4226,14 @@
               <a:buNone/>
             </a:pPr>
             <a:r>
-              <a:rPr lang="en-US" sz="1000" dirty="0">
+              <a:rPr lang="en-US" sz="1200" dirty="0">
                 <a:solidFill>
                   <a:srgbClr val="1C2B3A"/>
                 </a:solidFill>
               </a:rPr>
               <a:t>t=0.5</a:t>
             </a:r>
-            <a:endParaRPr lang="en-US" sz="1000" dirty="0"/>
+            <a:endParaRPr lang="en-US" sz="1200" dirty="0"/>
           </a:p>
         </p:txBody>
       </p:sp>
@@ -4214,14 +4262,14 @@
               <a:buNone/>
             </a:pPr>
             <a:r>
-              <a:rPr lang="en-US" sz="1000" dirty="0">
+              <a:rPr lang="en-US" sz="1200" dirty="0">
                 <a:solidFill>
                   <a:srgbClr val="0B6E4F"/>
                 </a:solidFill>
               </a:rPr>
               <a:t>0.375</a:t>
             </a:r>
-            <a:endParaRPr lang="en-US" sz="1000" dirty="0"/>
+            <a:endParaRPr lang="en-US" sz="1200" dirty="0"/>
           </a:p>
         </p:txBody>
       </p:sp>
@@ -4250,14 +4298,14 @@
               <a:buNone/>
             </a:pPr>
             <a:r>
-              <a:rPr lang="en-US" sz="1000" dirty="0">
+              <a:rPr lang="en-US" sz="1200" dirty="0">
                 <a:solidFill>
                   <a:srgbClr val="8A9BB0"/>
                 </a:solidFill>
               </a:rPr>
               <a:t>0.625</a:t>
             </a:r>
-            <a:endParaRPr lang="en-US" sz="1000" dirty="0"/>
+            <a:endParaRPr lang="en-US" sz="1200" dirty="0"/>
           </a:p>
         </p:txBody>
       </p:sp>
@@ -4289,7 +4337,7 @@
           <a:bodyPr/>
           <a:lstStyle/>
           <a:p>
-            <a:endParaRPr lang="en-US"/>
+            <a:endParaRPr lang="en-US" sz="1200"/>
           </a:p>
         </p:txBody>
       </p:sp>
@@ -4318,14 +4366,14 @@
               <a:buNone/>
             </a:pPr>
             <a:r>
-              <a:rPr lang="en-US" sz="1000" dirty="0">
+              <a:rPr lang="en-US" sz="1200" dirty="0">
                 <a:solidFill>
                   <a:srgbClr val="1C2B3A"/>
                 </a:solidFill>
               </a:rPr>
               <a:t>t=0.7</a:t>
             </a:r>
-            <a:endParaRPr lang="en-US" sz="1000" dirty="0"/>
+            <a:endParaRPr lang="en-US" sz="1200" dirty="0"/>
           </a:p>
         </p:txBody>
       </p:sp>
@@ -4354,14 +4402,14 @@
               <a:buNone/>
             </a:pPr>
             <a:r>
-              <a:rPr lang="en-US" sz="1000" dirty="0">
+              <a:rPr lang="en-US" sz="1200" dirty="0">
                 <a:solidFill>
                   <a:srgbClr val="0B6E4F"/>
                 </a:solidFill>
               </a:rPr>
               <a:t>0.283</a:t>
             </a:r>
-            <a:endParaRPr lang="en-US" sz="1000" dirty="0"/>
+            <a:endParaRPr lang="en-US" sz="1200" dirty="0"/>
           </a:p>
         </p:txBody>
       </p:sp>
@@ -4390,14 +4438,14 @@
               <a:buNone/>
             </a:pPr>
             <a:r>
-              <a:rPr lang="en-US" sz="1000" dirty="0">
+              <a:rPr lang="en-US" sz="1200" dirty="0">
                 <a:solidFill>
                   <a:srgbClr val="8A9BB0"/>
                 </a:solidFill>
               </a:rPr>
               <a:t>0.705</a:t>
             </a:r>
-            <a:endParaRPr lang="en-US" sz="1000" dirty="0"/>
+            <a:endParaRPr lang="en-US" sz="1200" dirty="0"/>
           </a:p>
         </p:txBody>
       </p:sp>
@@ -4429,7 +4477,7 @@
           <a:bodyPr/>
           <a:lstStyle/>
           <a:p>
-            <a:endParaRPr lang="en-US"/>
+            <a:endParaRPr lang="en-US" sz="1200"/>
           </a:p>
         </p:txBody>
       </p:sp>
@@ -4458,14 +4506,14 @@
               <a:buNone/>
             </a:pPr>
             <a:r>
-              <a:rPr lang="en-US" sz="1000" dirty="0">
+              <a:rPr lang="en-US" sz="1200" dirty="0">
                 <a:solidFill>
                   <a:srgbClr val="1C2B3A"/>
                 </a:solidFill>
               </a:rPr>
               <a:t>t=0.8</a:t>
             </a:r>
-            <a:endParaRPr lang="en-US" sz="1000" dirty="0"/>
+            <a:endParaRPr lang="en-US" sz="1200" dirty="0"/>
           </a:p>
         </p:txBody>
       </p:sp>
@@ -4494,14 +4542,14 @@
               <a:buNone/>
             </a:pPr>
             <a:r>
-              <a:rPr lang="en-US" sz="1000" dirty="0">
+              <a:rPr lang="en-US" sz="1200" dirty="0">
                 <a:solidFill>
                   <a:srgbClr val="0B6E4F"/>
                 </a:solidFill>
               </a:rPr>
               <a:t>0.229</a:t>
             </a:r>
-            <a:endParaRPr lang="en-US" sz="1000" dirty="0"/>
+            <a:endParaRPr lang="en-US" sz="1200" dirty="0"/>
           </a:p>
         </p:txBody>
       </p:sp>
@@ -4530,14 +4578,14 @@
               <a:buNone/>
             </a:pPr>
             <a:r>
-              <a:rPr lang="en-US" sz="1000" dirty="0">
+              <a:rPr lang="en-US" sz="1200" dirty="0">
                 <a:solidFill>
                   <a:srgbClr val="8A9BB0"/>
                 </a:solidFill>
               </a:rPr>
               <a:t>0.787</a:t>
             </a:r>
-            <a:endParaRPr lang="en-US" sz="1000" dirty="0"/>
+            <a:endParaRPr lang="en-US" sz="1200" dirty="0"/>
           </a:p>
         </p:txBody>
       </p:sp>
@@ -4569,7 +4617,7 @@
           <a:bodyPr/>
           <a:lstStyle/>
           <a:p>
-            <a:endParaRPr lang="en-US"/>
+            <a:endParaRPr lang="en-US" sz="1200"/>
           </a:p>
         </p:txBody>
       </p:sp>
@@ -4598,14 +4646,14 @@
               <a:buNone/>
             </a:pPr>
             <a:r>
-              <a:rPr lang="en-US" sz="1000" dirty="0">
+              <a:rPr lang="en-US" sz="1200" dirty="0">
                 <a:solidFill>
                   <a:srgbClr val="1C2B3A"/>
                 </a:solidFill>
               </a:rPr>
               <a:t>t=1.0</a:t>
             </a:r>
-            <a:endParaRPr lang="en-US" sz="1000" dirty="0"/>
+            <a:endParaRPr lang="en-US" sz="1200" dirty="0"/>
           </a:p>
         </p:txBody>
       </p:sp>
@@ -4634,14 +4682,14 @@
               <a:buNone/>
             </a:pPr>
             <a:r>
-              <a:rPr lang="en-US" sz="1000" dirty="0">
+              <a:rPr lang="en-US" sz="1200" dirty="0">
                 <a:solidFill>
                   <a:srgbClr val="0B6E4F"/>
                 </a:solidFill>
               </a:rPr>
               <a:t>0.076</a:t>
             </a:r>
-            <a:endParaRPr lang="en-US" sz="1000" dirty="0"/>
+            <a:endParaRPr lang="en-US" sz="1200" dirty="0"/>
           </a:p>
         </p:txBody>
       </p:sp>
@@ -4670,14 +4718,14 @@
               <a:buNone/>
             </a:pPr>
             <a:r>
-              <a:rPr lang="en-US" sz="1000" dirty="0">
+              <a:rPr lang="en-US" sz="1200" dirty="0">
                 <a:solidFill>
                   <a:srgbClr val="8A9BB0"/>
                 </a:solidFill>
               </a:rPr>
               <a:t>0.899</a:t>
             </a:r>
-            <a:endParaRPr lang="en-US" sz="1000" dirty="0"/>
+            <a:endParaRPr lang="en-US" sz="1200" dirty="0"/>
           </a:p>
         </p:txBody>
       </p:sp>
@@ -4709,7 +4757,7 @@
           <a:bodyPr/>
           <a:lstStyle/>
           <a:p>
-            <a:endParaRPr lang="en-US"/>
+            <a:endParaRPr lang="en-US" sz="1200"/>
           </a:p>
         </p:txBody>
       </p:sp>
@@ -4738,14 +4786,14 @@
               <a:buNone/>
             </a:pPr>
             <a:r>
-              <a:rPr lang="en-US" sz="1000" dirty="0">
+              <a:rPr lang="en-US" sz="1200" dirty="0">
                 <a:solidFill>
                   <a:srgbClr val="1C2B3A"/>
                 </a:solidFill>
               </a:rPr>
               <a:t>t=1.2</a:t>
             </a:r>
-            <a:endParaRPr lang="en-US" sz="1000" dirty="0"/>
+            <a:endParaRPr lang="en-US" sz="1200" dirty="0"/>
           </a:p>
         </p:txBody>
       </p:sp>
@@ -4774,14 +4822,14 @@
               <a:buNone/>
             </a:pPr>
             <a:r>
-              <a:rPr lang="en-US" sz="1000" dirty="0">
+              <a:rPr lang="en-US" sz="1200" dirty="0">
                 <a:solidFill>
                   <a:srgbClr val="0B6E4F"/>
                 </a:solidFill>
               </a:rPr>
               <a:t>0.028</a:t>
             </a:r>
-            <a:endParaRPr lang="en-US" sz="1000" dirty="0"/>
+            <a:endParaRPr lang="en-US" sz="1200" dirty="0"/>
           </a:p>
         </p:txBody>
       </p:sp>
@@ -4810,14 +4858,14 @@
               <a:buNone/>
             </a:pPr>
             <a:r>
-              <a:rPr lang="en-US" sz="1000" dirty="0">
+              <a:rPr lang="en-US" sz="1200" dirty="0">
                 <a:solidFill>
                   <a:srgbClr val="8A9BB0"/>
                 </a:solidFill>
               </a:rPr>
               <a:t>0.970</a:t>
             </a:r>
-            <a:endParaRPr lang="en-US" sz="1000" dirty="0"/>
+            <a:endParaRPr lang="en-US" sz="1200" dirty="0"/>
           </a:p>
         </p:txBody>
       </p:sp>
@@ -4846,14 +4894,10 @@
               <a:buNone/>
             </a:pPr>
             <a:r>
-              <a:rPr lang="en-US" sz="800" i="1" dirty="0">
-                <a:solidFill>
-                  <a:srgbClr val="8A9BB0"/>
-                </a:solidFill>
-              </a:rPr>
+              <a:rPr lang="en-US" sz="1200" i="1" dirty="0"/>
               <a:t>CIDEr / Distinct-2</a:t>
             </a:r>
-            <a:endParaRPr lang="en-US" sz="800" dirty="0"/>
+            <a:endParaRPr lang="en-US" sz="1200" dirty="0"/>
           </a:p>
         </p:txBody>
       </p:sp>
@@ -4885,7 +4929,7 @@
           <a:bodyPr/>
           <a:lstStyle/>
           <a:p>
-            <a:endParaRPr lang="en-US"/>
+            <a:endParaRPr lang="en-US" sz="1200"/>
           </a:p>
         </p:txBody>
       </p:sp>
@@ -4914,14 +4958,14 @@
               <a:buNone/>
             </a:pPr>
             <a:r>
-              <a:rPr lang="en-US" sz="900" b="1" dirty="0">
+              <a:rPr lang="en-US" sz="1400" b="1" dirty="0">
                 <a:solidFill>
                   <a:srgbClr val="FFFFFF"/>
                 </a:solidFill>
               </a:rPr>
               <a:t>Use t=0.3 for accuracy, t=0.5 for diversity</a:t>
             </a:r>
-            <a:endParaRPr lang="en-US" sz="900" dirty="0"/>
+            <a:endParaRPr lang="en-US" sz="1400" dirty="0"/>
           </a:p>
         </p:txBody>
       </p:sp>
@@ -4983,14 +5027,14 @@
               <a:buNone/>
             </a:pPr>
             <a:r>
-              <a:rPr lang="en-US" sz="900" dirty="0">
+              <a:rPr lang="en-US" sz="1600" dirty="0">
                 <a:solidFill>
                   <a:srgbClr val="8A9BB0"/>
                 </a:solidFill>
               </a:rPr>
               <a:t>12</a:t>
             </a:r>
-            <a:endParaRPr lang="en-US" sz="900" dirty="0"/>
+            <a:endParaRPr lang="en-US" sz="1600" dirty="0"/>
           </a:p>
         </p:txBody>
       </p:sp>
@@ -5051,53 +5095,14 @@
               <a:buNone/>
             </a:pPr>
             <a:r>
-              <a:rPr lang="en-US" sz="800" b="1" dirty="0">
+              <a:rPr lang="en-US" sz="1600" b="1" dirty="0">
                 <a:solidFill>
                   <a:srgbClr val="FFFFFF"/>
                 </a:solidFill>
               </a:rPr>
               <a:t>06 FINDINGS</a:t>
             </a:r>
-            <a:endParaRPr lang="en-US" sz="800" dirty="0"/>
-          </a:p>
-        </p:txBody>
-      </p:sp>
-      <p:sp>
-        <p:nvSpPr>
-          <p:cNvPr id="5" name="Text 3"/>
-          <p:cNvSpPr/>
-          <p:nvPr/>
-        </p:nvSpPr>
-        <p:spPr>
-          <a:xfrm>
-            <a:off x="457200" y="228600"/>
-            <a:ext cx="8229600" cy="640080"/>
-          </a:xfrm>
-          <a:prstGeom prst="rect">
-            <a:avLst/>
-          </a:prstGeom>
-          <a:noFill/>
-          <a:ln/>
-        </p:spPr>
-        <p:txBody>
-          <a:bodyPr wrap="square" lIns="0" tIns="0" rIns="0" bIns="0" rtlCol="0" anchor="ctr"/>
-          <a:lstStyle/>
-          <a:p>
-            <a:pPr marL="0" indent="0" algn="l">
-              <a:buNone/>
-            </a:pPr>
-            <a:r>
-              <a:rPr lang="en-US" sz="3000" b="1" dirty="0">
-                <a:solidFill>
-                  <a:srgbClr val="FFFFFF"/>
-                </a:solidFill>
-                <a:latin typeface="Calibri" pitchFamily="34" charset="0"/>
-                <a:ea typeface="Calibri" pitchFamily="34" charset="-122"/>
-                <a:cs typeface="Calibri" pitchFamily="34" charset="-120"/>
-              </a:rPr>
-              <a:t>Key Findings</a:t>
-            </a:r>
-            <a:endParaRPr lang="en-US" sz="3000" dirty="0"/>
+            <a:endParaRPr lang="en-US" sz="1600" dirty="0"/>
           </a:p>
         </p:txBody>
       </p:sp>
@@ -5136,7 +5141,7 @@
           <a:bodyPr/>
           <a:lstStyle/>
           <a:p>
-            <a:endParaRPr lang="en-US"/>
+            <a:endParaRPr lang="en-US" sz="1600"/>
           </a:p>
         </p:txBody>
       </p:sp>
@@ -5168,7 +5173,7 @@
           <a:bodyPr/>
           <a:lstStyle/>
           <a:p>
-            <a:endParaRPr lang="en-US"/>
+            <a:endParaRPr lang="en-US" sz="1600"/>
           </a:p>
         </p:txBody>
       </p:sp>
@@ -5197,14 +5202,14 @@
               <a:buNone/>
             </a:pPr>
             <a:r>
-              <a:rPr lang="en-US" sz="2000" b="1" dirty="0">
+              <a:rPr lang="en-US" sz="2200" b="1" dirty="0">
                 <a:solidFill>
                   <a:srgbClr val="FFFFFF"/>
                 </a:solidFill>
               </a:rPr>
               <a:t>01</a:t>
             </a:r>
-            <a:endParaRPr lang="en-US" sz="2000" dirty="0"/>
+            <a:endParaRPr lang="en-US" sz="2200" dirty="0"/>
           </a:p>
         </p:txBody>
       </p:sp>
@@ -5236,7 +5241,7 @@
           <a:bodyPr/>
           <a:lstStyle/>
           <a:p>
-            <a:endParaRPr lang="en-US"/>
+            <a:endParaRPr lang="en-US" sz="1600"/>
           </a:p>
         </p:txBody>
       </p:sp>
@@ -5265,14 +5270,14 @@
               <a:buNone/>
             </a:pPr>
             <a:r>
-              <a:rPr lang="en-US" sz="900" b="1" dirty="0">
+              <a:rPr lang="en-US" sz="1400" b="1" dirty="0">
                 <a:solidFill>
                   <a:srgbClr val="FFFFFF"/>
                 </a:solidFill>
               </a:rPr>
               <a:t>CIDEr 0.9364</a:t>
             </a:r>
-            <a:endParaRPr lang="en-US" sz="900" dirty="0"/>
+            <a:endParaRPr lang="en-US" sz="1400" dirty="0"/>
           </a:p>
         </p:txBody>
       </p:sp>
@@ -5301,28 +5306,28 @@
               <a:buNone/>
             </a:pPr>
             <a:r>
-              <a:rPr lang="en-US" sz="1200" b="1" dirty="0">
+              <a:rPr lang="en-US" sz="1600" b="1" dirty="0">
                 <a:solidFill>
                   <a:srgbClr val="FFFFFF"/>
                 </a:solidFill>
               </a:rPr>
               <a:t>Prefix conditioning works</a:t>
             </a:r>
-            <a:endParaRPr lang="en-US" sz="1200" dirty="0"/>
+            <a:endParaRPr lang="en-US" sz="1600" dirty="0"/>
           </a:p>
           <a:p>
             <a:pPr marL="0" indent="0">
               <a:buNone/>
             </a:pPr>
             <a:r>
-              <a:rPr lang="en-US" sz="1200" b="1" dirty="0">
+              <a:rPr lang="en-US" sz="1600" b="1" dirty="0">
                 <a:solidFill>
                   <a:srgbClr val="FFFFFF"/>
                 </a:solidFill>
               </a:rPr>
               <a:t>without LM fine-tuning</a:t>
             </a:r>
-            <a:endParaRPr lang="en-US" sz="1200" dirty="0"/>
+            <a:endParaRPr lang="en-US" sz="1600" dirty="0"/>
           </a:p>
         </p:txBody>
       </p:sp>
@@ -5351,14 +5356,14 @@
               <a:buNone/>
             </a:pPr>
             <a:r>
-              <a:rPr lang="en-US" sz="1000" dirty="0">
+              <a:rPr lang="en-US" sz="1400" dirty="0">
                 <a:solidFill>
                   <a:srgbClr val="DCE5EF"/>
                 </a:solidFill>
               </a:rPr>
               <a:t>Frozen/Beam matches FT-4L/Beam exactly. ProjectionHead alone provides sufficient visual conditioning on 118K images.</a:t>
             </a:r>
-            <a:endParaRPr lang="en-US" sz="1000" dirty="0"/>
+            <a:endParaRPr lang="en-US" sz="1400" dirty="0"/>
           </a:p>
         </p:txBody>
       </p:sp>
@@ -5397,7 +5402,7 @@
           <a:bodyPr/>
           <a:lstStyle/>
           <a:p>
-            <a:endParaRPr lang="en-US"/>
+            <a:endParaRPr lang="en-US" sz="1600"/>
           </a:p>
         </p:txBody>
       </p:sp>
@@ -5429,7 +5434,7 @@
           <a:bodyPr/>
           <a:lstStyle/>
           <a:p>
-            <a:endParaRPr lang="en-US"/>
+            <a:endParaRPr lang="en-US" sz="1600"/>
           </a:p>
         </p:txBody>
       </p:sp>
@@ -5458,14 +5463,14 @@
               <a:buNone/>
             </a:pPr>
             <a:r>
-              <a:rPr lang="en-US" sz="2000" b="1" dirty="0">
+              <a:rPr lang="en-US" sz="2200" b="1" dirty="0">
                 <a:solidFill>
                   <a:srgbClr val="FFFFFF"/>
                 </a:solidFill>
               </a:rPr>
               <a:t>02</a:t>
             </a:r>
-            <a:endParaRPr lang="en-US" sz="2000" dirty="0"/>
+            <a:endParaRPr lang="en-US" sz="2200" dirty="0"/>
           </a:p>
         </p:txBody>
       </p:sp>
@@ -5477,8 +5482,8 @@
         </p:nvSpPr>
         <p:spPr>
           <a:xfrm>
-            <a:off x="7818120" y="1115568"/>
-            <a:ext cx="1024128" cy="310896"/>
+            <a:off x="7818120" y="1074624"/>
+            <a:ext cx="1024128" cy="429768"/>
           </a:xfrm>
           <a:prstGeom prst="rect">
             <a:avLst/>
@@ -5497,7 +5502,7 @@
           <a:bodyPr/>
           <a:lstStyle/>
           <a:p>
-            <a:endParaRPr lang="en-US"/>
+            <a:endParaRPr lang="en-US" sz="1600"/>
           </a:p>
         </p:txBody>
       </p:sp>
@@ -5526,14 +5531,14 @@
               <a:buNone/>
             </a:pPr>
             <a:r>
-              <a:rPr lang="en-US" sz="900" b="1" dirty="0">
+              <a:rPr lang="en-US" sz="1400" b="1" dirty="0">
                 <a:solidFill>
                   <a:srgbClr val="FFFFFF"/>
                 </a:solidFill>
               </a:rPr>
               <a:t>+12% vs Greedy</a:t>
             </a:r>
-            <a:endParaRPr lang="en-US" sz="900" dirty="0"/>
+            <a:endParaRPr lang="en-US" sz="1400" dirty="0"/>
           </a:p>
         </p:txBody>
       </p:sp>
@@ -5562,28 +5567,28 @@
               <a:buNone/>
             </a:pPr>
             <a:r>
-              <a:rPr lang="en-US" sz="1200" b="1" dirty="0">
+              <a:rPr lang="en-US" sz="1600" b="1" dirty="0">
                 <a:solidFill>
                   <a:srgbClr val="FFFFFF"/>
                 </a:solidFill>
               </a:rPr>
               <a:t>Beam search wins on all</a:t>
             </a:r>
-            <a:endParaRPr lang="en-US" sz="1200" dirty="0"/>
+            <a:endParaRPr lang="en-US" sz="1600" dirty="0"/>
           </a:p>
           <a:p>
             <a:pPr marL="0" indent="0">
               <a:buNone/>
             </a:pPr>
             <a:r>
-              <a:rPr lang="en-US" sz="1200" b="1" dirty="0">
+              <a:rPr lang="en-US" sz="1600" b="1" dirty="0">
                 <a:solidFill>
                   <a:srgbClr val="FFFFFF"/>
                 </a:solidFill>
               </a:rPr>
               <a:t>accuracy metrics</a:t>
             </a:r>
-            <a:endParaRPr lang="en-US" sz="1200" dirty="0"/>
+            <a:endParaRPr lang="en-US" sz="1600" dirty="0"/>
           </a:p>
         </p:txBody>
       </p:sp>
@@ -5612,14 +5617,14 @@
               <a:buNone/>
             </a:pPr>
             <a:r>
-              <a:rPr lang="en-US" sz="1000" dirty="0">
+              <a:rPr lang="en-US" sz="1400" dirty="0">
                 <a:solidFill>
                   <a:srgbClr val="DCE5EF"/>
                 </a:solidFill>
               </a:rPr>
               <a:t>Beam search outperforms greedy and nucleus across all 3 models. Gap is largest for LoRA (+12.4% CIDEr).</a:t>
             </a:r>
-            <a:endParaRPr lang="en-US" sz="1000" dirty="0"/>
+            <a:endParaRPr lang="en-US" sz="1400" dirty="0"/>
           </a:p>
         </p:txBody>
       </p:sp>
@@ -5658,7 +5663,7 @@
           <a:bodyPr/>
           <a:lstStyle/>
           <a:p>
-            <a:endParaRPr lang="en-US"/>
+            <a:endParaRPr lang="en-US" sz="1600"/>
           </a:p>
         </p:txBody>
       </p:sp>
@@ -5690,7 +5695,7 @@
           <a:bodyPr/>
           <a:lstStyle/>
           <a:p>
-            <a:endParaRPr lang="en-US"/>
+            <a:endParaRPr lang="en-US" sz="1600" dirty="0"/>
           </a:p>
         </p:txBody>
       </p:sp>
@@ -5719,14 +5724,14 @@
               <a:buNone/>
             </a:pPr>
             <a:r>
-              <a:rPr lang="en-US" sz="2000" b="1" dirty="0">
+              <a:rPr lang="en-US" sz="2200" b="1" dirty="0">
                 <a:solidFill>
                   <a:srgbClr val="FFFFFF"/>
                 </a:solidFill>
               </a:rPr>
               <a:t>03</a:t>
             </a:r>
-            <a:endParaRPr lang="en-US" sz="2000" dirty="0"/>
+            <a:endParaRPr lang="en-US" sz="2200" dirty="0"/>
           </a:p>
         </p:txBody>
       </p:sp>
@@ -5758,7 +5763,7 @@
           <a:bodyPr/>
           <a:lstStyle/>
           <a:p>
-            <a:endParaRPr lang="en-US"/>
+            <a:endParaRPr lang="en-US" sz="1600"/>
           </a:p>
         </p:txBody>
       </p:sp>
@@ -5787,14 +5792,14 @@
               <a:buNone/>
             </a:pPr>
             <a:r>
-              <a:rPr lang="en-US" sz="900" b="1" dirty="0">
+              <a:rPr lang="en-US" sz="1400" b="1" dirty="0">
                 <a:solidFill>
                   <a:srgbClr val="FFFFFF"/>
                 </a:solidFill>
               </a:rPr>
               <a:t>w=5 on COCO</a:t>
             </a:r>
-            <a:endParaRPr lang="en-US" sz="900" dirty="0"/>
+            <a:endParaRPr lang="en-US" sz="1400" dirty="0"/>
           </a:p>
         </p:txBody>
       </p:sp>
@@ -5823,28 +5828,28 @@
               <a:buNone/>
             </a:pPr>
             <a:r>
-              <a:rPr lang="en-US" sz="1200" b="1" dirty="0">
+              <a:rPr lang="en-US" sz="1600" b="1" dirty="0">
                 <a:solidFill>
                   <a:srgbClr val="FFFFFF"/>
                 </a:solidFill>
               </a:rPr>
               <a:t>Optimal beam width is</a:t>
             </a:r>
-            <a:endParaRPr lang="en-US" sz="1200" dirty="0"/>
+            <a:endParaRPr lang="en-US" sz="1600" dirty="0"/>
           </a:p>
           <a:p>
             <a:pPr marL="0" indent="0">
               <a:buNone/>
             </a:pPr>
             <a:r>
-              <a:rPr lang="en-US" sz="1200" b="1" dirty="0">
+              <a:rPr lang="en-US" sz="1600" b="1" dirty="0">
                 <a:solidFill>
                   <a:srgbClr val="FFFFFF"/>
                 </a:solidFill>
               </a:rPr>
               <a:t>dataset-dependent</a:t>
             </a:r>
-            <a:endParaRPr lang="en-US" sz="1200" dirty="0"/>
+            <a:endParaRPr lang="en-US" sz="1600" dirty="0"/>
           </a:p>
         </p:txBody>
       </p:sp>
@@ -5873,14 +5878,14 @@
               <a:buNone/>
             </a:pPr>
             <a:r>
-              <a:rPr lang="en-US" sz="1000" dirty="0">
+              <a:rPr lang="en-US" sz="1400" dirty="0">
                 <a:solidFill>
                   <a:srgbClr val="DCE5EF"/>
                 </a:solidFill>
               </a:rPr>
               <a:t>w=5 peaks on COCO vs. w=8 on Flickr30k. Tune on a held-out validation set, not fixed heuristics.</a:t>
             </a:r>
-            <a:endParaRPr lang="en-US" sz="1000" dirty="0"/>
+            <a:endParaRPr lang="en-US" sz="1400" dirty="0"/>
           </a:p>
         </p:txBody>
       </p:sp>
@@ -5919,7 +5924,7 @@
           <a:bodyPr/>
           <a:lstStyle/>
           <a:p>
-            <a:endParaRPr lang="en-US"/>
+            <a:endParaRPr lang="en-US" sz="1600"/>
           </a:p>
         </p:txBody>
       </p:sp>
@@ -5951,7 +5956,7 @@
           <a:bodyPr/>
           <a:lstStyle/>
           <a:p>
-            <a:endParaRPr lang="en-US"/>
+            <a:endParaRPr lang="en-US" sz="1600"/>
           </a:p>
         </p:txBody>
       </p:sp>
@@ -5980,14 +5985,14 @@
               <a:buNone/>
             </a:pPr>
             <a:r>
-              <a:rPr lang="en-US" sz="2000" b="1" dirty="0">
+              <a:rPr lang="en-US" sz="2200" b="1" dirty="0">
                 <a:solidFill>
                   <a:srgbClr val="FFFFFF"/>
                 </a:solidFill>
               </a:rPr>
               <a:t>04</a:t>
             </a:r>
-            <a:endParaRPr lang="en-US" sz="2000" dirty="0"/>
+            <a:endParaRPr lang="en-US" sz="2200" dirty="0"/>
           </a:p>
         </p:txBody>
       </p:sp>
@@ -5999,8 +6004,8 @@
         </p:nvSpPr>
         <p:spPr>
           <a:xfrm>
-            <a:off x="7818120" y="3127248"/>
-            <a:ext cx="1024128" cy="310896"/>
+            <a:off x="7818120" y="3072656"/>
+            <a:ext cx="1024128" cy="438912"/>
           </a:xfrm>
           <a:prstGeom prst="rect">
             <a:avLst/>
@@ -6019,7 +6024,7 @@
           <a:bodyPr/>
           <a:lstStyle/>
           <a:p>
-            <a:endParaRPr lang="en-US"/>
+            <a:endParaRPr lang="en-US" sz="1600"/>
           </a:p>
         </p:txBody>
       </p:sp>
@@ -6048,14 +6053,14 @@
               <a:buNone/>
             </a:pPr>
             <a:r>
-              <a:rPr lang="en-US" sz="900" b="1" dirty="0">
+              <a:rPr lang="en-US" sz="1400" b="1" dirty="0">
                 <a:solidFill>
                   <a:srgbClr val="FFFFFF"/>
                 </a:solidFill>
               </a:rPr>
               <a:t>CIDEr: 0.46→0.03</a:t>
             </a:r>
-            <a:endParaRPr lang="en-US" sz="900" dirty="0"/>
+            <a:endParaRPr lang="en-US" sz="1400" dirty="0"/>
           </a:p>
         </p:txBody>
       </p:sp>
@@ -6084,28 +6089,28 @@
               <a:buNone/>
             </a:pPr>
             <a:r>
-              <a:rPr lang="en-US" sz="1200" b="1" dirty="0">
+              <a:rPr lang="en-US" sz="1600" b="1" dirty="0">
                 <a:solidFill>
                   <a:srgbClr val="FFFFFF"/>
                 </a:solidFill>
               </a:rPr>
               <a:t>Temperature degrades</a:t>
             </a:r>
-            <a:endParaRPr lang="en-US" sz="1200" dirty="0"/>
+            <a:endParaRPr lang="en-US" sz="1600" dirty="0"/>
           </a:p>
           <a:p>
             <a:pPr marL="0" indent="0">
               <a:buNone/>
             </a:pPr>
             <a:r>
-              <a:rPr lang="en-US" sz="1200" b="1" dirty="0">
+              <a:rPr lang="en-US" sz="1600" b="1" dirty="0">
                 <a:solidFill>
                   <a:srgbClr val="FFFFFF"/>
                 </a:solidFill>
               </a:rPr>
               <a:t>accuracy monotonically</a:t>
             </a:r>
-            <a:endParaRPr lang="en-US" sz="1200" dirty="0"/>
+            <a:endParaRPr lang="en-US" sz="1600" dirty="0"/>
           </a:p>
         </p:txBody>
       </p:sp>
@@ -6134,14 +6139,14 @@
               <a:buNone/>
             </a:pPr>
             <a:r>
-              <a:rPr lang="en-US" sz="1000" dirty="0">
+              <a:rPr lang="en-US" sz="1400" dirty="0">
                 <a:solidFill>
                   <a:srgbClr val="DCE5EF"/>
                 </a:solidFill>
               </a:rPr>
               <a:t>CIDEr drops from 0.46 at t=0.3 to 0.03 at t=1.2. Diversity rises proportionally. Use t=0.3 for factual captioning.</a:t>
             </a:r>
-            <a:endParaRPr lang="en-US" sz="1000" dirty="0"/>
+            <a:endParaRPr lang="en-US" sz="1400" dirty="0"/>
           </a:p>
         </p:txBody>
       </p:sp>
@@ -6242,7 +6247,7 @@
           <a:bodyPr/>
           <a:lstStyle/>
           <a:p>
-            <a:endParaRPr lang="en-US"/>
+            <a:endParaRPr lang="en-US" sz="1600" dirty="0"/>
           </a:p>
         </p:txBody>
       </p:sp>
@@ -6271,14 +6276,14 @@
               <a:buNone/>
             </a:pPr>
             <a:r>
-              <a:rPr lang="en-US" sz="800" b="1" dirty="0">
+              <a:rPr lang="en-US" sz="1600" b="1" dirty="0">
                 <a:solidFill>
                   <a:srgbClr val="FFFFFF"/>
                 </a:solidFill>
               </a:rPr>
               <a:t>07 ETHICS</a:t>
             </a:r>
-            <a:endParaRPr lang="en-US" sz="800" dirty="0"/>
+            <a:endParaRPr lang="en-US" sz="1600" dirty="0"/>
           </a:p>
         </p:txBody>
       </p:sp>
@@ -6417,14 +6422,14 @@
               <a:buNone/>
             </a:pPr>
             <a:r>
-              <a:rPr lang="en-US" sz="1300" b="1" dirty="0">
+              <a:rPr lang="en-US" sz="1600" b="1" dirty="0">
                 <a:solidFill>
                   <a:srgbClr val="FFFFFF"/>
                 </a:solidFill>
               </a:rPr>
               <a:t>Dataset Bias</a:t>
             </a:r>
-            <a:endParaRPr lang="en-US" sz="1300" dirty="0"/>
+            <a:endParaRPr lang="en-US" sz="1600" dirty="0"/>
           </a:p>
         </p:txBody>
       </p:sp>
@@ -6449,18 +6454,18 @@
           <a:bodyPr wrap="square" rtlCol="0" anchor="ctr"/>
           <a:lstStyle/>
           <a:p>
-            <a:pPr marL="0" indent="0">
-              <a:buNone/>
-            </a:pPr>
-            <a:r>
-              <a:rPr lang="en-US" sz="1050" dirty="0">
+            <a:pPr marL="0" indent="0" algn="just">
+              <a:buNone/>
+            </a:pPr>
+            <a:r>
+              <a:rPr lang="en-US" sz="1200" dirty="0">
                 <a:solidFill>
                   <a:srgbClr val="1C2B3A"/>
                 </a:solidFill>
               </a:rPr>
-              <a:t>COCO was annotated by Mechanical Turk workers with Western, English-speaking demographics. Gender stereotypes and urban-centric scenes are overrepresented. Models may underperform on diverse cultural contexts.</a:t>
-            </a:r>
-            <a:endParaRPr lang="en-US" sz="1050" dirty="0"/>
+              <a:t>COCO was annotated by workers with Western, English-speaking demographics. Gender stereotypes and urban-centric scenes are overrepresented. Models may underperform on diverse cultural contexts.</a:t>
+            </a:r>
+            <a:endParaRPr lang="en-US" sz="1200" dirty="0"/>
           </a:p>
         </p:txBody>
       </p:sp>
@@ -6560,14 +6565,14 @@
               <a:buNone/>
             </a:pPr>
             <a:r>
-              <a:rPr lang="en-US" sz="1300" b="1" dirty="0">
+              <a:rPr lang="en-US" sz="1600" b="1" dirty="0">
                 <a:solidFill>
                   <a:srgbClr val="FFFFFF"/>
                 </a:solidFill>
               </a:rPr>
               <a:t>Misrepresentation Risk</a:t>
             </a:r>
-            <a:endParaRPr lang="en-US" sz="1300" dirty="0"/>
+            <a:endParaRPr lang="en-US" sz="1600" dirty="0"/>
           </a:p>
         </p:txBody>
       </p:sp>
@@ -6596,14 +6601,14 @@
               <a:buNone/>
             </a:pPr>
             <a:r>
-              <a:rPr lang="en-US" sz="1050" dirty="0">
+              <a:rPr lang="en-US" sz="1200" dirty="0">
                 <a:solidFill>
                   <a:srgbClr val="1C2B3A"/>
                 </a:solidFill>
               </a:rPr>
               <a:t>Models generate confident captions even for out-of-distribution images. In accessibility tools (screen reader alt-text), incorrect captions actively mislead visually impaired users. Human review required for high-stakes deployment.</a:t>
             </a:r>
-            <a:endParaRPr lang="en-US" sz="1050" dirty="0"/>
+            <a:endParaRPr lang="en-US" sz="1200" dirty="0"/>
           </a:p>
         </p:txBody>
       </p:sp>
@@ -6703,14 +6708,14 @@
               <a:buNone/>
             </a:pPr>
             <a:r>
-              <a:rPr lang="en-US" sz="1300" b="1" dirty="0">
+              <a:rPr lang="en-US" sz="1600" b="1" dirty="0">
                 <a:solidFill>
                   <a:srgbClr val="FFFFFF"/>
                 </a:solidFill>
               </a:rPr>
               <a:t>Accessibility Value</a:t>
             </a:r>
-            <a:endParaRPr lang="en-US" sz="1300" dirty="0"/>
+            <a:endParaRPr lang="en-US" sz="1600" dirty="0"/>
           </a:p>
         </p:txBody>
       </p:sp>
@@ -6739,14 +6744,14 @@
               <a:buNone/>
             </a:pPr>
             <a:r>
-              <a:rPr lang="en-US" sz="1050" dirty="0">
+              <a:rPr lang="en-US" sz="1200" dirty="0">
                 <a:solidFill>
                   <a:srgbClr val="1C2B3A"/>
                 </a:solidFill>
               </a:rPr>
               <a:t>CIDEr 0.93 on common COCO scenes approaches usable quality for assistive technology. 253 million visually impaired people could benefit from automatic alt-text generation when deployed responsibly.</a:t>
             </a:r>
-            <a:endParaRPr lang="en-US" sz="1050" dirty="0"/>
+            <a:endParaRPr lang="en-US" sz="1200" dirty="0"/>
           </a:p>
         </p:txBody>
       </p:sp>
@@ -6846,14 +6851,14 @@
               <a:buNone/>
             </a:pPr>
             <a:r>
-              <a:rPr lang="en-US" sz="1300" b="1" dirty="0">
+              <a:rPr lang="en-US" sz="1600" b="1" dirty="0">
                 <a:solidFill>
                   <a:srgbClr val="FFFFFF"/>
                 </a:solidFill>
               </a:rPr>
               <a:t>Privacy &amp; Surveillance</a:t>
             </a:r>
-            <a:endParaRPr lang="en-US" sz="1300" dirty="0"/>
+            <a:endParaRPr lang="en-US" sz="1600" dirty="0"/>
           </a:p>
         </p:txBody>
       </p:sp>
@@ -6882,14 +6887,14 @@
               <a:buNone/>
             </a:pPr>
             <a:r>
-              <a:rPr lang="en-US" sz="1050" dirty="0">
+              <a:rPr lang="en-US" sz="1200" dirty="0">
                 <a:solidFill>
                   <a:srgbClr val="1C2B3A"/>
                 </a:solidFill>
               </a:rPr>
               <a:t>Automatic scene description at scale could enable mass surveillance by generating textual logs from camera feeds. Clear governance frameworks and use-case restrictions are required before production deployment.</a:t>
             </a:r>
-            <a:endParaRPr lang="en-US" sz="1050" dirty="0"/>
+            <a:endParaRPr lang="en-US" sz="1200" dirty="0"/>
           </a:p>
         </p:txBody>
       </p:sp>
@@ -7019,14 +7024,14 @@
               <a:buNone/>
             </a:pPr>
             <a:r>
-              <a:rPr lang="en-US" sz="800" b="1" dirty="0">
+              <a:rPr lang="en-US" sz="1600" b="1" dirty="0">
                 <a:solidFill>
                   <a:srgbClr val="FFFFFF"/>
                 </a:solidFill>
               </a:rPr>
               <a:t>DEMO</a:t>
             </a:r>
-            <a:endParaRPr lang="en-US" sz="800" dirty="0"/>
+            <a:endParaRPr lang="en-US" sz="1600" dirty="0"/>
           </a:p>
         </p:txBody>
       </p:sp>
@@ -7051,11 +7056,11 @@
           <a:bodyPr wrap="square" lIns="0" tIns="0" rIns="0" bIns="0" rtlCol="0" anchor="ctr"/>
           <a:lstStyle/>
           <a:p>
-            <a:pPr marL="0" indent="0" algn="l">
-              <a:buNone/>
-            </a:pPr>
-            <a:r>
-              <a:rPr lang="en-US" sz="2600" b="1" dirty="0">
+            <a:pPr marL="0" indent="0" algn="ctr">
+              <a:buNone/>
+            </a:pPr>
+            <a:r>
+              <a:rPr lang="en-US" sz="2600" b="1" dirty="0" err="1">
                 <a:solidFill>
                   <a:srgbClr val="0D1B2A"/>
                 </a:solidFill>
@@ -7063,7 +7068,18 @@
                 <a:ea typeface="Calibri" pitchFamily="34" charset="-122"/>
                 <a:cs typeface="Calibri" pitchFamily="34" charset="-120"/>
               </a:rPr>
-              <a:t>VisCaption — Interactive Web Dashboard</a:t>
+              <a:t>VisCaption</a:t>
+            </a:r>
+            <a:r>
+              <a:rPr lang="en-US" sz="2600" b="1" dirty="0">
+                <a:solidFill>
+                  <a:srgbClr val="0D1B2A"/>
+                </a:solidFill>
+                <a:latin typeface="Calibri" pitchFamily="34" charset="0"/>
+                <a:ea typeface="Calibri" pitchFamily="34" charset="-122"/>
+                <a:cs typeface="Calibri" pitchFamily="34" charset="-120"/>
+              </a:rPr>
+              <a:t>: Interactive Web Dashboard</a:t>
             </a:r>
             <a:endParaRPr lang="en-US" sz="2600" dirty="0"/>
           </a:p>
@@ -7165,14 +7181,14 @@
               <a:buNone/>
             </a:pPr>
             <a:r>
-              <a:rPr lang="en-US" sz="1200" b="1" dirty="0">
+              <a:rPr lang="en-US" sz="1600" b="1" dirty="0">
                 <a:solidFill>
                   <a:srgbClr val="0D1B2A"/>
                 </a:solidFill>
               </a:rPr>
               <a:t>Live Inference</a:t>
             </a:r>
-            <a:endParaRPr lang="en-US" sz="1200" dirty="0"/>
+            <a:endParaRPr lang="en-US" sz="1600" dirty="0"/>
           </a:p>
         </p:txBody>
       </p:sp>
@@ -7201,14 +7217,14 @@
               <a:buNone/>
             </a:pPr>
             <a:r>
-              <a:rPr lang="en-US" sz="1000" dirty="0">
+              <a:rPr lang="en-US" sz="1200" dirty="0">
                 <a:solidFill>
                   <a:srgbClr val="1C2B3A"/>
                 </a:solidFill>
               </a:rPr>
               <a:t>Upload any image, select model and strategy, generate captions in real time with preprocessing pipeline visualization.</a:t>
             </a:r>
-            <a:endParaRPr lang="en-US" sz="1000" dirty="0"/>
+            <a:endParaRPr lang="en-US" sz="1200" dirty="0"/>
           </a:p>
         </p:txBody>
       </p:sp>
@@ -7308,14 +7324,14 @@
               <a:buNone/>
             </a:pPr>
             <a:r>
-              <a:rPr lang="en-US" sz="1200" b="1" dirty="0">
+              <a:rPr lang="en-US" sz="1600" b="1" dirty="0">
                 <a:solidFill>
                   <a:srgbClr val="0D1B2A"/>
                 </a:solidFill>
               </a:rPr>
               <a:t>Dynamic Metrics</a:t>
             </a:r>
-            <a:endParaRPr lang="en-US" sz="1200" dirty="0"/>
+            <a:endParaRPr lang="en-US" sz="1600" dirty="0"/>
           </a:p>
         </p:txBody>
       </p:sp>
@@ -7344,14 +7360,14 @@
               <a:buNone/>
             </a:pPr>
             <a:r>
-              <a:rPr lang="en-US" sz="1000" dirty="0">
+              <a:rPr lang="en-US" sz="1200" dirty="0">
                 <a:solidFill>
                   <a:srgbClr val="1C2B3A"/>
                 </a:solidFill>
               </a:rPr>
               <a:t>No Ground-Truth panel: CLIPScore, Perplexity, Grammar Score computed instantly. GT References panel: BLEU/METEOR/CIDEr.</a:t>
             </a:r>
-            <a:endParaRPr lang="en-US" sz="1000" dirty="0"/>
+            <a:endParaRPr lang="en-US" sz="1200" dirty="0"/>
           </a:p>
         </p:txBody>
       </p:sp>
@@ -7451,14 +7467,14 @@
               <a:buNone/>
             </a:pPr>
             <a:r>
-              <a:rPr lang="en-US" sz="1200" b="1" dirty="0">
+              <a:rPr lang="en-US" sz="1600" b="1" dirty="0">
                 <a:solidFill>
                   <a:srgbClr val="0D1B2A"/>
                 </a:solidFill>
               </a:rPr>
               <a:t>Sensitivity Analysis</a:t>
             </a:r>
-            <a:endParaRPr lang="en-US" sz="1200" dirty="0"/>
+            <a:endParaRPr lang="en-US" sz="1600" dirty="0"/>
           </a:p>
         </p:txBody>
       </p:sp>
@@ -7487,14 +7503,14 @@
               <a:buNone/>
             </a:pPr>
             <a:r>
-              <a:rPr lang="en-US" sz="1000" dirty="0">
+              <a:rPr lang="en-US" sz="1200" dirty="0">
                 <a:solidFill>
                   <a:srgbClr val="1C2B3A"/>
                 </a:solidFill>
               </a:rPr>
               <a:t>Real-time 12-inference sweep on your image. Static COCO 500 charts for beam width and temperature.</a:t>
             </a:r>
-            <a:endParaRPr lang="en-US" sz="1000" dirty="0"/>
+            <a:endParaRPr lang="en-US" sz="1200" dirty="0"/>
           </a:p>
         </p:txBody>
       </p:sp>
@@ -7594,14 +7610,30 @@
               <a:buNone/>
             </a:pPr>
             <a:r>
+              <a:rPr lang="en-US" sz="1600" b="1" dirty="0">
+                <a:solidFill>
+                  <a:srgbClr val="0D1B2A"/>
+                </a:solidFill>
+              </a:rPr>
+              <a:t>Analysis</a:t>
+            </a:r>
+            <a:r>
               <a:rPr lang="en-US" sz="1200" b="1" dirty="0">
                 <a:solidFill>
                   <a:srgbClr val="0D1B2A"/>
                 </a:solidFill>
               </a:rPr>
-              <a:t>Analysis Page</a:t>
-            </a:r>
-            <a:endParaRPr lang="en-US" sz="1200" dirty="0"/>
+              <a:t> </a:t>
+            </a:r>
+            <a:r>
+              <a:rPr lang="en-US" sz="1600" b="1" dirty="0">
+                <a:solidFill>
+                  <a:srgbClr val="0D1B2A"/>
+                </a:solidFill>
+              </a:rPr>
+              <a:t>Page</a:t>
+            </a:r>
+            <a:endParaRPr lang="en-US" sz="1600" dirty="0"/>
           </a:p>
         </p:txBody>
       </p:sp>
@@ -7630,14 +7662,14 @@
               <a:buNone/>
             </a:pPr>
             <a:r>
-              <a:rPr lang="en-US" sz="1000" dirty="0">
+              <a:rPr lang="en-US" sz="1200" dirty="0">
                 <a:solidFill>
                   <a:srgbClr val="1C2B3A"/>
                 </a:solidFill>
               </a:rPr>
               <a:t>Key findings and ethical considerations grounded in COCO 500 evaluation data.</a:t>
             </a:r>
-            <a:endParaRPr lang="en-US" sz="1000" dirty="0"/>
+            <a:endParaRPr lang="en-US" sz="1200" dirty="0"/>
           </a:p>
         </p:txBody>
       </p:sp>
@@ -7705,14 +7737,14 @@
               <a:buNone/>
             </a:pPr>
             <a:r>
-              <a:rPr lang="en-US" sz="1400" b="1" dirty="0">
+              <a:rPr lang="en-US" sz="1600" b="1" dirty="0">
                 <a:solidFill>
                   <a:srgbClr val="F7B731"/>
                 </a:solidFill>
               </a:rPr>
-              <a:t>Launch Demo</a:t>
-            </a:r>
-            <a:endParaRPr lang="en-US" sz="1400" dirty="0"/>
+              <a:t>LAUNCH DEMO</a:t>
+            </a:r>
+            <a:endParaRPr lang="en-US" sz="1600" dirty="0"/>
           </a:p>
         </p:txBody>
       </p:sp>
@@ -7851,91 +7883,9 @@
                   <a:srgbClr val="DCE5EF"/>
                 </a:solidFill>
               </a:rPr>
-              <a:t>Runs on Apple M1 (MPS)</a:t>
+              <a:t>Go ahead….</a:t>
             </a:r>
             <a:endParaRPr lang="en-US" sz="1100" dirty="0"/>
-          </a:p>
-          <a:p>
-            <a:pPr marL="0" indent="0" algn="ctr">
-              <a:buNone/>
-            </a:pPr>
-            <a:r>
-              <a:rPr lang="en-US" sz="1100" dirty="0">
-                <a:solidFill>
-                  <a:srgbClr val="DCE5EF"/>
-                </a:solidFill>
-              </a:rPr>
-              <a:t>Models load in ~30 seconds</a:t>
-            </a:r>
-            <a:endParaRPr lang="en-US" sz="1100" dirty="0"/>
-          </a:p>
-        </p:txBody>
-      </p:sp>
-      <p:sp>
-        <p:nvSpPr>
-          <p:cNvPr id="27" name="Shape 25"/>
-          <p:cNvSpPr/>
-          <p:nvPr/>
-        </p:nvSpPr>
-        <p:spPr>
-          <a:xfrm>
-            <a:off x="365760" y="4663440"/>
-            <a:ext cx="8412480" cy="329184"/>
-          </a:xfrm>
-          <a:prstGeom prst="rect">
-            <a:avLst/>
-          </a:prstGeom>
-          <a:solidFill>
-            <a:srgbClr val="DCE5EF"/>
-          </a:solidFill>
-          <a:ln w="12700">
-            <a:solidFill>
-              <a:srgbClr val="DCE5EF"/>
-            </a:solidFill>
-            <a:prstDash val="solid"/>
-          </a:ln>
-        </p:spPr>
-        <p:txBody>
-          <a:bodyPr/>
-          <a:lstStyle/>
-          <a:p>
-            <a:endParaRPr lang="en-US"/>
-          </a:p>
-        </p:txBody>
-      </p:sp>
-      <p:sp>
-        <p:nvSpPr>
-          <p:cNvPr id="28" name="Text 26"/>
-          <p:cNvSpPr/>
-          <p:nvPr/>
-        </p:nvSpPr>
-        <p:spPr>
-          <a:xfrm>
-            <a:off x="365760" y="4663440"/>
-            <a:ext cx="8412480" cy="329184"/>
-          </a:xfrm>
-          <a:prstGeom prst="rect">
-            <a:avLst/>
-          </a:prstGeom>
-          <a:noFill/>
-          <a:ln/>
-        </p:spPr>
-        <p:txBody>
-          <a:bodyPr wrap="square" lIns="0" tIns="0" rIns="0" bIns="0" rtlCol="0" anchor="ctr"/>
-          <a:lstStyle/>
-          <a:p>
-            <a:pPr marL="0" indent="0" algn="ctr">
-              <a:buNone/>
-            </a:pPr>
-            <a:r>
-              <a:rPr lang="en-US" sz="1000" dirty="0">
-                <a:solidFill>
-                  <a:srgbClr val="8A9BB0"/>
-                </a:solidFill>
-              </a:rPr>
-              <a:t>Stack: PyTorch 2.1  |  Hugging Face Transformers  |  PEFT  |  CLIP ViT-B/32  |  GPT-2 117M  |  Flask  |  Chart.js</a:t>
-            </a:r>
-            <a:endParaRPr lang="en-US" sz="1000" dirty="0"/>
           </a:p>
         </p:txBody>
       </p:sp>
@@ -8119,8 +8069,8 @@
         </p:nvSpPr>
         <p:spPr>
           <a:xfrm>
-            <a:off x="365760" y="1051560"/>
-            <a:ext cx="5029200" cy="822960"/>
+            <a:off x="365760" y="1147096"/>
+            <a:ext cx="8412480" cy="822960"/>
           </a:xfrm>
           <a:prstGeom prst="rect">
             <a:avLst/>
@@ -8136,14 +8086,14 @@
               <a:buNone/>
             </a:pPr>
             <a:r>
-              <a:rPr lang="en-US" sz="1300" i="1" dirty="0">
+              <a:rPr lang="en-US" sz="1400" i="1" dirty="0">
                 <a:solidFill>
                   <a:srgbClr val="DCE5EF"/>
                 </a:solidFill>
               </a:rPr>
               <a:t>Best result: FT-4L / Beam achieves CIDEr 0.9364 on COCO val2017 (500 images). Frozen / Beam ties exactly with 67M fewer parameters, validating prefix conditioning as an effective approach.</a:t>
             </a:r>
-            <a:endParaRPr lang="en-US" sz="1300" dirty="0"/>
+            <a:endParaRPr lang="en-US" sz="1400" dirty="0"/>
           </a:p>
         </p:txBody>
       </p:sp>
@@ -8155,7 +8105,7 @@
         </p:nvSpPr>
         <p:spPr>
           <a:xfrm>
-            <a:off x="365760" y="1920240"/>
+            <a:off x="365760" y="2384272"/>
             <a:ext cx="3657600" cy="320040"/>
           </a:xfrm>
           <a:prstGeom prst="rect">
@@ -8172,14 +8122,14 @@
               <a:buNone/>
             </a:pPr>
             <a:r>
-              <a:rPr lang="en-US" sz="1300" b="1" dirty="0">
+              <a:rPr lang="en-US" sz="1600" b="1" dirty="0">
                 <a:solidFill>
                   <a:srgbClr val="F7B731"/>
                 </a:solidFill>
               </a:rPr>
               <a:t>Future Directions</a:t>
             </a:r>
-            <a:endParaRPr lang="en-US" sz="1300" dirty="0"/>
+            <a:endParaRPr lang="en-US" sz="1600" dirty="0"/>
           </a:p>
         </p:txBody>
       </p:sp>
@@ -8191,8 +8141,8 @@
         </p:nvSpPr>
         <p:spPr>
           <a:xfrm>
-            <a:off x="365760" y="2331720"/>
-            <a:ext cx="4572000" cy="420624"/>
+            <a:off x="2476500" y="2963133"/>
+            <a:ext cx="5013960" cy="420624"/>
           </a:xfrm>
           <a:prstGeom prst="rect">
             <a:avLst/>
@@ -8223,7 +8173,7 @@
         </p:nvSpPr>
         <p:spPr>
           <a:xfrm>
-            <a:off x="365760" y="2331720"/>
+            <a:off x="2476500" y="2963133"/>
             <a:ext cx="54864" cy="420624"/>
           </a:xfrm>
           <a:prstGeom prst="rect">
@@ -8255,31 +8205,28 @@
         </p:nvSpPr>
         <p:spPr>
           <a:xfrm>
-            <a:off x="502920" y="2331720"/>
-            <a:ext cx="4343400" cy="420624"/>
-          </a:xfrm>
-          <a:prstGeom prst="rect">
-            <a:avLst/>
-          </a:prstGeom>
-          <a:noFill/>
-          <a:ln/>
-        </p:spPr>
-        <p:txBody>
-          <a:bodyPr wrap="square" lIns="0" tIns="0" rIns="0" bIns="0" rtlCol="0" anchor="ctr"/>
-          <a:lstStyle/>
-          <a:p>
-            <a:pPr marL="0" indent="0">
-              <a:buNone/>
-            </a:pPr>
-            <a:r>
-              <a:rPr lang="en-US" sz="1050" dirty="0">
+            <a:off x="2613660" y="2963133"/>
+            <a:ext cx="4876800" cy="420624"/>
+          </a:xfrm>
+          <a:prstGeom prst="rect">
+            <a:avLst/>
+          </a:prstGeom>
+          <a:noFill/>
+          <a:ln/>
+        </p:spPr>
+        <p:txBody>
+          <a:bodyPr wrap="square" lIns="0" tIns="0" rIns="0" bIns="0" rtlCol="0" anchor="ctr"/>
+          <a:lstStyle/>
+          <a:p>
+            <a:r>
+              <a:rPr lang="en-US" sz="1200" dirty="0">
                 <a:solidFill>
                   <a:srgbClr val="DCE5EF"/>
                 </a:solidFill>
               </a:rPr>
-              <a:t>Cross-attention conditioning to overcome the 10-token prefix bottleneck</a:t>
-            </a:r>
-            <a:endParaRPr lang="en-US" sz="1050" dirty="0"/>
+              <a:t>Cross-attention conditioning to overcome the 10-token prefix bottleneck -&gt; map GPT-2, like BLIP-2</a:t>
+            </a:r>
+            <a:endParaRPr lang="en-US" sz="1200" dirty="0"/>
           </a:p>
         </p:txBody>
       </p:sp>
@@ -8291,8 +8238,8 @@
         </p:nvSpPr>
         <p:spPr>
           <a:xfrm>
-            <a:off x="365760" y="2843784"/>
-            <a:ext cx="4572000" cy="420624"/>
+            <a:off x="2476500" y="3475197"/>
+            <a:ext cx="5013960" cy="420624"/>
           </a:xfrm>
           <a:prstGeom prst="rect">
             <a:avLst/>
@@ -8323,7 +8270,7 @@
         </p:nvSpPr>
         <p:spPr>
           <a:xfrm>
-            <a:off x="365760" y="2843784"/>
+            <a:off x="2476500" y="3475197"/>
             <a:ext cx="54864" cy="420624"/>
           </a:xfrm>
           <a:prstGeom prst="rect">
@@ -8355,7 +8302,7 @@
         </p:nvSpPr>
         <p:spPr>
           <a:xfrm>
-            <a:off x="502920" y="2843784"/>
+            <a:off x="2613660" y="3475197"/>
             <a:ext cx="4343400" cy="420624"/>
           </a:xfrm>
           <a:prstGeom prst="rect">
@@ -8372,14 +8319,14 @@
               <a:buNone/>
             </a:pPr>
             <a:r>
-              <a:rPr lang="en-US" sz="1050" dirty="0">
+              <a:rPr lang="en-US" sz="1200" dirty="0">
                 <a:solidFill>
                   <a:srgbClr val="DCE5EF"/>
                 </a:solidFill>
               </a:rPr>
               <a:t>Larger CLIP encoder (ViT-L/14, 768-d) for richer visual representation</a:t>
             </a:r>
-            <a:endParaRPr lang="en-US" sz="1050" dirty="0"/>
+            <a:endParaRPr lang="en-US" sz="1200" dirty="0"/>
           </a:p>
         </p:txBody>
       </p:sp>
@@ -8391,8 +8338,8 @@
         </p:nvSpPr>
         <p:spPr>
           <a:xfrm>
-            <a:off x="365760" y="3355848"/>
-            <a:ext cx="4572000" cy="420624"/>
+            <a:off x="2476500" y="3987261"/>
+            <a:ext cx="5013960" cy="420624"/>
           </a:xfrm>
           <a:prstGeom prst="rect">
             <a:avLst/>
@@ -8423,7 +8370,7 @@
         </p:nvSpPr>
         <p:spPr>
           <a:xfrm>
-            <a:off x="365760" y="3355848"/>
+            <a:off x="2476500" y="3987261"/>
             <a:ext cx="54864" cy="420624"/>
           </a:xfrm>
           <a:prstGeom prst="rect">
@@ -8455,615 +8402,28 @@
         </p:nvSpPr>
         <p:spPr>
           <a:xfrm>
-            <a:off x="502920" y="3355848"/>
-            <a:ext cx="4343400" cy="420624"/>
-          </a:xfrm>
-          <a:prstGeom prst="rect">
-            <a:avLst/>
-          </a:prstGeom>
-          <a:noFill/>
-          <a:ln/>
-        </p:spPr>
-        <p:txBody>
-          <a:bodyPr wrap="square" lIns="0" tIns="0" rIns="0" bIns="0" rtlCol="0" anchor="ctr"/>
-          <a:lstStyle/>
-          <a:p>
-            <a:pPr marL="0" indent="0">
-              <a:buNone/>
-            </a:pPr>
-            <a:r>
-              <a:rPr lang="en-US" sz="1050" dirty="0">
+            <a:off x="2613660" y="3987261"/>
+            <a:ext cx="4876800" cy="420624"/>
+          </a:xfrm>
+          <a:prstGeom prst="rect">
+            <a:avLst/>
+          </a:prstGeom>
+          <a:noFill/>
+          <a:ln/>
+        </p:spPr>
+        <p:txBody>
+          <a:bodyPr wrap="square" lIns="0" tIns="0" rIns="0" bIns="0" rtlCol="0" anchor="ctr"/>
+          <a:lstStyle/>
+          <a:p>
+            <a:r>
+              <a:rPr lang="en-US" sz="1200" dirty="0">
                 <a:solidFill>
                   <a:srgbClr val="DCE5EF"/>
                 </a:solidFill>
               </a:rPr>
-              <a:t>Contrastive loss to directly optimize CLIPScore alongside cross-entropy</a:t>
-            </a:r>
-            <a:endParaRPr lang="en-US" sz="1050" dirty="0"/>
-          </a:p>
-        </p:txBody>
-      </p:sp>
-      <p:sp>
-        <p:nvSpPr>
-          <p:cNvPr id="17" name="Shape 15"/>
-          <p:cNvSpPr/>
-          <p:nvPr/>
-        </p:nvSpPr>
-        <p:spPr>
-          <a:xfrm>
-            <a:off x="365760" y="3867912"/>
-            <a:ext cx="4572000" cy="420624"/>
-          </a:xfrm>
-          <a:prstGeom prst="rect">
-            <a:avLst/>
-          </a:prstGeom>
-          <a:solidFill>
-            <a:srgbClr val="0F2537"/>
-          </a:solidFill>
-          <a:ln w="12700">
-            <a:solidFill>
-              <a:srgbClr val="0B6E4F"/>
-            </a:solidFill>
-            <a:prstDash val="solid"/>
-          </a:ln>
-        </p:spPr>
-        <p:txBody>
-          <a:bodyPr/>
-          <a:lstStyle/>
-          <a:p>
-            <a:endParaRPr lang="en-US"/>
-          </a:p>
-        </p:txBody>
-      </p:sp>
-      <p:sp>
-        <p:nvSpPr>
-          <p:cNvPr id="18" name="Shape 16"/>
-          <p:cNvSpPr/>
-          <p:nvPr/>
-        </p:nvSpPr>
-        <p:spPr>
-          <a:xfrm>
-            <a:off x="365760" y="3867912"/>
-            <a:ext cx="54864" cy="420624"/>
-          </a:xfrm>
-          <a:prstGeom prst="rect">
-            <a:avLst/>
-          </a:prstGeom>
-          <a:solidFill>
-            <a:srgbClr val="0B6E4F"/>
-          </a:solidFill>
-          <a:ln w="12700">
-            <a:solidFill>
-              <a:srgbClr val="0B6E4F"/>
-            </a:solidFill>
-            <a:prstDash val="solid"/>
-          </a:ln>
-        </p:spPr>
-        <p:txBody>
-          <a:bodyPr/>
-          <a:lstStyle/>
-          <a:p>
-            <a:endParaRPr lang="en-US"/>
-          </a:p>
-        </p:txBody>
-      </p:sp>
-      <p:sp>
-        <p:nvSpPr>
-          <p:cNvPr id="19" name="Text 17"/>
-          <p:cNvSpPr/>
-          <p:nvPr/>
-        </p:nvSpPr>
-        <p:spPr>
-          <a:xfrm>
-            <a:off x="502920" y="3867912"/>
-            <a:ext cx="4343400" cy="420624"/>
-          </a:xfrm>
-          <a:prstGeom prst="rect">
-            <a:avLst/>
-          </a:prstGeom>
-          <a:noFill/>
-          <a:ln/>
-        </p:spPr>
-        <p:txBody>
-          <a:bodyPr wrap="square" lIns="0" tIns="0" rIns="0" bIns="0" rtlCol="0" anchor="ctr"/>
-          <a:lstStyle/>
-          <a:p>
-            <a:pPr marL="0" indent="0">
-              <a:buNone/>
-            </a:pPr>
-            <a:r>
-              <a:rPr lang="en-US" sz="1050" dirty="0">
-                <a:solidFill>
-                  <a:srgbClr val="DCE5EF"/>
-                </a:solidFill>
-              </a:rPr>
-              <a:t>BLIP-2 / GIT comparison to quantify the architecture performance gap</a:t>
-            </a:r>
-            <a:endParaRPr lang="en-US" sz="1050" dirty="0"/>
-          </a:p>
-        </p:txBody>
-      </p:sp>
-      <p:sp>
-        <p:nvSpPr>
-          <p:cNvPr id="20" name="Shape 18"/>
-          <p:cNvSpPr/>
-          <p:nvPr/>
-        </p:nvSpPr>
-        <p:spPr>
-          <a:xfrm>
-            <a:off x="5669280" y="1051560"/>
-            <a:ext cx="3108960" cy="877824"/>
-          </a:xfrm>
-          <a:prstGeom prst="rect">
-            <a:avLst/>
-          </a:prstGeom>
-          <a:solidFill>
-            <a:srgbClr val="0F2537"/>
-          </a:solidFill>
-          <a:ln w="12700">
-            <a:solidFill>
-              <a:srgbClr val="0B6E4F"/>
-            </a:solidFill>
-            <a:prstDash val="solid"/>
-          </a:ln>
-        </p:spPr>
-        <p:txBody>
-          <a:bodyPr/>
-          <a:lstStyle/>
-          <a:p>
-            <a:endParaRPr lang="en-US"/>
-          </a:p>
-        </p:txBody>
-      </p:sp>
-      <p:sp>
-        <p:nvSpPr>
-          <p:cNvPr id="21" name="Text 19"/>
-          <p:cNvSpPr/>
-          <p:nvPr/>
-        </p:nvSpPr>
-        <p:spPr>
-          <a:xfrm>
-            <a:off x="5669280" y="1088136"/>
-            <a:ext cx="3108960" cy="475488"/>
-          </a:xfrm>
-          <a:prstGeom prst="rect">
-            <a:avLst/>
-          </a:prstGeom>
-          <a:noFill/>
-          <a:ln/>
-        </p:spPr>
-        <p:txBody>
-          <a:bodyPr wrap="square" lIns="0" tIns="0" rIns="0" bIns="0" rtlCol="0" anchor="ctr"/>
-          <a:lstStyle/>
-          <a:p>
-            <a:pPr marL="0" indent="0" algn="ctr">
-              <a:buNone/>
-            </a:pPr>
-            <a:r>
-              <a:rPr lang="en-US" sz="2600" b="1" dirty="0">
-                <a:solidFill>
-                  <a:srgbClr val="F7B731"/>
-                </a:solidFill>
-              </a:rPr>
-              <a:t>0.9364</a:t>
-            </a:r>
-            <a:endParaRPr lang="en-US" sz="2600" dirty="0"/>
-          </a:p>
-        </p:txBody>
-      </p:sp>
-      <p:sp>
-        <p:nvSpPr>
-          <p:cNvPr id="22" name="Text 20"/>
-          <p:cNvSpPr/>
-          <p:nvPr/>
-        </p:nvSpPr>
-        <p:spPr>
-          <a:xfrm>
-            <a:off x="5669280" y="1572768"/>
-            <a:ext cx="3108960" cy="292608"/>
-          </a:xfrm>
-          <a:prstGeom prst="rect">
-            <a:avLst/>
-          </a:prstGeom>
-          <a:noFill/>
-          <a:ln/>
-        </p:spPr>
-        <p:txBody>
-          <a:bodyPr wrap="square" lIns="0" tIns="0" rIns="0" bIns="0" rtlCol="0" anchor="ctr"/>
-          <a:lstStyle/>
-          <a:p>
-            <a:pPr marL="0" indent="0" algn="ctr">
-              <a:buNone/>
-            </a:pPr>
-            <a:r>
-              <a:rPr lang="en-US" sz="1000" dirty="0">
-                <a:solidFill>
-                  <a:srgbClr val="8A9BB0"/>
-                </a:solidFill>
-              </a:rPr>
-              <a:t>CIDEr (Best)</a:t>
-            </a:r>
-            <a:endParaRPr lang="en-US" sz="1000" dirty="0"/>
-          </a:p>
-        </p:txBody>
-      </p:sp>
-      <p:sp>
-        <p:nvSpPr>
-          <p:cNvPr id="23" name="Shape 21"/>
-          <p:cNvSpPr/>
-          <p:nvPr/>
-        </p:nvSpPr>
-        <p:spPr>
-          <a:xfrm>
-            <a:off x="5669280" y="2057400"/>
-            <a:ext cx="3108960" cy="877824"/>
-          </a:xfrm>
-          <a:prstGeom prst="rect">
-            <a:avLst/>
-          </a:prstGeom>
-          <a:solidFill>
-            <a:srgbClr val="0F2537"/>
-          </a:solidFill>
-          <a:ln w="12700">
-            <a:solidFill>
-              <a:srgbClr val="0B6E4F"/>
-            </a:solidFill>
-            <a:prstDash val="solid"/>
-          </a:ln>
-        </p:spPr>
-        <p:txBody>
-          <a:bodyPr/>
-          <a:lstStyle/>
-          <a:p>
-            <a:endParaRPr lang="en-US"/>
-          </a:p>
-        </p:txBody>
-      </p:sp>
-      <p:sp>
-        <p:nvSpPr>
-          <p:cNvPr id="24" name="Text 22"/>
-          <p:cNvSpPr/>
-          <p:nvPr/>
-        </p:nvSpPr>
-        <p:spPr>
-          <a:xfrm>
-            <a:off x="5669280" y="2093976"/>
-            <a:ext cx="3108960" cy="475488"/>
-          </a:xfrm>
-          <a:prstGeom prst="rect">
-            <a:avLst/>
-          </a:prstGeom>
-          <a:noFill/>
-          <a:ln/>
-        </p:spPr>
-        <p:txBody>
-          <a:bodyPr wrap="square" lIns="0" tIns="0" rIns="0" bIns="0" rtlCol="0" anchor="ctr"/>
-          <a:lstStyle/>
-          <a:p>
-            <a:pPr marL="0" indent="0" algn="ctr">
-              <a:buNone/>
-            </a:pPr>
-            <a:r>
-              <a:rPr lang="en-US" sz="2600" b="1" dirty="0">
-                <a:solidFill>
-                  <a:srgbClr val="F7B731"/>
-                </a:solidFill>
-              </a:rPr>
-              <a:t>0.2917</a:t>
-            </a:r>
-            <a:endParaRPr lang="en-US" sz="2600" dirty="0"/>
-          </a:p>
-        </p:txBody>
-      </p:sp>
-      <p:sp>
-        <p:nvSpPr>
-          <p:cNvPr id="25" name="Text 23"/>
-          <p:cNvSpPr/>
-          <p:nvPr/>
-        </p:nvSpPr>
-        <p:spPr>
-          <a:xfrm>
-            <a:off x="5669280" y="2578608"/>
-            <a:ext cx="3108960" cy="292608"/>
-          </a:xfrm>
-          <a:prstGeom prst="rect">
-            <a:avLst/>
-          </a:prstGeom>
-          <a:noFill/>
-          <a:ln/>
-        </p:spPr>
-        <p:txBody>
-          <a:bodyPr wrap="square" lIns="0" tIns="0" rIns="0" bIns="0" rtlCol="0" anchor="ctr"/>
-          <a:lstStyle/>
-          <a:p>
-            <a:pPr marL="0" indent="0" algn="ctr">
-              <a:buNone/>
-            </a:pPr>
-            <a:r>
-              <a:rPr lang="en-US" sz="1000" dirty="0">
-                <a:solidFill>
-                  <a:srgbClr val="8A9BB0"/>
-                </a:solidFill>
-              </a:rPr>
-              <a:t>BLEU-4 (Best)</a:t>
-            </a:r>
-            <a:endParaRPr lang="en-US" sz="1000" dirty="0"/>
-          </a:p>
-        </p:txBody>
-      </p:sp>
-      <p:sp>
-        <p:nvSpPr>
-          <p:cNvPr id="26" name="Shape 24"/>
-          <p:cNvSpPr/>
-          <p:nvPr/>
-        </p:nvSpPr>
-        <p:spPr>
-          <a:xfrm>
-            <a:off x="5669280" y="3063240"/>
-            <a:ext cx="3108960" cy="877824"/>
-          </a:xfrm>
-          <a:prstGeom prst="rect">
-            <a:avLst/>
-          </a:prstGeom>
-          <a:solidFill>
-            <a:srgbClr val="0F2537"/>
-          </a:solidFill>
-          <a:ln w="12700">
-            <a:solidFill>
-              <a:srgbClr val="0B6E4F"/>
-            </a:solidFill>
-            <a:prstDash val="solid"/>
-          </a:ln>
-        </p:spPr>
-        <p:txBody>
-          <a:bodyPr/>
-          <a:lstStyle/>
-          <a:p>
-            <a:endParaRPr lang="en-US"/>
-          </a:p>
-        </p:txBody>
-      </p:sp>
-      <p:sp>
-        <p:nvSpPr>
-          <p:cNvPr id="27" name="Text 25"/>
-          <p:cNvSpPr/>
-          <p:nvPr/>
-        </p:nvSpPr>
-        <p:spPr>
-          <a:xfrm>
-            <a:off x="5669280" y="3099816"/>
-            <a:ext cx="3108960" cy="475488"/>
-          </a:xfrm>
-          <a:prstGeom prst="rect">
-            <a:avLst/>
-          </a:prstGeom>
-          <a:noFill/>
-          <a:ln/>
-        </p:spPr>
-        <p:txBody>
-          <a:bodyPr wrap="square" lIns="0" tIns="0" rIns="0" bIns="0" rtlCol="0" anchor="ctr"/>
-          <a:lstStyle/>
-          <a:p>
-            <a:pPr marL="0" indent="0" algn="ctr">
-              <a:buNone/>
-            </a:pPr>
-            <a:r>
-              <a:rPr lang="en-US" sz="2600" b="1" dirty="0">
-                <a:solidFill>
-                  <a:srgbClr val="F7B731"/>
-                </a:solidFill>
-              </a:rPr>
-              <a:t>w = 5</a:t>
-            </a:r>
-            <a:endParaRPr lang="en-US" sz="2600" dirty="0"/>
-          </a:p>
-        </p:txBody>
-      </p:sp>
-      <p:sp>
-        <p:nvSpPr>
-          <p:cNvPr id="28" name="Text 26"/>
-          <p:cNvSpPr/>
-          <p:nvPr/>
-        </p:nvSpPr>
-        <p:spPr>
-          <a:xfrm>
-            <a:off x="5669280" y="3584448"/>
-            <a:ext cx="3108960" cy="292608"/>
-          </a:xfrm>
-          <a:prstGeom prst="rect">
-            <a:avLst/>
-          </a:prstGeom>
-          <a:noFill/>
-          <a:ln/>
-        </p:spPr>
-        <p:txBody>
-          <a:bodyPr wrap="square" lIns="0" tIns="0" rIns="0" bIns="0" rtlCol="0" anchor="ctr"/>
-          <a:lstStyle/>
-          <a:p>
-            <a:pPr marL="0" indent="0" algn="ctr">
-              <a:buNone/>
-            </a:pPr>
-            <a:r>
-              <a:rPr lang="en-US" sz="1000" dirty="0">
-                <a:solidFill>
-                  <a:srgbClr val="8A9BB0"/>
-                </a:solidFill>
-              </a:rPr>
-              <a:t>Optimal Beam</a:t>
-            </a:r>
-            <a:endParaRPr lang="en-US" sz="1000" dirty="0"/>
-          </a:p>
-        </p:txBody>
-      </p:sp>
-      <p:sp>
-        <p:nvSpPr>
-          <p:cNvPr id="29" name="Shape 27"/>
-          <p:cNvSpPr/>
-          <p:nvPr/>
-        </p:nvSpPr>
-        <p:spPr>
-          <a:xfrm>
-            <a:off x="5669280" y="4069080"/>
-            <a:ext cx="3108960" cy="877824"/>
-          </a:xfrm>
-          <a:prstGeom prst="rect">
-            <a:avLst/>
-          </a:prstGeom>
-          <a:solidFill>
-            <a:srgbClr val="0F2537"/>
-          </a:solidFill>
-          <a:ln w="12700">
-            <a:solidFill>
-              <a:srgbClr val="0B6E4F"/>
-            </a:solidFill>
-            <a:prstDash val="solid"/>
-          </a:ln>
-        </p:spPr>
-        <p:txBody>
-          <a:bodyPr/>
-          <a:lstStyle/>
-          <a:p>
-            <a:endParaRPr lang="en-US"/>
-          </a:p>
-        </p:txBody>
-      </p:sp>
-      <p:sp>
-        <p:nvSpPr>
-          <p:cNvPr id="30" name="Text 28"/>
-          <p:cNvSpPr/>
-          <p:nvPr/>
-        </p:nvSpPr>
-        <p:spPr>
-          <a:xfrm>
-            <a:off x="5669280" y="4105656"/>
-            <a:ext cx="3108960" cy="475488"/>
-          </a:xfrm>
-          <a:prstGeom prst="rect">
-            <a:avLst/>
-          </a:prstGeom>
-          <a:noFill/>
-          <a:ln/>
-        </p:spPr>
-        <p:txBody>
-          <a:bodyPr wrap="square" lIns="0" tIns="0" rIns="0" bIns="0" rtlCol="0" anchor="ctr"/>
-          <a:lstStyle/>
-          <a:p>
-            <a:pPr marL="0" indent="0" algn="ctr">
-              <a:buNone/>
-            </a:pPr>
-            <a:r>
-              <a:rPr lang="en-US" sz="2600" b="1" dirty="0">
-                <a:solidFill>
-                  <a:srgbClr val="F7B731"/>
-                </a:solidFill>
-              </a:rPr>
-              <a:t>t = 0.3</a:t>
-            </a:r>
-            <a:endParaRPr lang="en-US" sz="2600" dirty="0"/>
-          </a:p>
-        </p:txBody>
-      </p:sp>
-      <p:sp>
-        <p:nvSpPr>
-          <p:cNvPr id="31" name="Text 29"/>
-          <p:cNvSpPr/>
-          <p:nvPr/>
-        </p:nvSpPr>
-        <p:spPr>
-          <a:xfrm>
-            <a:off x="5669280" y="4590288"/>
-            <a:ext cx="3108960" cy="292608"/>
-          </a:xfrm>
-          <a:prstGeom prst="rect">
-            <a:avLst/>
-          </a:prstGeom>
-          <a:noFill/>
-          <a:ln/>
-        </p:spPr>
-        <p:txBody>
-          <a:bodyPr wrap="square" lIns="0" tIns="0" rIns="0" bIns="0" rtlCol="0" anchor="ctr"/>
-          <a:lstStyle/>
-          <a:p>
-            <a:pPr marL="0" indent="0" algn="ctr">
-              <a:buNone/>
-            </a:pPr>
-            <a:r>
-              <a:rPr lang="en-US" sz="1000" dirty="0">
-                <a:solidFill>
-                  <a:srgbClr val="8A9BB0"/>
-                </a:solidFill>
-              </a:rPr>
-              <a:t>Optimal Temp</a:t>
-            </a:r>
-            <a:endParaRPr lang="en-US" sz="1000" dirty="0"/>
-          </a:p>
-        </p:txBody>
-      </p:sp>
-      <p:sp>
-        <p:nvSpPr>
-          <p:cNvPr id="32" name="Shape 30"/>
-          <p:cNvSpPr/>
-          <p:nvPr/>
-        </p:nvSpPr>
-        <p:spPr>
-          <a:xfrm>
-            <a:off x="365760" y="4663440"/>
-            <a:ext cx="8412480" cy="347472"/>
-          </a:xfrm>
-          <a:prstGeom prst="rect">
-            <a:avLst/>
-          </a:prstGeom>
-          <a:solidFill>
-            <a:srgbClr val="081522"/>
-          </a:solidFill>
-          <a:ln w="12700">
-            <a:solidFill>
-              <a:srgbClr val="0B6E4F"/>
-            </a:solidFill>
-            <a:prstDash val="solid"/>
-          </a:ln>
-        </p:spPr>
-        <p:txBody>
-          <a:bodyPr/>
-          <a:lstStyle/>
-          <a:p>
-            <a:endParaRPr lang="en-US"/>
-          </a:p>
-        </p:txBody>
-      </p:sp>
-      <p:sp>
-        <p:nvSpPr>
-          <p:cNvPr id="33" name="Text 31"/>
-          <p:cNvSpPr/>
-          <p:nvPr/>
-        </p:nvSpPr>
-        <p:spPr>
-          <a:xfrm>
-            <a:off x="365760" y="4663440"/>
-            <a:ext cx="8412480" cy="347472"/>
-          </a:xfrm>
-          <a:prstGeom prst="rect">
-            <a:avLst/>
-          </a:prstGeom>
-          <a:noFill/>
-          <a:ln/>
-        </p:spPr>
-        <p:txBody>
-          <a:bodyPr wrap="square" lIns="0" tIns="0" rIns="0" bIns="0" rtlCol="0" anchor="ctr"/>
-          <a:lstStyle/>
-          <a:p>
-            <a:pPr marL="0" indent="0" algn="ctr">
-              <a:buNone/>
-            </a:pPr>
-            <a:r>
-              <a:rPr lang="en-US" sz="1000" dirty="0">
-                <a:solidFill>
-                  <a:srgbClr val="8A9BB0"/>
-                </a:solidFill>
-              </a:rPr>
-              <a:t>IE 7615 Deep Learning for AI  |  Group 8  |  Northeastern University  |  Spring 2026</a:t>
-            </a:r>
-            <a:endParaRPr lang="en-US" sz="1000" dirty="0"/>
+              <a:t>BLIP-2 (3.1B, Q-Former) / GIT (680M, Unified Transformer) comparison</a:t>
+            </a:r>
+            <a:endParaRPr lang="en-US" sz="1200" dirty="0"/>
           </a:p>
         </p:txBody>
       </p:sp>
@@ -9300,14 +8660,14 @@
               <a:buNone/>
             </a:pPr>
             <a:r>
-              <a:rPr lang="en-US" sz="1300" b="1" dirty="0">
+              <a:rPr lang="en-US" sz="1400" b="1" dirty="0">
                 <a:solidFill>
                   <a:srgbClr val="FFFFFF"/>
                 </a:solidFill>
               </a:rPr>
               <a:t>Problem &amp; Motivation</a:t>
             </a:r>
-            <a:endParaRPr lang="en-US" sz="1300" dirty="0"/>
+            <a:endParaRPr lang="en-US" sz="1400" dirty="0"/>
           </a:p>
         </p:txBody>
       </p:sp>
@@ -9336,14 +8696,13 @@
               <a:buNone/>
             </a:pPr>
             <a:r>
-              <a:rPr lang="en-US" sz="1000" dirty="0">
-                <a:solidFill>
-                  <a:srgbClr val="8A9BB0"/>
+              <a:rPr lang="en-US" sz="1200" dirty="0">
+                <a:solidFill>
+                  <a:schemeClr val="bg2"/>
                 </a:solidFill>
               </a:rPr>
               <a:t>Why image captioning matters</a:t>
             </a:r>
-            <a:endParaRPr lang="en-US" sz="1000" dirty="0"/>
           </a:p>
         </p:txBody>
       </p:sp>
@@ -9472,14 +8831,14 @@
               <a:buNone/>
             </a:pPr>
             <a:r>
-              <a:rPr lang="en-US" sz="1300" b="1" dirty="0">
+              <a:rPr lang="en-US" sz="1400" b="1" dirty="0">
                 <a:solidFill>
                   <a:srgbClr val="FFFFFF"/>
                 </a:solidFill>
               </a:rPr>
               <a:t>Architecture</a:t>
             </a:r>
-            <a:endParaRPr lang="en-US" sz="1300" dirty="0"/>
+            <a:endParaRPr lang="en-US" sz="1400" dirty="0"/>
           </a:p>
         </p:txBody>
       </p:sp>
@@ -9508,14 +8867,13 @@
               <a:buNone/>
             </a:pPr>
             <a:r>
-              <a:rPr lang="en-US" sz="1000" dirty="0">
-                <a:solidFill>
-                  <a:srgbClr val="8A9BB0"/>
+              <a:rPr lang="en-US" sz="1200" dirty="0">
+                <a:solidFill>
+                  <a:schemeClr val="bg2"/>
                 </a:solidFill>
               </a:rPr>
               <a:t>CLIP + ProjectionHead + GPT-2</a:t>
             </a:r>
-            <a:endParaRPr lang="en-US" sz="1000" dirty="0"/>
           </a:p>
         </p:txBody>
       </p:sp>
@@ -9644,14 +9002,14 @@
               <a:buNone/>
             </a:pPr>
             <a:r>
-              <a:rPr lang="en-US" sz="1300" b="1" dirty="0">
+              <a:rPr lang="en-US" sz="1400" b="1" dirty="0">
                 <a:solidFill>
                   <a:srgbClr val="FFFFFF"/>
                 </a:solidFill>
               </a:rPr>
               <a:t>Fine-Tuning Strategies</a:t>
             </a:r>
-            <a:endParaRPr lang="en-US" sz="1300" dirty="0"/>
+            <a:endParaRPr lang="en-US" sz="1400" dirty="0"/>
           </a:p>
         </p:txBody>
       </p:sp>
@@ -9680,14 +9038,13 @@
               <a:buNone/>
             </a:pPr>
             <a:r>
-              <a:rPr lang="en-US" sz="1000" dirty="0">
-                <a:solidFill>
-                  <a:srgbClr val="8A9BB0"/>
+              <a:rPr lang="en-US" sz="1200" dirty="0">
+                <a:solidFill>
+                  <a:schemeClr val="bg2"/>
                 </a:solidFill>
               </a:rPr>
               <a:t>Frozen vs FT-4L vs LoRA</a:t>
             </a:r>
-            <a:endParaRPr lang="en-US" sz="1000" dirty="0"/>
           </a:p>
         </p:txBody>
       </p:sp>
@@ -9816,14 +9173,14 @@
               <a:buNone/>
             </a:pPr>
             <a:r>
-              <a:rPr lang="en-US" sz="1300" b="1" dirty="0">
+              <a:rPr lang="en-US" sz="1400" b="1" dirty="0">
                 <a:solidFill>
                   <a:srgbClr val="FFFFFF"/>
                 </a:solidFill>
               </a:rPr>
               <a:t>Results</a:t>
             </a:r>
-            <a:endParaRPr lang="en-US" sz="1300" dirty="0"/>
+            <a:endParaRPr lang="en-US" sz="1400" dirty="0"/>
           </a:p>
         </p:txBody>
       </p:sp>
@@ -9852,14 +9209,13 @@
               <a:buNone/>
             </a:pPr>
             <a:r>
-              <a:rPr lang="en-US" sz="1000" dirty="0">
-                <a:solidFill>
-                  <a:srgbClr val="8A9BB0"/>
+              <a:rPr lang="en-US" sz="1200" dirty="0">
+                <a:solidFill>
+                  <a:schemeClr val="bg2"/>
                 </a:solidFill>
               </a:rPr>
               <a:t>COCO 500-image benchmark</a:t>
             </a:r>
-            <a:endParaRPr lang="en-US" sz="1000" dirty="0"/>
           </a:p>
         </p:txBody>
       </p:sp>
@@ -9988,14 +9344,14 @@
               <a:buNone/>
             </a:pPr>
             <a:r>
-              <a:rPr lang="en-US" sz="1300" b="1" dirty="0">
+              <a:rPr lang="en-US" sz="1400" b="1" dirty="0">
                 <a:solidFill>
                   <a:srgbClr val="FFFFFF"/>
                 </a:solidFill>
               </a:rPr>
               <a:t>Sensitivity Analysis</a:t>
             </a:r>
-            <a:endParaRPr lang="en-US" sz="1300" dirty="0"/>
+            <a:endParaRPr lang="en-US" sz="1400" dirty="0"/>
           </a:p>
         </p:txBody>
       </p:sp>
@@ -10024,14 +9380,13 @@
               <a:buNone/>
             </a:pPr>
             <a:r>
-              <a:rPr lang="en-US" sz="1000" dirty="0">
-                <a:solidFill>
-                  <a:srgbClr val="8A9BB0"/>
+              <a:rPr lang="en-US" sz="1200" dirty="0">
+                <a:solidFill>
+                  <a:schemeClr val="bg2"/>
                 </a:solidFill>
               </a:rPr>
               <a:t>Beam width and temperature</a:t>
             </a:r>
-            <a:endParaRPr lang="en-US" sz="1000" dirty="0"/>
           </a:p>
         </p:txBody>
       </p:sp>
@@ -10160,14 +9515,14 @@
               <a:buNone/>
             </a:pPr>
             <a:r>
-              <a:rPr lang="en-US" sz="1300" b="1" dirty="0">
+              <a:rPr lang="en-US" sz="1400" b="1" dirty="0">
                 <a:solidFill>
                   <a:srgbClr val="FFFFFF"/>
                 </a:solidFill>
               </a:rPr>
               <a:t>Key Findings</a:t>
             </a:r>
-            <a:endParaRPr lang="en-US" sz="1300" dirty="0"/>
+            <a:endParaRPr lang="en-US" sz="1400" dirty="0"/>
           </a:p>
         </p:txBody>
       </p:sp>
@@ -10196,14 +9551,13 @@
               <a:buNone/>
             </a:pPr>
             <a:r>
-              <a:rPr lang="en-US" sz="1000" dirty="0">
-                <a:solidFill>
-                  <a:srgbClr val="8A9BB0"/>
+              <a:rPr lang="en-US" sz="1200" dirty="0">
+                <a:solidFill>
+                  <a:schemeClr val="bg2"/>
                 </a:solidFill>
               </a:rPr>
               <a:t>What the numbers tell us</a:t>
             </a:r>
-            <a:endParaRPr lang="en-US" sz="1000" dirty="0"/>
           </a:p>
         </p:txBody>
       </p:sp>
@@ -10332,14 +9686,14 @@
               <a:buNone/>
             </a:pPr>
             <a:r>
-              <a:rPr lang="en-US" sz="1300" b="1" dirty="0">
+              <a:rPr lang="en-US" sz="1400" b="1" dirty="0">
                 <a:solidFill>
                   <a:srgbClr val="FFFFFF"/>
                 </a:solidFill>
               </a:rPr>
               <a:t>Ethical Considerations</a:t>
             </a:r>
-            <a:endParaRPr lang="en-US" sz="1300" dirty="0"/>
+            <a:endParaRPr lang="en-US" sz="1400" dirty="0"/>
           </a:p>
         </p:txBody>
       </p:sp>
@@ -10368,14 +9722,13 @@
               <a:buNone/>
             </a:pPr>
             <a:r>
-              <a:rPr lang="en-US" sz="1000" dirty="0">
-                <a:solidFill>
-                  <a:srgbClr val="8A9BB0"/>
+              <a:rPr lang="en-US" sz="1200" dirty="0">
+                <a:solidFill>
+                  <a:schemeClr val="bg2"/>
                 </a:solidFill>
               </a:rPr>
               <a:t>Bias, risk, and responsibility</a:t>
             </a:r>
-            <a:endParaRPr lang="en-US" sz="1000" dirty="0"/>
           </a:p>
         </p:txBody>
       </p:sp>
@@ -10505,14 +9858,14 @@
               <a:buNone/>
             </a:pPr>
             <a:r>
-              <a:rPr lang="en-US" sz="800" b="1" dirty="0">
+              <a:rPr lang="en-US" sz="1600" b="1" dirty="0">
                 <a:solidFill>
                   <a:srgbClr val="FFFFFF"/>
                 </a:solidFill>
               </a:rPr>
               <a:t>01 MOTIVATION</a:t>
             </a:r>
-            <a:endParaRPr lang="en-US" sz="800" dirty="0"/>
+            <a:endParaRPr lang="en-US" sz="1600" dirty="0"/>
           </a:p>
         </p:txBody>
       </p:sp>
@@ -10655,28 +10008,26 @@
               <a:buNone/>
             </a:pPr>
             <a:r>
-              <a:rPr lang="en-US" sz="1100" dirty="0">
-                <a:solidFill>
-                  <a:srgbClr val="DCE5EF"/>
+              <a:rPr lang="en-US" sz="1400" dirty="0">
+                <a:solidFill>
+                  <a:schemeClr val="bg2"/>
                 </a:solidFill>
               </a:rPr>
               <a:t>visually impaired people</a:t>
             </a:r>
-            <a:endParaRPr lang="en-US" sz="1100" dirty="0"/>
           </a:p>
           <a:p>
             <a:pPr marL="0" indent="0" algn="ctr">
               <a:buNone/>
             </a:pPr>
             <a:r>
-              <a:rPr lang="en-US" sz="1100" dirty="0">
-                <a:solidFill>
-                  <a:srgbClr val="DCE5EF"/>
+              <a:rPr lang="en-US" sz="1400" dirty="0">
+                <a:solidFill>
+                  <a:schemeClr val="bg2"/>
                 </a:solidFill>
               </a:rPr>
               <a:t>globally need alt-text</a:t>
             </a:r>
-            <a:endParaRPr lang="en-US" sz="1100" dirty="0"/>
           </a:p>
         </p:txBody>
       </p:sp>
@@ -10780,28 +10131,26 @@
               <a:buNone/>
             </a:pPr>
             <a:r>
-              <a:rPr lang="en-US" sz="1100" dirty="0">
-                <a:solidFill>
-                  <a:srgbClr val="DCE5EF"/>
+              <a:rPr lang="en-US" sz="1400" dirty="0">
+                <a:solidFill>
+                  <a:schemeClr val="bg2"/>
                 </a:solidFill>
               </a:rPr>
               <a:t>faster content indexing</a:t>
             </a:r>
-            <a:endParaRPr lang="en-US" sz="1100" dirty="0"/>
           </a:p>
           <a:p>
             <a:pPr marL="0" indent="0" algn="ctr">
               <a:buNone/>
             </a:pPr>
             <a:r>
-              <a:rPr lang="en-US" sz="1100" dirty="0">
-                <a:solidFill>
-                  <a:srgbClr val="DCE5EF"/>
+              <a:rPr lang="en-US" sz="1400" dirty="0">
+                <a:solidFill>
+                  <a:schemeClr val="bg2"/>
                 </a:solidFill>
               </a:rPr>
               <a:t>with auto-generated metadata</a:t>
             </a:r>
-            <a:endParaRPr lang="en-US" sz="1100" dirty="0"/>
           </a:p>
         </p:txBody>
       </p:sp>
@@ -10905,28 +10254,26 @@
               <a:buNone/>
             </a:pPr>
             <a:r>
-              <a:rPr lang="en-US" sz="1100" dirty="0">
-                <a:solidFill>
-                  <a:srgbClr val="DCE5EF"/>
+              <a:rPr lang="en-US" sz="1400" dirty="0">
+                <a:solidFill>
+                  <a:schemeClr val="bg2"/>
                 </a:solidFill>
               </a:rPr>
               <a:t>of web images lack</a:t>
             </a:r>
-            <a:endParaRPr lang="en-US" sz="1100" dirty="0"/>
           </a:p>
           <a:p>
             <a:pPr marL="0" indent="0" algn="ctr">
               <a:buNone/>
             </a:pPr>
             <a:r>
-              <a:rPr lang="en-US" sz="1100" dirty="0">
-                <a:solidFill>
-                  <a:srgbClr val="DCE5EF"/>
+              <a:rPr lang="en-US" sz="1400" dirty="0">
+                <a:solidFill>
+                  <a:schemeClr val="bg2"/>
                 </a:solidFill>
               </a:rPr>
               <a:t>accessible descriptions</a:t>
             </a:r>
-            <a:endParaRPr lang="en-US" sz="1100" dirty="0"/>
           </a:p>
         </p:txBody>
       </p:sp>
@@ -11019,14 +10366,14 @@
               <a:buNone/>
             </a:pPr>
             <a:r>
-              <a:rPr lang="en-US" sz="1300" b="1" dirty="0">
+              <a:rPr lang="en-US" sz="1600" b="1" dirty="0">
                 <a:solidFill>
                   <a:srgbClr val="0D1B2A"/>
                 </a:solidFill>
               </a:rPr>
               <a:t>The Task</a:t>
             </a:r>
-            <a:endParaRPr lang="en-US" sz="1300" dirty="0"/>
+            <a:endParaRPr lang="en-US" sz="1600" dirty="0"/>
           </a:p>
         </p:txBody>
       </p:sp>
@@ -11055,14 +10402,14 @@
               <a:buNone/>
             </a:pPr>
             <a:r>
-              <a:rPr lang="en-US" sz="1300" dirty="0">
+              <a:rPr lang="en-US" sz="1400" dirty="0">
                 <a:solidFill>
                   <a:srgbClr val="1C2B3A"/>
                 </a:solidFill>
               </a:rPr>
-              <a:t>Given an arbitrary image, generate a fluent, accurate natural-language description of its content — without any human annotation at inference time.</a:t>
-            </a:r>
-            <a:endParaRPr lang="en-US" sz="1300" dirty="0"/>
+              <a:t>Given an arbitrary image, generate a fluent, accurate natural-language description of its content - without any human annotation at inference time.</a:t>
+            </a:r>
+            <a:endParaRPr lang="en-US" sz="1400" dirty="0"/>
           </a:p>
         </p:txBody>
       </p:sp>
@@ -11192,14 +10539,14 @@
               <a:buNone/>
             </a:pPr>
             <a:r>
-              <a:rPr lang="en-US" sz="800" b="1" dirty="0">
+              <a:rPr lang="en-US" sz="1600" b="1" dirty="0">
                 <a:solidFill>
                   <a:srgbClr val="FFFFFF"/>
                 </a:solidFill>
               </a:rPr>
               <a:t>02 ARCHITECTURE</a:t>
             </a:r>
-            <a:endParaRPr lang="en-US" sz="800" dirty="0"/>
+            <a:endParaRPr lang="en-US" sz="1600" dirty="0"/>
           </a:p>
         </p:txBody>
       </p:sp>
@@ -11251,7 +10598,7 @@
         <p:spPr>
           <a:xfrm>
             <a:off x="274320" y="1261872"/>
-            <a:ext cx="1508760" cy="1325880"/>
+            <a:ext cx="1508760" cy="1435608"/>
           </a:xfrm>
           <a:prstGeom prst="rect">
             <a:avLst/>
@@ -11306,28 +10653,28 @@
               <a:buNone/>
             </a:pPr>
             <a:r>
-              <a:rPr lang="en-US" sz="1300" b="1" dirty="0">
+              <a:rPr lang="en-US" sz="1600" b="1" dirty="0">
                 <a:solidFill>
                   <a:srgbClr val="FFFFFF"/>
                 </a:solidFill>
               </a:rPr>
               <a:t>Image</a:t>
             </a:r>
-            <a:endParaRPr lang="en-US" sz="1300" dirty="0"/>
+            <a:endParaRPr lang="en-US" sz="1600" dirty="0"/>
           </a:p>
           <a:p>
             <a:pPr marL="0" indent="0" algn="ctr">
               <a:buNone/>
             </a:pPr>
             <a:r>
-              <a:rPr lang="en-US" sz="1300" b="1" dirty="0">
+              <a:rPr lang="en-US" sz="1600" b="1" dirty="0">
                 <a:solidFill>
                   <a:srgbClr val="FFFFFF"/>
                 </a:solidFill>
               </a:rPr>
               <a:t>Input</a:t>
             </a:r>
-            <a:endParaRPr lang="en-US" sz="1300" dirty="0"/>
+            <a:endParaRPr lang="en-US" sz="1600" dirty="0"/>
           </a:p>
         </p:txBody>
       </p:sp>
@@ -11356,14 +10703,13 @@
               <a:buNone/>
             </a:pPr>
             <a:r>
-              <a:rPr lang="en-US" sz="900" dirty="0">
-                <a:solidFill>
-                  <a:srgbClr val="DCE5EF"/>
+              <a:rPr lang="en-US" sz="1400" dirty="0">
+                <a:solidFill>
+                  <a:schemeClr val="bg2"/>
                 </a:solidFill>
               </a:rPr>
               <a:t>Any resolution</a:t>
             </a:r>
-            <a:endParaRPr lang="en-US" sz="900" dirty="0"/>
           </a:p>
         </p:txBody>
       </p:sp>
@@ -11408,7 +10754,7 @@
         <p:spPr>
           <a:xfrm>
             <a:off x="1993392" y="1261872"/>
-            <a:ext cx="1508760" cy="1325880"/>
+            <a:ext cx="1508760" cy="1435608"/>
           </a:xfrm>
           <a:prstGeom prst="rect">
             <a:avLst/>
@@ -11463,28 +10809,28 @@
               <a:buNone/>
             </a:pPr>
             <a:r>
-              <a:rPr lang="en-US" sz="1300" b="1" dirty="0">
+              <a:rPr lang="en-US" sz="1600" b="1" dirty="0">
                 <a:solidFill>
                   <a:srgbClr val="FFFFFF"/>
                 </a:solidFill>
               </a:rPr>
               <a:t>CLIP</a:t>
             </a:r>
-            <a:endParaRPr lang="en-US" sz="1300" dirty="0"/>
+            <a:endParaRPr lang="en-US" sz="1600" dirty="0"/>
           </a:p>
           <a:p>
             <a:pPr marL="0" indent="0" algn="ctr">
               <a:buNone/>
             </a:pPr>
             <a:r>
-              <a:rPr lang="en-US" sz="1300" b="1" dirty="0">
+              <a:rPr lang="en-US" sz="1600" b="1" dirty="0">
                 <a:solidFill>
                   <a:srgbClr val="FFFFFF"/>
                 </a:solidFill>
               </a:rPr>
               <a:t>ViT-B/32</a:t>
             </a:r>
-            <a:endParaRPr lang="en-US" sz="1300" dirty="0"/>
+            <a:endParaRPr lang="en-US" sz="1600" dirty="0"/>
           </a:p>
         </p:txBody>
       </p:sp>
@@ -11513,28 +10859,26 @@
               <a:buNone/>
             </a:pPr>
             <a:r>
-              <a:rPr lang="en-US" sz="900" dirty="0">
-                <a:solidFill>
-                  <a:srgbClr val="DCE5EF"/>
+              <a:rPr lang="en-US" sz="1400" dirty="0">
+                <a:solidFill>
+                  <a:schemeClr val="bg2"/>
                 </a:solidFill>
               </a:rPr>
               <a:t>Frozen encoder</a:t>
             </a:r>
-            <a:endParaRPr lang="en-US" sz="900" dirty="0"/>
           </a:p>
           <a:p>
             <a:pPr marL="0" indent="0" algn="ctr">
               <a:buNone/>
             </a:pPr>
             <a:r>
-              <a:rPr lang="en-US" sz="900" dirty="0">
-                <a:solidFill>
-                  <a:srgbClr val="DCE5EF"/>
+              <a:rPr lang="en-US" sz="1400" dirty="0">
+                <a:solidFill>
+                  <a:schemeClr val="bg2"/>
                 </a:solidFill>
               </a:rPr>
               <a:t>512-d embedding</a:t>
             </a:r>
-            <a:endParaRPr lang="en-US" sz="900" dirty="0"/>
           </a:p>
         </p:txBody>
       </p:sp>
@@ -11579,7 +10923,7 @@
         <p:spPr>
           <a:xfrm>
             <a:off x="3712464" y="1261872"/>
-            <a:ext cx="1508760" cy="1325880"/>
+            <a:ext cx="1508760" cy="1435608"/>
           </a:xfrm>
           <a:prstGeom prst="rect">
             <a:avLst/>
@@ -11634,28 +10978,28 @@
               <a:buNone/>
             </a:pPr>
             <a:r>
-              <a:rPr lang="en-US" sz="1300" b="1" dirty="0">
+              <a:rPr lang="en-US" sz="1600" b="1" dirty="0">
                 <a:solidFill>
                   <a:srgbClr val="FFFFFF"/>
                 </a:solidFill>
               </a:rPr>
               <a:t>Projection</a:t>
             </a:r>
-            <a:endParaRPr lang="en-US" sz="1300" dirty="0"/>
+            <a:endParaRPr lang="en-US" sz="1600" dirty="0"/>
           </a:p>
           <a:p>
             <a:pPr marL="0" indent="0" algn="ctr">
               <a:buNone/>
             </a:pPr>
             <a:r>
-              <a:rPr lang="en-US" sz="1300" b="1" dirty="0">
+              <a:rPr lang="en-US" sz="1600" b="1" dirty="0">
                 <a:solidFill>
                   <a:srgbClr val="FFFFFF"/>
                 </a:solidFill>
               </a:rPr>
               <a:t>Head</a:t>
             </a:r>
-            <a:endParaRPr lang="en-US" sz="1300" dirty="0"/>
+            <a:endParaRPr lang="en-US" sz="1600" dirty="0"/>
           </a:p>
         </p:txBody>
       </p:sp>
@@ -11684,28 +11028,26 @@
               <a:buNone/>
             </a:pPr>
             <a:r>
-              <a:rPr lang="en-US" sz="900" dirty="0">
-                <a:solidFill>
-                  <a:srgbClr val="DCE5EF"/>
+              <a:rPr lang="en-US" sz="1400" dirty="0">
+                <a:solidFill>
+                  <a:schemeClr val="bg2"/>
                 </a:solidFill>
               </a:rPr>
               <a:t>2-layer MLP</a:t>
             </a:r>
-            <a:endParaRPr lang="en-US" sz="900" dirty="0"/>
           </a:p>
           <a:p>
             <a:pPr marL="0" indent="0" algn="ctr">
               <a:buNone/>
             </a:pPr>
             <a:r>
-              <a:rPr lang="en-US" sz="900" dirty="0">
-                <a:solidFill>
-                  <a:srgbClr val="DCE5EF"/>
+              <a:rPr lang="en-US" sz="1400" dirty="0">
+                <a:solidFill>
+                  <a:schemeClr val="bg2"/>
                 </a:solidFill>
               </a:rPr>
               <a:t>10 prefix tokens</a:t>
             </a:r>
-            <a:endParaRPr lang="en-US" sz="900" dirty="0"/>
           </a:p>
         </p:txBody>
       </p:sp>
@@ -11750,7 +11092,7 @@
         <p:spPr>
           <a:xfrm>
             <a:off x="5431536" y="1261872"/>
-            <a:ext cx="1508760" cy="1325880"/>
+            <a:ext cx="1508760" cy="1435608"/>
           </a:xfrm>
           <a:prstGeom prst="rect">
             <a:avLst/>
@@ -11805,28 +11147,28 @@
               <a:buNone/>
             </a:pPr>
             <a:r>
-              <a:rPr lang="en-US" sz="1300" b="1" dirty="0">
+              <a:rPr lang="en-US" sz="1600" b="1" dirty="0">
                 <a:solidFill>
                   <a:srgbClr val="FFFFFF"/>
                 </a:solidFill>
               </a:rPr>
               <a:t>GPT-2</a:t>
             </a:r>
-            <a:endParaRPr lang="en-US" sz="1300" dirty="0"/>
+            <a:endParaRPr lang="en-US" sz="1600" dirty="0"/>
           </a:p>
           <a:p>
             <a:pPr marL="0" indent="0" algn="ctr">
               <a:buNone/>
             </a:pPr>
             <a:r>
-              <a:rPr lang="en-US" sz="1300" b="1" dirty="0">
+              <a:rPr lang="en-US" sz="1600" b="1" dirty="0">
                 <a:solidFill>
                   <a:srgbClr val="FFFFFF"/>
                 </a:solidFill>
               </a:rPr>
               <a:t>Decoder</a:t>
             </a:r>
-            <a:endParaRPr lang="en-US" sz="1300" dirty="0"/>
+            <a:endParaRPr lang="en-US" sz="1600" dirty="0"/>
           </a:p>
         </p:txBody>
       </p:sp>
@@ -11855,28 +11197,26 @@
               <a:buNone/>
             </a:pPr>
             <a:r>
-              <a:rPr lang="en-US" sz="900" dirty="0">
-                <a:solidFill>
-                  <a:srgbClr val="DCE5EF"/>
+              <a:rPr lang="en-US" sz="1400" dirty="0">
+                <a:solidFill>
+                  <a:schemeClr val="bg2"/>
                 </a:solidFill>
               </a:rPr>
               <a:t>117M params</a:t>
             </a:r>
-            <a:endParaRPr lang="en-US" sz="900" dirty="0"/>
           </a:p>
           <a:p>
             <a:pPr marL="0" indent="0" algn="ctr">
               <a:buNone/>
             </a:pPr>
             <a:r>
-              <a:rPr lang="en-US" sz="900" dirty="0">
-                <a:solidFill>
-                  <a:srgbClr val="DCE5EF"/>
+              <a:rPr lang="en-US" sz="1400" dirty="0">
+                <a:solidFill>
+                  <a:schemeClr val="bg2"/>
                 </a:solidFill>
               </a:rPr>
               <a:t>Autoregressive</a:t>
             </a:r>
-            <a:endParaRPr lang="en-US" sz="900" dirty="0"/>
           </a:p>
         </p:txBody>
       </p:sp>
@@ -11921,7 +11261,7 @@
         <p:spPr>
           <a:xfrm>
             <a:off x="7150608" y="1261872"/>
-            <a:ext cx="1508760" cy="1325880"/>
+            <a:ext cx="1508760" cy="1435608"/>
           </a:xfrm>
           <a:prstGeom prst="rect">
             <a:avLst/>
@@ -11976,28 +11316,28 @@
               <a:buNone/>
             </a:pPr>
             <a:r>
-              <a:rPr lang="en-US" sz="1300" b="1" dirty="0">
+              <a:rPr lang="en-US" sz="1600" b="1" dirty="0">
                 <a:solidFill>
                   <a:srgbClr val="FFFFFF"/>
                 </a:solidFill>
               </a:rPr>
               <a:t>Caption</a:t>
             </a:r>
-            <a:endParaRPr lang="en-US" sz="1300" dirty="0"/>
+            <a:endParaRPr lang="en-US" sz="1600" dirty="0"/>
           </a:p>
           <a:p>
             <a:pPr marL="0" indent="0" algn="ctr">
               <a:buNone/>
             </a:pPr>
             <a:r>
-              <a:rPr lang="en-US" sz="1300" b="1" dirty="0">
+              <a:rPr lang="en-US" sz="1600" b="1" dirty="0">
                 <a:solidFill>
                   <a:srgbClr val="FFFFFF"/>
                 </a:solidFill>
               </a:rPr>
               <a:t>Output</a:t>
             </a:r>
-            <a:endParaRPr lang="en-US" sz="1300" dirty="0"/>
+            <a:endParaRPr lang="en-US" sz="1600" dirty="0"/>
           </a:p>
         </p:txBody>
       </p:sp>
@@ -12026,28 +11366,26 @@
               <a:buNone/>
             </a:pPr>
             <a:r>
-              <a:rPr lang="en-US" sz="900" dirty="0">
-                <a:solidFill>
-                  <a:srgbClr val="DCE5EF"/>
+              <a:rPr lang="en-US" sz="1400" dirty="0">
+                <a:solidFill>
+                  <a:schemeClr val="bg2"/>
                 </a:solidFill>
               </a:rPr>
               <a:t>Natural language</a:t>
             </a:r>
-            <a:endParaRPr lang="en-US" sz="900" dirty="0"/>
           </a:p>
           <a:p>
             <a:pPr marL="0" indent="0" algn="ctr">
               <a:buNone/>
             </a:pPr>
             <a:r>
-              <a:rPr lang="en-US" sz="900" dirty="0">
-                <a:solidFill>
-                  <a:srgbClr val="DCE5EF"/>
+              <a:rPr lang="en-US" sz="1400" dirty="0">
+                <a:solidFill>
+                  <a:schemeClr val="bg2"/>
                 </a:solidFill>
               </a:rPr>
               <a:t>description</a:t>
             </a:r>
-            <a:endParaRPr lang="en-US" sz="900" dirty="0"/>
           </a:p>
         </p:txBody>
       </p:sp>
@@ -12059,7 +11397,7 @@
         </p:nvSpPr>
         <p:spPr>
           <a:xfrm>
-            <a:off x="1874520" y="987552"/>
+            <a:off x="2267712" y="1057156"/>
             <a:ext cx="914400" cy="201168"/>
           </a:xfrm>
           <a:prstGeom prst="rect">
@@ -12076,14 +11414,14 @@
               <a:buNone/>
             </a:pPr>
             <a:r>
-              <a:rPr lang="en-US" sz="900" b="1" dirty="0">
+              <a:rPr lang="en-US" sz="1200" b="1" dirty="0">
                 <a:solidFill>
                   <a:srgbClr val="0B6E4F"/>
                 </a:solidFill>
               </a:rPr>
               <a:t>512-d</a:t>
             </a:r>
-            <a:endParaRPr lang="en-US" sz="900" dirty="0"/>
+            <a:endParaRPr lang="en-US" sz="1200" dirty="0"/>
           </a:p>
         </p:txBody>
       </p:sp>
@@ -12095,7 +11433,7 @@
         </p:nvSpPr>
         <p:spPr>
           <a:xfrm>
-            <a:off x="3593592" y="987552"/>
+            <a:off x="4021179" y="1042416"/>
             <a:ext cx="914400" cy="201168"/>
           </a:xfrm>
           <a:prstGeom prst="rect">
@@ -12112,14 +11450,14 @@
               <a:buNone/>
             </a:pPr>
             <a:r>
-              <a:rPr lang="en-US" sz="900" b="1" dirty="0">
+              <a:rPr lang="en-US" sz="1200" b="1" dirty="0">
                 <a:solidFill>
                   <a:srgbClr val="0B6E4F"/>
                 </a:solidFill>
               </a:rPr>
               <a:t>10x768</a:t>
             </a:r>
-            <a:endParaRPr lang="en-US" sz="900" dirty="0"/>
+            <a:endParaRPr lang="en-US" sz="1200" dirty="0"/>
           </a:p>
         </p:txBody>
       </p:sp>
@@ -12131,7 +11469,7 @@
         </p:nvSpPr>
         <p:spPr>
           <a:xfrm>
-            <a:off x="5312664" y="987552"/>
+            <a:off x="5728716" y="1042416"/>
             <a:ext cx="914400" cy="201168"/>
           </a:xfrm>
           <a:prstGeom prst="rect">
@@ -12148,14 +11486,14 @@
               <a:buNone/>
             </a:pPr>
             <a:r>
-              <a:rPr lang="en-US" sz="900" b="1" dirty="0">
+              <a:rPr lang="en-US" sz="1200" b="1" dirty="0">
                 <a:solidFill>
                   <a:srgbClr val="0B6E4F"/>
                 </a:solidFill>
               </a:rPr>
               <a:t>50 tokens</a:t>
             </a:r>
-            <a:endParaRPr lang="en-US" sz="900" dirty="0"/>
+            <a:endParaRPr lang="en-US" sz="1200" dirty="0"/>
           </a:p>
         </p:txBody>
       </p:sp>
@@ -12219,7 +11557,7 @@
           <a:bodyPr/>
           <a:lstStyle/>
           <a:p>
-            <a:endParaRPr lang="en-US"/>
+            <a:endParaRPr lang="en-US" sz="1400"/>
           </a:p>
         </p:txBody>
       </p:sp>
@@ -12231,7 +11569,7 @@
         </p:nvSpPr>
         <p:spPr>
           <a:xfrm>
-            <a:off x="548640" y="3090672"/>
+            <a:off x="548640" y="3022432"/>
             <a:ext cx="3657600" cy="292608"/>
           </a:xfrm>
           <a:prstGeom prst="rect">
@@ -12248,14 +11586,14 @@
               <a:buNone/>
             </a:pPr>
             <a:r>
-              <a:rPr lang="en-US" sz="1200" b="1" dirty="0">
+              <a:rPr lang="en-US" sz="1600" b="1" dirty="0">
                 <a:solidFill>
                   <a:srgbClr val="0D1B2A"/>
                 </a:solidFill>
               </a:rPr>
               <a:t>ProjectionHead Detail</a:t>
             </a:r>
-            <a:endParaRPr lang="en-US" sz="1200" dirty="0"/>
+            <a:endParaRPr lang="en-US" sz="1600" dirty="0"/>
           </a:p>
         </p:txBody>
       </p:sp>
@@ -12287,7 +11625,7 @@
           <a:bodyPr/>
           <a:lstStyle/>
           <a:p>
-            <a:endParaRPr lang="en-US"/>
+            <a:endParaRPr lang="en-US" sz="1400"/>
           </a:p>
         </p:txBody>
       </p:sp>
@@ -12316,14 +11654,27 @@
               <a:buNone/>
             </a:pPr>
             <a:r>
-              <a:rPr lang="en-US" sz="850" b="1" dirty="0">
+              <a:rPr lang="en-US" sz="1400" b="1" dirty="0">
                 <a:solidFill>
                   <a:srgbClr val="0B6E4F"/>
                 </a:solidFill>
               </a:rPr>
-              <a:t>Linear(512→7680)</a:t>
-            </a:r>
-            <a:endParaRPr lang="en-US" sz="850" dirty="0"/>
+              <a:t>Linear</a:t>
+            </a:r>
+          </a:p>
+          <a:p>
+            <a:pPr marL="0" indent="0" algn="ctr">
+              <a:buNone/>
+            </a:pPr>
+            <a:r>
+              <a:rPr lang="en-US" sz="1400" b="1" dirty="0">
+                <a:solidFill>
+                  <a:srgbClr val="0B6E4F"/>
+                </a:solidFill>
+              </a:rPr>
+              <a:t>(512→7680)</a:t>
+            </a:r>
+            <a:endParaRPr lang="en-US" sz="1400" dirty="0"/>
           </a:p>
         </p:txBody>
       </p:sp>
@@ -12355,7 +11706,7 @@
           <a:bodyPr/>
           <a:lstStyle/>
           <a:p>
-            <a:endParaRPr lang="en-US"/>
+            <a:endParaRPr lang="en-US" sz="1400"/>
           </a:p>
         </p:txBody>
       </p:sp>
@@ -12387,7 +11738,7 @@
           <a:bodyPr/>
           <a:lstStyle/>
           <a:p>
-            <a:endParaRPr lang="en-US"/>
+            <a:endParaRPr lang="en-US" sz="1400"/>
           </a:p>
         </p:txBody>
       </p:sp>
@@ -12416,14 +11767,14 @@
               <a:buNone/>
             </a:pPr>
             <a:r>
-              <a:rPr lang="en-US" sz="850" b="1" dirty="0">
+              <a:rPr lang="en-US" sz="1400" b="1" dirty="0">
                 <a:solidFill>
                   <a:srgbClr val="0B6E4F"/>
                 </a:solidFill>
               </a:rPr>
               <a:t>GELU Activation</a:t>
             </a:r>
-            <a:endParaRPr lang="en-US" sz="850" dirty="0"/>
+            <a:endParaRPr lang="en-US" sz="1400" dirty="0"/>
           </a:p>
         </p:txBody>
       </p:sp>
@@ -12455,7 +11806,7 @@
           <a:bodyPr/>
           <a:lstStyle/>
           <a:p>
-            <a:endParaRPr lang="en-US"/>
+            <a:endParaRPr lang="en-US" sz="1400"/>
           </a:p>
         </p:txBody>
       </p:sp>
@@ -12487,7 +11838,7 @@
           <a:bodyPr/>
           <a:lstStyle/>
           <a:p>
-            <a:endParaRPr lang="en-US"/>
+            <a:endParaRPr lang="en-US" sz="1400"/>
           </a:p>
         </p:txBody>
       </p:sp>
@@ -12516,14 +11867,27 @@
               <a:buNone/>
             </a:pPr>
             <a:r>
-              <a:rPr lang="en-US" sz="850" b="1" dirty="0">
+              <a:rPr lang="en-US" sz="1400" b="1" dirty="0">
                 <a:solidFill>
                   <a:srgbClr val="0B6E4F"/>
                 </a:solidFill>
               </a:rPr>
-              <a:t>Dropout(p=0.1)</a:t>
-            </a:r>
-            <a:endParaRPr lang="en-US" sz="850" dirty="0"/>
+              <a:t>Dropout</a:t>
+            </a:r>
+          </a:p>
+          <a:p>
+            <a:pPr marL="0" indent="0" algn="ctr">
+              <a:buNone/>
+            </a:pPr>
+            <a:r>
+              <a:rPr lang="en-US" sz="1400" b="1" dirty="0">
+                <a:solidFill>
+                  <a:srgbClr val="0B6E4F"/>
+                </a:solidFill>
+              </a:rPr>
+              <a:t>(p=0.1)</a:t>
+            </a:r>
+            <a:endParaRPr lang="en-US" sz="1400" dirty="0"/>
           </a:p>
         </p:txBody>
       </p:sp>
@@ -12555,7 +11919,7 @@
           <a:bodyPr/>
           <a:lstStyle/>
           <a:p>
-            <a:endParaRPr lang="en-US"/>
+            <a:endParaRPr lang="en-US" sz="1400"/>
           </a:p>
         </p:txBody>
       </p:sp>
@@ -12587,7 +11951,7 @@
           <a:bodyPr/>
           <a:lstStyle/>
           <a:p>
-            <a:endParaRPr lang="en-US"/>
+            <a:endParaRPr lang="en-US" sz="1400"/>
           </a:p>
         </p:txBody>
       </p:sp>
@@ -12616,14 +11980,27 @@
               <a:buNone/>
             </a:pPr>
             <a:r>
-              <a:rPr lang="en-US" sz="850" b="1" dirty="0">
+              <a:rPr lang="en-US" sz="1400" b="1" dirty="0">
                 <a:solidFill>
                   <a:srgbClr val="0B6E4F"/>
                 </a:solidFill>
               </a:rPr>
-              <a:t>Linear(7680→7680)</a:t>
-            </a:r>
-            <a:endParaRPr lang="en-US" sz="850" dirty="0"/>
+              <a:t>Linear</a:t>
+            </a:r>
+          </a:p>
+          <a:p>
+            <a:pPr marL="0" indent="0" algn="ctr">
+              <a:buNone/>
+            </a:pPr>
+            <a:r>
+              <a:rPr lang="en-US" sz="1400" b="1" dirty="0">
+                <a:solidFill>
+                  <a:srgbClr val="0B6E4F"/>
+                </a:solidFill>
+              </a:rPr>
+              <a:t>(7680→7680)</a:t>
+            </a:r>
+            <a:endParaRPr lang="en-US" sz="1400" dirty="0"/>
           </a:p>
         </p:txBody>
       </p:sp>
@@ -12655,7 +12032,7 @@
           <a:bodyPr/>
           <a:lstStyle/>
           <a:p>
-            <a:endParaRPr lang="en-US"/>
+            <a:endParaRPr lang="en-US" sz="1400"/>
           </a:p>
         </p:txBody>
       </p:sp>
@@ -12687,7 +12064,7 @@
           <a:bodyPr/>
           <a:lstStyle/>
           <a:p>
-            <a:endParaRPr lang="en-US"/>
+            <a:endParaRPr lang="en-US" sz="1400"/>
           </a:p>
         </p:txBody>
       </p:sp>
@@ -12716,14 +12093,14 @@
               <a:buNone/>
             </a:pPr>
             <a:r>
-              <a:rPr lang="en-US" sz="850" b="1" dirty="0">
+              <a:rPr lang="en-US" sz="1400" b="1" dirty="0">
                 <a:solidFill>
                   <a:srgbClr val="0B6E4F"/>
                 </a:solidFill>
               </a:rPr>
               <a:t>LayerNorm</a:t>
             </a:r>
-            <a:endParaRPr lang="en-US" sz="850" dirty="0"/>
+            <a:endParaRPr lang="en-US" sz="1400" dirty="0"/>
           </a:p>
         </p:txBody>
       </p:sp>
@@ -12755,7 +12132,7 @@
           <a:bodyPr/>
           <a:lstStyle/>
           <a:p>
-            <a:endParaRPr lang="en-US"/>
+            <a:endParaRPr lang="en-US" sz="1400"/>
           </a:p>
         </p:txBody>
       </p:sp>
@@ -12787,7 +12164,7 @@
           <a:bodyPr/>
           <a:lstStyle/>
           <a:p>
-            <a:endParaRPr lang="en-US"/>
+            <a:endParaRPr lang="en-US" sz="1400" dirty="0"/>
           </a:p>
         </p:txBody>
       </p:sp>
@@ -12816,14 +12193,27 @@
               <a:buNone/>
             </a:pPr>
             <a:r>
-              <a:rPr lang="en-US" sz="850" b="1" dirty="0">
+              <a:rPr lang="en-US" sz="1400" b="1" dirty="0">
                 <a:solidFill>
                   <a:srgbClr val="0B6E4F"/>
                 </a:solidFill>
               </a:rPr>
-              <a:t>Reshape→(10, 768)</a:t>
-            </a:r>
-            <a:endParaRPr lang="en-US" sz="850" dirty="0"/>
+              <a:t>Reshape→</a:t>
+            </a:r>
+          </a:p>
+          <a:p>
+            <a:pPr marL="0" indent="0" algn="ctr">
+              <a:buNone/>
+            </a:pPr>
+            <a:r>
+              <a:rPr lang="en-US" sz="1400" b="1" dirty="0">
+                <a:solidFill>
+                  <a:srgbClr val="0B6E4F"/>
+                </a:solidFill>
+              </a:rPr>
+              <a:t>(10, 768)</a:t>
+            </a:r>
+            <a:endParaRPr lang="en-US" sz="1400" dirty="0"/>
           </a:p>
         </p:txBody>
       </p:sp>
@@ -12852,14 +12242,14 @@
               <a:buNone/>
             </a:pPr>
             <a:r>
-              <a:rPr lang="en-US" sz="1100" i="1" dirty="0">
+              <a:rPr lang="en-US" sz="1400" i="1" dirty="0">
                 <a:solidFill>
                   <a:srgbClr val="1C2B3A"/>
                 </a:solidFill>
               </a:rPr>
               <a:t>Image prefix conditioning: visual context is injected as 10 learnable prefix tokens prepended to GPT-2's input.</a:t>
             </a:r>
-            <a:endParaRPr lang="en-US" sz="1100" dirty="0"/>
+            <a:endParaRPr lang="en-US" sz="1400" dirty="0"/>
           </a:p>
         </p:txBody>
       </p:sp>
@@ -12989,14 +12379,14 @@
               <a:buNone/>
             </a:pPr>
             <a:r>
-              <a:rPr lang="en-US" sz="800" b="1" dirty="0">
+              <a:rPr lang="en-US" sz="1600" b="1" dirty="0">
                 <a:solidFill>
                   <a:srgbClr val="FFFFFF"/>
                 </a:solidFill>
               </a:rPr>
               <a:t>03 FINE-TUNING</a:t>
             </a:r>
-            <a:endParaRPr lang="en-US" sz="800" dirty="0"/>
+            <a:endParaRPr lang="en-US" sz="1600" dirty="0"/>
           </a:p>
         </p:txBody>
       </p:sp>
@@ -13135,14 +12525,14 @@
               <a:buNone/>
             </a:pPr>
             <a:r>
-              <a:rPr lang="en-US" sz="1800" b="1" dirty="0">
+              <a:rPr lang="en-US" sz="2400" b="1" dirty="0">
                 <a:solidFill>
                   <a:srgbClr val="FFFFFF"/>
                 </a:solidFill>
               </a:rPr>
               <a:t>Frozen</a:t>
             </a:r>
-            <a:endParaRPr lang="en-US" sz="1800" dirty="0"/>
+            <a:endParaRPr lang="en-US" sz="2400" dirty="0"/>
           </a:p>
         </p:txBody>
       </p:sp>
@@ -13171,14 +12561,14 @@
               <a:buNone/>
             </a:pPr>
             <a:r>
-              <a:rPr lang="en-US" sz="1300" b="1" dirty="0">
+              <a:rPr lang="en-US" sz="1400" b="1" dirty="0">
                 <a:solidFill>
                   <a:srgbClr val="0D1B2A"/>
                 </a:solidFill>
               </a:rPr>
               <a:t>0.6 M trainable</a:t>
             </a:r>
-            <a:endParaRPr lang="en-US" sz="1300" dirty="0"/>
+            <a:endParaRPr lang="en-US" sz="1400" dirty="0"/>
           </a:p>
         </p:txBody>
       </p:sp>
@@ -13203,18 +12593,15 @@
           <a:bodyPr wrap="square" lIns="0" tIns="0" rIns="0" bIns="0" rtlCol="0" anchor="ctr"/>
           <a:lstStyle/>
           <a:p>
-            <a:pPr marL="0" indent="0" algn="ctr">
-              <a:buNone/>
-            </a:pPr>
-            <a:r>
-              <a:rPr lang="en-US" sz="1000" dirty="0">
-                <a:solidFill>
-                  <a:srgbClr val="8A9BB0"/>
-                </a:solidFill>
-              </a:rPr>
-              <a:t>62.9 M total</a:t>
-            </a:r>
-            <a:endParaRPr lang="en-US" sz="1000" dirty="0"/>
+            <a:pPr algn="ctr"/>
+            <a:r>
+              <a:rPr lang="en-US" sz="1200" dirty="0">
+                <a:solidFill>
+                  <a:schemeClr val="bg1"/>
+                </a:solidFill>
+              </a:rPr>
+              <a:t>187.4 M total</a:t>
+            </a:r>
           </a:p>
         </p:txBody>
       </p:sp>
@@ -13271,46 +12658,46 @@
           <a:bodyPr wrap="square" rtlCol="0" anchor="ctr"/>
           <a:lstStyle/>
           <a:p>
-            <a:pPr marL="0" indent="0" algn="l">
-              <a:buNone/>
-            </a:pPr>
-            <a:r>
-              <a:rPr lang="en-US" sz="1100" dirty="0">
+            <a:pPr marL="0" indent="0" algn="just">
+              <a:buNone/>
+            </a:pPr>
+            <a:r>
+              <a:rPr lang="en-US" sz="1200" dirty="0">
                 <a:solidFill>
                   <a:srgbClr val="1C2B3A"/>
                 </a:solidFill>
               </a:rPr>
               <a:t>Only ProjectionHead is trained.</a:t>
             </a:r>
-            <a:endParaRPr lang="en-US" sz="1100" dirty="0"/>
-          </a:p>
-          <a:p>
-            <a:pPr marL="0" indent="0" algn="l">
-              <a:buNone/>
-            </a:pPr>
-            <a:r>
-              <a:rPr lang="en-US" sz="1100" dirty="0">
+            <a:endParaRPr lang="en-US" sz="1200" dirty="0"/>
+          </a:p>
+          <a:p>
+            <a:pPr marL="0" indent="0" algn="just">
+              <a:buNone/>
+            </a:pPr>
+            <a:r>
+              <a:rPr lang="en-US" sz="1200" dirty="0">
                 <a:solidFill>
                   <a:srgbClr val="1C2B3A"/>
                 </a:solidFill>
               </a:rPr>
               <a:t>GPT-2 weights stay completely fixed.</a:t>
             </a:r>
-            <a:endParaRPr lang="en-US" sz="1100" dirty="0"/>
-          </a:p>
-          <a:p>
-            <a:pPr marL="0" indent="0" algn="l">
-              <a:buNone/>
-            </a:pPr>
-            <a:r>
-              <a:rPr lang="en-US" sz="1100" dirty="0">
+            <a:endParaRPr lang="en-US" sz="1200" dirty="0"/>
+          </a:p>
+          <a:p>
+            <a:pPr marL="0" indent="0" algn="just">
+              <a:buNone/>
+            </a:pPr>
+            <a:r>
+              <a:rPr lang="en-US" sz="1200" dirty="0">
                 <a:solidFill>
                   <a:srgbClr val="1C2B3A"/>
                 </a:solidFill>
               </a:rPr>
               <a:t>Fastest to train, smallest memory footprint.</a:t>
             </a:r>
-            <a:endParaRPr lang="en-US" sz="1100" dirty="0"/>
+            <a:endParaRPr lang="en-US" sz="1200" dirty="0"/>
           </a:p>
         </p:txBody>
       </p:sp>
@@ -13371,14 +12758,14 @@
               <a:buNone/>
             </a:pPr>
             <a:r>
-              <a:rPr lang="en-US" sz="1100" b="1" dirty="0">
+              <a:rPr lang="en-US" sz="1400" b="1" dirty="0">
                 <a:solidFill>
                   <a:srgbClr val="FFFFFF"/>
                 </a:solidFill>
               </a:rPr>
               <a:t>Baseline</a:t>
             </a:r>
-            <a:endParaRPr lang="en-US" sz="1100" dirty="0"/>
+            <a:endParaRPr lang="en-US" sz="1400" dirty="0"/>
           </a:p>
         </p:txBody>
       </p:sp>
@@ -13478,14 +12865,14 @@
               <a:buNone/>
             </a:pPr>
             <a:r>
-              <a:rPr lang="en-US" sz="1800" b="1" dirty="0">
+              <a:rPr lang="en-US" sz="2400" b="1" dirty="0">
                 <a:solidFill>
                   <a:srgbClr val="FFFFFF"/>
                 </a:solidFill>
               </a:rPr>
               <a:t>FT-4L</a:t>
             </a:r>
-            <a:endParaRPr lang="en-US" sz="1800" dirty="0"/>
+            <a:endParaRPr lang="en-US" sz="2400" dirty="0"/>
           </a:p>
         </p:txBody>
       </p:sp>
@@ -13514,14 +12901,14 @@
               <a:buNone/>
             </a:pPr>
             <a:r>
-              <a:rPr lang="en-US" sz="1300" b="1" dirty="0">
+              <a:rPr lang="en-US" sz="1400" b="1" dirty="0">
                 <a:solidFill>
                   <a:srgbClr val="0B6E4F"/>
                 </a:solidFill>
               </a:rPr>
               <a:t>67.6 M trainable</a:t>
             </a:r>
-            <a:endParaRPr lang="en-US" sz="1300" dirty="0"/>
+            <a:endParaRPr lang="en-US" sz="1400" dirty="0"/>
           </a:p>
         </p:txBody>
       </p:sp>
@@ -13550,14 +12937,13 @@
               <a:buNone/>
             </a:pPr>
             <a:r>
-              <a:rPr lang="en-US" sz="1000" dirty="0">
-                <a:solidFill>
-                  <a:srgbClr val="8A9BB0"/>
+              <a:rPr lang="en-US" sz="1200" dirty="0">
+                <a:solidFill>
+                  <a:schemeClr val="bg1"/>
                 </a:solidFill>
               </a:rPr>
               <a:t>129.9 M total</a:t>
             </a:r>
-            <a:endParaRPr lang="en-US" sz="1000" dirty="0"/>
           </a:p>
         </p:txBody>
       </p:sp>
@@ -13618,42 +13004,42 @@
               <a:buNone/>
             </a:pPr>
             <a:r>
-              <a:rPr lang="en-US" sz="1100" dirty="0">
+              <a:rPr lang="en-US" sz="1200" dirty="0">
                 <a:solidFill>
                   <a:srgbClr val="1C2B3A"/>
                 </a:solidFill>
               </a:rPr>
               <a:t>ProjectionHead + last 4 GPT-2</a:t>
             </a:r>
-            <a:endParaRPr lang="en-US" sz="1100" dirty="0"/>
+            <a:endParaRPr lang="en-US" sz="1200" dirty="0"/>
           </a:p>
           <a:p>
             <a:pPr marL="0" indent="0" algn="l">
               <a:buNone/>
             </a:pPr>
             <a:r>
-              <a:rPr lang="en-US" sz="1100" dirty="0">
+              <a:rPr lang="en-US" sz="1200" dirty="0">
                 <a:solidFill>
                   <a:srgbClr val="1C2B3A"/>
                 </a:solidFill>
               </a:rPr>
               <a:t>transformer blocks fine-tuned.</a:t>
             </a:r>
-            <a:endParaRPr lang="en-US" sz="1100" dirty="0"/>
+            <a:endParaRPr lang="en-US" sz="1200" dirty="0"/>
           </a:p>
           <a:p>
             <a:pPr marL="0" indent="0" algn="l">
               <a:buNone/>
             </a:pPr>
             <a:r>
-              <a:rPr lang="en-US" sz="1100" dirty="0">
+              <a:rPr lang="en-US" sz="1200" dirty="0">
                 <a:solidFill>
                   <a:srgbClr val="1C2B3A"/>
                 </a:solidFill>
               </a:rPr>
               <a:t>Highest raw capacity.</a:t>
             </a:r>
-            <a:endParaRPr lang="en-US" sz="1100" dirty="0"/>
+            <a:endParaRPr lang="en-US" sz="1200" dirty="0"/>
           </a:p>
         </p:txBody>
       </p:sp>
@@ -13714,14 +13100,14 @@
               <a:buNone/>
             </a:pPr>
             <a:r>
-              <a:rPr lang="en-US" sz="1100" b="1" dirty="0">
+              <a:rPr lang="en-US" sz="1400" b="1" dirty="0">
                 <a:solidFill>
                   <a:srgbClr val="FFFFFF"/>
                 </a:solidFill>
               </a:rPr>
               <a:t>Best Accuracy</a:t>
             </a:r>
-            <a:endParaRPr lang="en-US" sz="1100" dirty="0"/>
+            <a:endParaRPr lang="en-US" sz="1400" dirty="0"/>
           </a:p>
         </p:txBody>
       </p:sp>
@@ -13821,14 +13207,14 @@
               <a:buNone/>
             </a:pPr>
             <a:r>
-              <a:rPr lang="en-US" sz="1800" b="1" dirty="0">
+              <a:rPr lang="en-US" sz="2400" b="1" dirty="0">
                 <a:solidFill>
                   <a:srgbClr val="FFFFFF"/>
                 </a:solidFill>
               </a:rPr>
-              <a:t>LoRA  r=8</a:t>
-            </a:r>
-            <a:endParaRPr lang="en-US" sz="1800" dirty="0"/>
+              <a:t>LoRA  r=8,a=16</a:t>
+            </a:r>
+            <a:endParaRPr lang="en-US" sz="2400" dirty="0"/>
           </a:p>
         </p:txBody>
       </p:sp>
@@ -13857,14 +13243,14 @@
               <a:buNone/>
             </a:pPr>
             <a:r>
-              <a:rPr lang="en-US" sz="1300" b="1" dirty="0">
+              <a:rPr lang="en-US" sz="1400" b="1" dirty="0">
                 <a:solidFill>
                   <a:srgbClr val="E85D04"/>
                 </a:solidFill>
               </a:rPr>
               <a:t>0.8 M trainable</a:t>
             </a:r>
-            <a:endParaRPr lang="en-US" sz="1300" dirty="0"/>
+            <a:endParaRPr lang="en-US" sz="1400" dirty="0"/>
           </a:p>
         </p:txBody>
       </p:sp>
@@ -13893,14 +13279,13 @@
               <a:buNone/>
             </a:pPr>
             <a:r>
-              <a:rPr lang="en-US" sz="1000" dirty="0">
-                <a:solidFill>
-                  <a:srgbClr val="8A9BB0"/>
+              <a:rPr lang="en-US" sz="1200" dirty="0">
+                <a:solidFill>
+                  <a:schemeClr val="bg1"/>
                 </a:solidFill>
               </a:rPr>
               <a:t>63.7 M total</a:t>
             </a:r>
-            <a:endParaRPr lang="en-US" sz="1000" dirty="0"/>
           </a:p>
         </p:txBody>
       </p:sp>
@@ -13961,42 +13346,42 @@
               <a:buNone/>
             </a:pPr>
             <a:r>
-              <a:rPr lang="en-US" sz="1100" dirty="0">
+              <a:rPr lang="en-US" sz="1200" dirty="0">
                 <a:solidFill>
                   <a:srgbClr val="1C2B3A"/>
                 </a:solidFill>
               </a:rPr>
               <a:t>Low-rank adapters injected</a:t>
             </a:r>
-            <a:endParaRPr lang="en-US" sz="1100" dirty="0"/>
+            <a:endParaRPr lang="en-US" sz="1200" dirty="0"/>
           </a:p>
           <a:p>
             <a:pPr marL="0" indent="0" algn="l">
               <a:buNone/>
             </a:pPr>
             <a:r>
-              <a:rPr lang="en-US" sz="1100" dirty="0">
+              <a:rPr lang="en-US" sz="1200" dirty="0">
                 <a:solidFill>
                   <a:srgbClr val="1C2B3A"/>
                 </a:solidFill>
               </a:rPr>
               <a:t>into GPT-2 attention layers via PEFT.</a:t>
             </a:r>
-            <a:endParaRPr lang="en-US" sz="1100" dirty="0"/>
+            <a:endParaRPr lang="en-US" sz="1200" dirty="0"/>
           </a:p>
           <a:p>
             <a:pPr marL="0" indent="0" algn="l">
               <a:buNone/>
             </a:pPr>
             <a:r>
-              <a:rPr lang="en-US" sz="1100" dirty="0">
+              <a:rPr lang="en-US" sz="1200" dirty="0">
                 <a:solidFill>
                   <a:srgbClr val="1C2B3A"/>
                 </a:solidFill>
               </a:rPr>
               <a:t>alpha=16, scaling factor = 2.0.</a:t>
             </a:r>
-            <a:endParaRPr lang="en-US" sz="1100" dirty="0"/>
+            <a:endParaRPr lang="en-US" sz="1200" dirty="0"/>
           </a:p>
         </p:txBody>
       </p:sp>
@@ -14057,14 +13442,14 @@
               <a:buNone/>
             </a:pPr>
             <a:r>
-              <a:rPr lang="en-US" sz="1100" b="1" dirty="0">
+              <a:rPr lang="en-US" sz="1400" b="1" dirty="0">
                 <a:solidFill>
                   <a:srgbClr val="FFFFFF"/>
                 </a:solidFill>
               </a:rPr>
               <a:t>Most Efficient</a:t>
             </a:r>
-            <a:endParaRPr lang="en-US" sz="1100" dirty="0"/>
+            <a:endParaRPr lang="en-US" sz="1400" dirty="0"/>
           </a:p>
         </p:txBody>
       </p:sp>
@@ -14194,14 +13579,14 @@
               <a:buNone/>
             </a:pPr>
             <a:r>
-              <a:rPr lang="en-US" sz="800" b="1" dirty="0">
+              <a:rPr lang="en-US" sz="1600" b="1" dirty="0">
                 <a:solidFill>
                   <a:srgbClr val="FFFFFF"/>
                 </a:solidFill>
               </a:rPr>
               <a:t>03 TRAINING</a:t>
             </a:r>
-            <a:endParaRPr lang="en-US" sz="800" dirty="0"/>
+            <a:endParaRPr lang="en-US" sz="1600" dirty="0"/>
           </a:p>
         </p:txBody>
       </p:sp>
@@ -14238,35 +13623,34 @@
                 <a:ea typeface="Calibri" pitchFamily="34" charset="-122"/>
                 <a:cs typeface="Calibri" pitchFamily="34" charset="-120"/>
               </a:rPr>
-              <a:t>Training Loss Curves — COCO 2017 (118K images)</a:t>
+              <a:t>Split COCO 2017 (106K train, ~6K </a:t>
+            </a:r>
+            <a:r>
+              <a:rPr lang="en-US" sz="2600" b="1" dirty="0" err="1">
+                <a:solidFill>
+                  <a:srgbClr val="0D1B2A"/>
+                </a:solidFill>
+                <a:latin typeface="Calibri" pitchFamily="34" charset="0"/>
+                <a:ea typeface="Calibri" pitchFamily="34" charset="-122"/>
+                <a:cs typeface="Calibri" pitchFamily="34" charset="-120"/>
+              </a:rPr>
+              <a:t>val</a:t>
+            </a:r>
+            <a:r>
+              <a:rPr lang="en-US" sz="2600" b="1" dirty="0">
+                <a:solidFill>
+                  <a:srgbClr val="0D1B2A"/>
+                </a:solidFill>
+                <a:latin typeface="Calibri" pitchFamily="34" charset="0"/>
+                <a:ea typeface="Calibri" pitchFamily="34" charset="-122"/>
+                <a:cs typeface="Calibri" pitchFamily="34" charset="-120"/>
+              </a:rPr>
+              <a:t>, ~6K test)</a:t>
             </a:r>
             <a:endParaRPr lang="en-US" sz="2600" dirty="0"/>
           </a:p>
         </p:txBody>
       </p:sp>
-      <p:pic>
-        <p:nvPicPr>
-          <p:cNvPr id="6" name="Image 0" descr="preencoded.png"/>
-          <p:cNvPicPr>
-            <a:picLocks noChangeAspect="1"/>
-          </p:cNvPicPr>
-          <p:nvPr/>
-        </p:nvPicPr>
-        <p:blipFill>
-          <a:blip r:embed="rId3"/>
-          <a:srcRect/>
-          <a:stretch/>
-        </p:blipFill>
-        <p:spPr>
-          <a:xfrm>
-            <a:off x="365760" y="2026762"/>
-            <a:ext cx="5303520" cy="2819557"/>
-          </a:xfrm>
-          <a:prstGeom prst="rect">
-            <a:avLst/>
-          </a:prstGeom>
-        </p:spPr>
-      </p:pic>
       <p:sp>
         <p:nvSpPr>
           <p:cNvPr id="7" name="Shape 4"/>
@@ -14363,14 +13747,14 @@
               <a:buNone/>
             </a:pPr>
             <a:r>
-              <a:rPr lang="en-US" sz="1100" b="1" dirty="0">
+              <a:rPr lang="en-US" sz="1400" b="1" dirty="0">
                 <a:solidFill>
                   <a:srgbClr val="0D1B2A"/>
                 </a:solidFill>
               </a:rPr>
-              <a:t>Phase 1 — Frozen</a:t>
-            </a:r>
-            <a:endParaRPr lang="en-US" sz="1100" dirty="0"/>
+              <a:t>Phase 1: Frozen</a:t>
+            </a:r>
+            <a:endParaRPr lang="en-US" sz="1400" dirty="0"/>
           </a:p>
         </p:txBody>
       </p:sp>
@@ -14404,7 +13788,7 @@
                   <a:srgbClr val="0D1B2A"/>
                 </a:solidFill>
               </a:rPr>
-              <a:t>~4 epochs</a:t>
+              <a:t>20 epochs</a:t>
             </a:r>
             <a:endParaRPr lang="en-US" sz="1600" dirty="0"/>
           </a:p>
@@ -14435,14 +13819,9 @@
               <a:buNone/>
             </a:pPr>
             <a:r>
-              <a:rPr lang="en-US" sz="900" dirty="0">
-                <a:solidFill>
-                  <a:srgbClr val="8A9BB0"/>
-                </a:solidFill>
-              </a:rPr>
+              <a:rPr lang="en-US" sz="1200" dirty="0"/>
               <a:t>Early stopped, patience=3</a:t>
             </a:r>
-            <a:endParaRPr lang="en-US" sz="900" dirty="0"/>
           </a:p>
         </p:txBody>
       </p:sp>
@@ -14542,14 +13921,14 @@
               <a:buNone/>
             </a:pPr>
             <a:r>
-              <a:rPr lang="en-US" sz="1100" b="1" dirty="0">
+              <a:rPr lang="en-US" sz="1400" b="1" dirty="0">
                 <a:solidFill>
                   <a:srgbClr val="0D1B2A"/>
                 </a:solidFill>
               </a:rPr>
-              <a:t>Phase 2 — FT-4L</a:t>
-            </a:r>
-            <a:endParaRPr lang="en-US" sz="1100" dirty="0"/>
+              <a:t>Phase 2: FT-4L</a:t>
+            </a:r>
+            <a:endParaRPr lang="en-US" sz="1400" dirty="0"/>
           </a:p>
         </p:txBody>
       </p:sp>
@@ -14583,7 +13962,7 @@
                   <a:srgbClr val="0B6E4F"/>
                 </a:solidFill>
               </a:rPr>
-              <a:t>~3 epochs</a:t>
+              <a:t>15 epochs</a:t>
             </a:r>
             <a:endParaRPr lang="en-US" sz="1600" dirty="0"/>
           </a:p>
@@ -14614,14 +13993,9 @@
               <a:buNone/>
             </a:pPr>
             <a:r>
-              <a:rPr lang="en-US" sz="900" dirty="0">
-                <a:solidFill>
-                  <a:srgbClr val="8A9BB0"/>
-                </a:solidFill>
-              </a:rPr>
+              <a:rPr lang="en-US" sz="1200" dirty="0"/>
               <a:t>Converges faster with LR=5e-5</a:t>
             </a:r>
-            <a:endParaRPr lang="en-US" sz="900" dirty="0"/>
           </a:p>
         </p:txBody>
       </p:sp>
@@ -14721,14 +14095,30 @@
               <a:buNone/>
             </a:pPr>
             <a:r>
-              <a:rPr lang="en-US" sz="1100" b="1" dirty="0">
+              <a:rPr lang="en-US" sz="1400" b="1" dirty="0">
                 <a:solidFill>
                   <a:srgbClr val="0D1B2A"/>
                 </a:solidFill>
               </a:rPr>
-              <a:t>Phase 3 — LoRA</a:t>
-            </a:r>
-            <a:endParaRPr lang="en-US" sz="1100" dirty="0"/>
+              <a:t>Phase 3: </a:t>
+            </a:r>
+            <a:r>
+              <a:rPr lang="en-US" sz="1400" b="1" dirty="0" err="1">
+                <a:solidFill>
+                  <a:srgbClr val="0D1B2A"/>
+                </a:solidFill>
+              </a:rPr>
+              <a:t>LoRA</a:t>
+            </a:r>
+            <a:r>
+              <a:rPr lang="en-US" sz="1400" b="1" dirty="0">
+                <a:solidFill>
+                  <a:srgbClr val="0D1B2A"/>
+                </a:solidFill>
+              </a:rPr>
+              <a:t> (r=8, scale =2)</a:t>
+            </a:r>
+            <a:endParaRPr lang="en-US" sz="1400" dirty="0"/>
           </a:p>
         </p:txBody>
       </p:sp>
@@ -14762,7 +14152,7 @@
                   <a:srgbClr val="E85D04"/>
                 </a:solidFill>
               </a:rPr>
-              <a:t>~3 epochs</a:t>
+              <a:t>15 epochs</a:t>
             </a:r>
             <a:endParaRPr lang="en-US" sz="1600" dirty="0"/>
           </a:p>
@@ -14793,17 +14183,42 @@
               <a:buNone/>
             </a:pPr>
             <a:r>
-              <a:rPr lang="en-US" sz="900" dirty="0">
-                <a:solidFill>
-                  <a:srgbClr val="8A9BB0"/>
-                </a:solidFill>
-              </a:rPr>
-              <a:t>Stable loss with adapters</a:t>
-            </a:r>
-            <a:endParaRPr lang="en-US" sz="900" dirty="0"/>
-          </a:p>
-        </p:txBody>
-      </p:sp>
+              <a:rPr lang="en-US" sz="1200" dirty="0"/>
+              <a:t>Should change params for upgrade</a:t>
+            </a:r>
+          </a:p>
+        </p:txBody>
+      </p:sp>
+      <p:pic>
+        <p:nvPicPr>
+          <p:cNvPr id="22" name="Picture 21">
+            <a:extLst>
+              <a:ext uri="{FF2B5EF4-FFF2-40B4-BE49-F238E27FC236}">
+                <a16:creationId xmlns:a16="http://schemas.microsoft.com/office/drawing/2014/main" id="{0BC97F7C-E393-56B6-ABF8-96588A43953B}"/>
+              </a:ext>
+            </a:extLst>
+          </p:cNvPr>
+          <p:cNvPicPr>
+            <a:picLocks noChangeAspect="1"/>
+          </p:cNvPicPr>
+          <p:nvPr/>
+        </p:nvPicPr>
+        <p:blipFill>
+          <a:blip r:embed="rId3"/>
+          <a:stretch>
+            <a:fillRect/>
+          </a:stretch>
+        </p:blipFill>
+        <p:spPr>
+          <a:xfrm>
+            <a:off x="365760" y="1207008"/>
+            <a:ext cx="5303520" cy="3006356"/>
+          </a:xfrm>
+          <a:prstGeom prst="rect">
+            <a:avLst/>
+          </a:prstGeom>
+        </p:spPr>
+      </p:pic>
     </p:spTree>
   </p:cSld>
   <p:clrMapOvr>
@@ -14930,14 +14345,14 @@
               <a:buNone/>
             </a:pPr>
             <a:r>
-              <a:rPr lang="en-US" sz="800" b="1" dirty="0">
+              <a:rPr lang="en-US" sz="1600" b="1" dirty="0">
                 <a:solidFill>
                   <a:srgbClr val="FFFFFF"/>
                 </a:solidFill>
               </a:rPr>
               <a:t>04 RESULTS</a:t>
             </a:r>
-            <a:endParaRPr lang="en-US" sz="800" dirty="0"/>
+            <a:endParaRPr lang="en-US" sz="1600" dirty="0"/>
           </a:p>
         </p:txBody>
       </p:sp>
@@ -14962,7 +14377,7 @@
           <a:bodyPr wrap="square" lIns="0" tIns="0" rIns="0" bIns="0" rtlCol="0" anchor="ctr"/>
           <a:lstStyle/>
           <a:p>
-            <a:pPr marL="0" indent="0" algn="l">
+            <a:pPr marL="0" indent="0" algn="ctr">
               <a:buNone/>
             </a:pPr>
             <a:r>
@@ -14974,7 +14389,7 @@
                 <a:ea typeface="Calibri" pitchFamily="34" charset="-122"/>
                 <a:cs typeface="Calibri" pitchFamily="34" charset="-120"/>
               </a:rPr>
-              <a:t>COCO val2017 — 500 Images — All Configurations</a:t>
+              <a:t>COCO val2017: 500 Images - All Configurations</a:t>
             </a:r>
             <a:endParaRPr lang="en-US" sz="2600" dirty="0"/>
           </a:p>
@@ -14989,7 +14404,19 @@
           <p:nvPr/>
         </p:nvPicPr>
         <p:blipFill>
-          <a:blip r:embed="rId3"/>
+          <a:blip r:embed="rId3">
+            <a:extLst>
+              <a:ext uri="{BEBA8EAE-BF5A-486C-A8C5-ECC9F3942E4B}">
+                <a14:imgProps xmlns:a14="http://schemas.microsoft.com/office/drawing/2010/main">
+                  <a14:imgLayer r:embed="rId4">
+                    <a14:imgEffect>
+                      <a14:brightnessContrast contrast="-40000"/>
+                    </a14:imgEffect>
+                  </a14:imgLayer>
+                </a14:imgProps>
+              </a:ext>
+            </a:extLst>
+          </a:blip>
           <a:srcRect/>
           <a:stretch/>
         </p:blipFill>
@@ -15028,14 +14455,14 @@
               <a:buNone/>
             </a:pPr>
             <a:r>
-              <a:rPr lang="en-US" sz="1100" b="1" dirty="0">
+              <a:rPr lang="en-US" sz="1600" b="1" dirty="0">
                 <a:solidFill>
                   <a:srgbClr val="0D1B2A"/>
                 </a:solidFill>
               </a:rPr>
               <a:t>Best per Model (Beam Search)</a:t>
             </a:r>
-            <a:endParaRPr lang="en-US" sz="1100" dirty="0"/>
+            <a:endParaRPr lang="en-US" sz="1600" dirty="0"/>
           </a:p>
         </p:txBody>
       </p:sp>
@@ -15096,14 +14523,14 @@
               <a:buNone/>
             </a:pPr>
             <a:r>
-              <a:rPr lang="en-US" sz="1000" b="1" dirty="0">
+              <a:rPr lang="en-US" sz="1400" b="1" dirty="0">
                 <a:solidFill>
                   <a:srgbClr val="FFFFFF"/>
                 </a:solidFill>
               </a:rPr>
               <a:t>Model</a:t>
             </a:r>
-            <a:endParaRPr lang="en-US" sz="1000" dirty="0"/>
+            <a:endParaRPr lang="en-US" sz="1400" dirty="0"/>
           </a:p>
         </p:txBody>
       </p:sp>
@@ -15132,14 +14559,14 @@
               <a:buNone/>
             </a:pPr>
             <a:r>
-              <a:rPr lang="en-US" sz="1000" dirty="0">
+              <a:rPr lang="en-US" sz="1400" dirty="0">
                 <a:solidFill>
                   <a:srgbClr val="FFFFFF"/>
                 </a:solidFill>
               </a:rPr>
               <a:t>CIDEr</a:t>
             </a:r>
-            <a:endParaRPr lang="en-US" sz="1000" dirty="0"/>
+            <a:endParaRPr lang="en-US" sz="1400" dirty="0"/>
           </a:p>
         </p:txBody>
       </p:sp>
@@ -15168,14 +14595,14 @@
               <a:buNone/>
             </a:pPr>
             <a:r>
-              <a:rPr lang="en-US" sz="1000" dirty="0">
+              <a:rPr lang="en-US" sz="1400" dirty="0">
                 <a:solidFill>
                   <a:srgbClr val="FFFFFF"/>
                 </a:solidFill>
               </a:rPr>
               <a:t>BLEU-4</a:t>
             </a:r>
-            <a:endParaRPr lang="en-US" sz="1000" dirty="0"/>
+            <a:endParaRPr lang="en-US" sz="1400" dirty="0"/>
           </a:p>
         </p:txBody>
       </p:sp>
@@ -15759,14 +15186,14 @@
               <a:buNone/>
             </a:pPr>
             <a:r>
-              <a:rPr lang="en-US" sz="1000" b="1" dirty="0">
+              <a:rPr lang="en-US" sz="1400" b="1" dirty="0">
                 <a:solidFill>
                   <a:srgbClr val="F7B731"/>
                 </a:solidFill>
               </a:rPr>
               <a:t>Key Insight</a:t>
             </a:r>
-            <a:endParaRPr lang="en-US" sz="1000" dirty="0"/>
+            <a:endParaRPr lang="en-US" sz="1400" dirty="0"/>
           </a:p>
         </p:txBody>
       </p:sp>
@@ -15795,14 +15222,69 @@
               <a:buNone/>
             </a:pPr>
             <a:r>
-              <a:rPr lang="en-US" sz="1100" dirty="0">
+              <a:rPr lang="en-US" sz="1200" dirty="0">
                 <a:solidFill>
                   <a:srgbClr val="FFFFFF"/>
                 </a:solidFill>
               </a:rPr>
               <a:t>Frozen/Beam = FT-4L/Beam on CIDEr despite 67M fewer parameters</a:t>
             </a:r>
-            <a:endParaRPr lang="en-US" sz="1100" dirty="0"/>
+            <a:endParaRPr lang="en-US" sz="1200" dirty="0"/>
+          </a:p>
+        </p:txBody>
+      </p:sp>
+      <p:sp>
+        <p:nvSpPr>
+          <p:cNvPr id="30" name="Text 4">
+            <a:extLst>
+              <a:ext uri="{FF2B5EF4-FFF2-40B4-BE49-F238E27FC236}">
+                <a16:creationId xmlns:a16="http://schemas.microsoft.com/office/drawing/2014/main" id="{C8F1C33C-178A-E053-B55B-66CF6A65D942}"/>
+              </a:ext>
+            </a:extLst>
+          </p:cNvPr>
+          <p:cNvSpPr/>
+          <p:nvPr/>
+        </p:nvSpPr>
+        <p:spPr>
+          <a:xfrm>
+            <a:off x="365760" y="4825218"/>
+            <a:ext cx="5212080" cy="239151"/>
+          </a:xfrm>
+          <a:prstGeom prst="rect">
+            <a:avLst/>
+          </a:prstGeom>
+          <a:noFill/>
+          <a:ln/>
+        </p:spPr>
+        <p:txBody>
+          <a:bodyPr wrap="square" lIns="0" tIns="0" rIns="0" bIns="0" rtlCol="0" anchor="ctr"/>
+          <a:lstStyle/>
+          <a:p>
+            <a:pPr algn="ctr"/>
+            <a:r>
+              <a:rPr lang="en-US" sz="1600" b="1" dirty="0">
+                <a:solidFill>
+                  <a:srgbClr val="FF0000"/>
+                </a:solidFill>
+              </a:rPr>
+              <a:t>Change </a:t>
+            </a:r>
+            <a:r>
+              <a:rPr lang="en-US" sz="1600" b="1" dirty="0" err="1">
+                <a:solidFill>
+                  <a:srgbClr val="FF0000"/>
+                </a:solidFill>
+              </a:rPr>
+              <a:t>LoRA</a:t>
+            </a:r>
+            <a:r>
+              <a:rPr lang="en-US" sz="1600" b="1" dirty="0">
+                <a:solidFill>
+                  <a:srgbClr val="FF0000"/>
+                </a:solidFill>
+              </a:rPr>
+              <a:t> r=32, scale =2; Evaluate on 5000 images</a:t>
+            </a:r>
           </a:p>
         </p:txBody>
       </p:sp>
@@ -15932,14 +15414,14 @@
               <a:buNone/>
             </a:pPr>
             <a:r>
-              <a:rPr lang="en-US" sz="800" b="1" dirty="0">
+              <a:rPr lang="en-US" sz="1600" b="1" dirty="0">
                 <a:solidFill>
                   <a:srgbClr val="FFFFFF"/>
                 </a:solidFill>
               </a:rPr>
               <a:t>04 RESULTS</a:t>
             </a:r>
-            <a:endParaRPr lang="en-US" sz="800" dirty="0"/>
+            <a:endParaRPr lang="en-US" sz="1600" dirty="0"/>
           </a:p>
         </p:txBody>
       </p:sp>
@@ -15964,7 +15446,7 @@
           <a:bodyPr wrap="square" lIns="0" tIns="0" rIns="0" bIns="0" rtlCol="0" anchor="ctr"/>
           <a:lstStyle/>
           <a:p>
-            <a:pPr marL="0" indent="0" algn="l">
+            <a:pPr marL="0" indent="0" algn="ctr">
               <a:buNone/>
             </a:pPr>
             <a:r>
@@ -15976,7 +15458,7 @@
                 <a:ea typeface="Calibri" pitchFamily="34" charset="-122"/>
                 <a:cs typeface="Calibri" pitchFamily="34" charset="-120"/>
               </a:rPr>
-              <a:t>Complete Evaluation Heatmap — 9 Configurations x 5 Metrics</a:t>
+              <a:t>Complete Evaluation Heatmap: 9 Configurations x 5 Metrics</a:t>
             </a:r>
             <a:endParaRPr lang="en-US" sz="2600" dirty="0"/>
           </a:p>
@@ -15991,13 +15473,25 @@
           <p:nvPr/>
         </p:nvPicPr>
         <p:blipFill>
-          <a:blip r:embed="rId3"/>
+          <a:blip r:embed="rId3">
+            <a:extLst>
+              <a:ext uri="{BEBA8EAE-BF5A-486C-A8C5-ECC9F3942E4B}">
+                <a14:imgProps xmlns:a14="http://schemas.microsoft.com/office/drawing/2010/main">
+                  <a14:imgLayer r:embed="rId4">
+                    <a14:imgEffect>
+                      <a14:brightnessContrast contrast="-40000"/>
+                    </a14:imgEffect>
+                  </a14:imgLayer>
+                </a14:imgProps>
+              </a:ext>
+            </a:extLst>
+          </a:blip>
           <a:srcRect/>
           <a:stretch/>
         </p:blipFill>
         <p:spPr>
           <a:xfrm>
-            <a:off x="1470580" y="1512530"/>
+            <a:off x="1470580" y="1239570"/>
             <a:ext cx="6759019" cy="3379510"/>
           </a:xfrm>
           <a:prstGeom prst="rect">
@@ -16013,8 +15507,8 @@
         </p:nvSpPr>
         <p:spPr>
           <a:xfrm>
-            <a:off x="365760" y="4754880"/>
-            <a:ext cx="8412480" cy="274320"/>
+            <a:off x="365760" y="4659344"/>
+            <a:ext cx="8412480" cy="369856"/>
           </a:xfrm>
           <a:prstGeom prst="rect">
             <a:avLst/>
@@ -16030,14 +15524,19 @@
               <a:buNone/>
             </a:pPr>
             <a:r>
-              <a:rPr lang="en-US" sz="900" i="1" dirty="0">
-                <a:solidFill>
-                  <a:srgbClr val="8A9BB0"/>
-                </a:solidFill>
-              </a:rPr>
-              <a:t>Warmer colors = higher score within each metric column.  Best row: FT-4L / Beam (highlighted).  Evaluation on COCO val2017, 500 images.</a:t>
-            </a:r>
-            <a:endParaRPr lang="en-US" sz="900" dirty="0"/>
+              <a:rPr lang="en-US" sz="1200" i="1" dirty="0"/>
+              <a:t>Warmer colors = higher score within each metric column. </a:t>
+            </a:r>
+          </a:p>
+          <a:p>
+            <a:pPr marL="0" indent="0" algn="ctr">
+              <a:buNone/>
+            </a:pPr>
+            <a:r>
+              <a:rPr lang="en-US" sz="1200" i="1" dirty="0"/>
+              <a:t>Best row: FT-4L / Beam (highlighted).  Evaluation on COCO val2017, 500 images.</a:t>
+            </a:r>
+            <a:endParaRPr lang="en-US" sz="1200" dirty="0"/>
           </a:p>
         </p:txBody>
       </p:sp>
@@ -16167,14 +15666,14 @@
               <a:buNone/>
             </a:pPr>
             <a:r>
-              <a:rPr lang="en-US" sz="800" b="1" dirty="0">
+              <a:rPr lang="en-US" sz="1600" b="1" dirty="0">
                 <a:solidFill>
                   <a:srgbClr val="FFFFFF"/>
                 </a:solidFill>
               </a:rPr>
               <a:t>04 RESULTS</a:t>
             </a:r>
-            <a:endParaRPr lang="en-US" sz="800" dirty="0"/>
+            <a:endParaRPr lang="en-US" sz="1600" dirty="0"/>
           </a:p>
         </p:txBody>
       </p:sp>
@@ -16199,7 +15698,7 @@
           <a:bodyPr wrap="square" lIns="0" tIns="0" rIns="0" bIns="0" rtlCol="0" anchor="ctr"/>
           <a:lstStyle/>
           <a:p>
-            <a:pPr marL="0" indent="0" algn="l">
+            <a:pPr marL="0" indent="0" algn="ctr">
               <a:buNone/>
             </a:pPr>
             <a:r>
@@ -16211,7 +15710,7 @@
                 <a:ea typeface="Calibri" pitchFamily="34" charset="-122"/>
                 <a:cs typeface="Calibri" pitchFamily="34" charset="-120"/>
               </a:rPr>
-              <a:t>Multi-Metric Radar — Best Strategy per Model</a:t>
+              <a:t>Multi-Metric Radar: Best Strategy per Model</a:t>
             </a:r>
             <a:endParaRPr lang="en-US" sz="2600" dirty="0"/>
           </a:p>
@@ -16226,13 +15725,25 @@
           <p:nvPr/>
         </p:nvPicPr>
         <p:blipFill>
-          <a:blip r:embed="rId3"/>
+          <a:blip r:embed="rId3">
+            <a:extLst>
+              <a:ext uri="{BEBA8EAE-BF5A-486C-A8C5-ECC9F3942E4B}">
+                <a14:imgProps xmlns:a14="http://schemas.microsoft.com/office/drawing/2010/main">
+                  <a14:imgLayer r:embed="rId4">
+                    <a14:imgEffect>
+                      <a14:brightnessContrast contrast="-40000"/>
+                    </a14:imgEffect>
+                  </a14:imgLayer>
+                </a14:imgProps>
+              </a:ext>
+            </a:extLst>
+          </a:blip>
           <a:srcRect/>
           <a:stretch/>
         </p:blipFill>
         <p:spPr>
           <a:xfrm>
-            <a:off x="365760" y="1234440"/>
+            <a:off x="365760" y="1370920"/>
             <a:ext cx="5943600" cy="2286000"/>
           </a:xfrm>
           <a:prstGeom prst="rect">
@@ -16336,14 +15847,14 @@
               <a:buNone/>
             </a:pPr>
             <a:r>
-              <a:rPr lang="en-US" sz="1200" b="1" dirty="0">
+              <a:rPr lang="en-US" sz="1600" b="1" dirty="0">
                 <a:solidFill>
                   <a:srgbClr val="0D1B2A"/>
                 </a:solidFill>
               </a:rPr>
               <a:t>Frozen / Beam</a:t>
             </a:r>
-            <a:endParaRPr lang="en-US" sz="1200" dirty="0"/>
+            <a:endParaRPr lang="en-US" sz="1600" dirty="0"/>
           </a:p>
         </p:txBody>
       </p:sp>
@@ -16372,28 +15883,28 @@
               <a:buNone/>
             </a:pPr>
             <a:r>
-              <a:rPr lang="en-US" sz="1000" dirty="0">
+              <a:rPr lang="en-US" sz="1400" dirty="0">
                 <a:solidFill>
                   <a:srgbClr val="1C2B3A"/>
                 </a:solidFill>
               </a:rPr>
               <a:t>Competitive on all metrics</a:t>
             </a:r>
-            <a:endParaRPr lang="en-US" sz="1000" dirty="0"/>
+            <a:endParaRPr lang="en-US" sz="1400" dirty="0"/>
           </a:p>
           <a:p>
             <a:pPr marL="0" indent="0">
               <a:buNone/>
             </a:pPr>
             <a:r>
-              <a:rPr lang="en-US" sz="1000" dirty="0">
+              <a:rPr lang="en-US" sz="1400" dirty="0">
                 <a:solidFill>
                   <a:srgbClr val="1C2B3A"/>
                 </a:solidFill>
               </a:rPr>
               <a:t>with zero LM fine-tuning</a:t>
             </a:r>
-            <a:endParaRPr lang="en-US" sz="1000" dirty="0"/>
+            <a:endParaRPr lang="en-US" sz="1400" dirty="0"/>
           </a:p>
         </p:txBody>
       </p:sp>
@@ -16493,14 +16004,14 @@
               <a:buNone/>
             </a:pPr>
             <a:r>
-              <a:rPr lang="en-US" sz="1200" b="1" dirty="0">
+              <a:rPr lang="en-US" sz="1600" b="1" dirty="0">
                 <a:solidFill>
                   <a:srgbClr val="0D1B2A"/>
                 </a:solidFill>
               </a:rPr>
               <a:t>FT-4L / Beam</a:t>
             </a:r>
-            <a:endParaRPr lang="en-US" sz="1200" dirty="0"/>
+            <a:endParaRPr lang="en-US" sz="1600" dirty="0"/>
           </a:p>
         </p:txBody>
       </p:sp>
@@ -16529,28 +16040,28 @@
               <a:buNone/>
             </a:pPr>
             <a:r>
-              <a:rPr lang="en-US" sz="1000" dirty="0">
+              <a:rPr lang="en-US" sz="1400" dirty="0">
                 <a:solidFill>
                   <a:srgbClr val="1C2B3A"/>
                 </a:solidFill>
               </a:rPr>
               <a:t>Best METEOR (0.474)</a:t>
             </a:r>
-            <a:endParaRPr lang="en-US" sz="1000" dirty="0"/>
+            <a:endParaRPr lang="en-US" sz="1400" dirty="0"/>
           </a:p>
           <a:p>
             <a:pPr marL="0" indent="0">
               <a:buNone/>
             </a:pPr>
             <a:r>
-              <a:rPr lang="en-US" sz="1000" dirty="0">
+              <a:rPr lang="en-US" sz="1400" dirty="0">
                 <a:solidFill>
                   <a:srgbClr val="1C2B3A"/>
                 </a:solidFill>
               </a:rPr>
               <a:t>Marginally better than Frozen</a:t>
             </a:r>
-            <a:endParaRPr lang="en-US" sz="1000" dirty="0"/>
+            <a:endParaRPr lang="en-US" sz="1400" dirty="0"/>
           </a:p>
         </p:txBody>
       </p:sp>
@@ -16650,14 +16161,14 @@
               <a:buNone/>
             </a:pPr>
             <a:r>
-              <a:rPr lang="en-US" sz="1200" b="1" dirty="0">
+              <a:rPr lang="en-US" sz="1600" b="1" dirty="0">
                 <a:solidFill>
                   <a:srgbClr val="0D1B2A"/>
                 </a:solidFill>
               </a:rPr>
               <a:t>LoRA / Beam</a:t>
             </a:r>
-            <a:endParaRPr lang="en-US" sz="1200" dirty="0"/>
+            <a:endParaRPr lang="en-US" sz="1600" dirty="0"/>
           </a:p>
         </p:txBody>
       </p:sp>
@@ -16686,28 +16197,28 @@
               <a:buNone/>
             </a:pPr>
             <a:r>
-              <a:rPr lang="en-US" sz="1000" dirty="0">
+              <a:rPr lang="en-US" sz="1400" dirty="0">
                 <a:solidFill>
                   <a:srgbClr val="1C2B3A"/>
                 </a:solidFill>
               </a:rPr>
               <a:t>Lower scores on COCO scale</a:t>
             </a:r>
-            <a:endParaRPr lang="en-US" sz="1000" dirty="0"/>
+            <a:endParaRPr lang="en-US" sz="1400" dirty="0"/>
           </a:p>
           <a:p>
             <a:pPr marL="0" indent="0">
               <a:buNone/>
             </a:pPr>
             <a:r>
-              <a:rPr lang="en-US" sz="1000" dirty="0">
+              <a:rPr lang="en-US" sz="1400" dirty="0">
                 <a:solidFill>
                   <a:srgbClr val="1C2B3A"/>
                 </a:solidFill>
               </a:rPr>
-              <a:t>Parametric efficiency trade-off</a:t>
-            </a:r>
-            <a:endParaRPr lang="en-US" sz="1000" dirty="0"/>
+              <a:t>Parametric efficiency trade-off -&gt; need upgrade</a:t>
+            </a:r>
+            <a:endParaRPr lang="en-US" sz="1400" dirty="0"/>
           </a:p>
         </p:txBody>
       </p:sp>

--- a/reports/Generative_Presentation_Group8.pptx
+++ b/reports/Generative_Presentation_Group8.pptx
@@ -2380,7 +2380,7 @@
                   <a:schemeClr val="accent6"/>
                 </a:solidFill>
               </a:rPr>
-              <a:t>5000</a:t>
+              <a:t>500</a:t>
             </a:r>
             <a:endParaRPr lang="en-US" sz="2600" dirty="0">
               <a:solidFill>
@@ -6454,18 +6454,45 @@
           <a:bodyPr wrap="square" rtlCol="0" anchor="ctr"/>
           <a:lstStyle/>
           <a:p>
-            <a:pPr marL="0" indent="0" algn="just">
-              <a:buNone/>
-            </a:pPr>
             <a:r>
               <a:rPr lang="en-US" sz="1200" dirty="0">
                 <a:solidFill>
                   <a:srgbClr val="1C2B3A"/>
                 </a:solidFill>
               </a:rPr>
-              <a:t>COCO was annotated by workers with Western, English-speaking demographics. Gender stereotypes and urban-centric scenes are overrepresented. Models may underperform on diverse cultural contexts.</a:t>
-            </a:r>
-            <a:endParaRPr lang="en-US" sz="1200" dirty="0"/>
+              <a:t>COCO was annotated by workers with Western, English-speaking demographics:</a:t>
+            </a:r>
+            <a:br>
+              <a:rPr lang="en-US" sz="1200" dirty="0">
+                <a:solidFill>
+                  <a:srgbClr val="1C2B3A"/>
+                </a:solidFill>
+              </a:rPr>
+            </a:br>
+            <a:r>
+              <a:rPr lang="en-US" sz="1200" dirty="0">
+                <a:solidFill>
+                  <a:srgbClr val="1C2B3A"/>
+                </a:solidFill>
+              </a:rPr>
+              <a:t>- Cultural bias</a:t>
+            </a:r>
+          </a:p>
+          <a:p>
+            <a:pPr algn="just"/>
+            <a:r>
+              <a:rPr lang="en-US" sz="1200" dirty="0"/>
+              <a:t>- Linguistic bias</a:t>
+            </a:r>
+          </a:p>
+          <a:p>
+            <a:pPr algn="just"/>
+            <a:r>
+              <a:rPr lang="en-US" sz="1200" dirty="0">
+                <a:sym typeface="Wingdings" pitchFamily="2" charset="2"/>
+              </a:rPr>
+              <a:t> Train on diverse multilingual datasets; evaluate across demographics</a:t>
+            </a:r>
           </a:p>
         </p:txBody>
       </p:sp>
@@ -6597,18 +6624,23 @@
           <a:bodyPr wrap="square" rtlCol="0" anchor="ctr"/>
           <a:lstStyle/>
           <a:p>
-            <a:pPr marL="0" indent="0">
-              <a:buNone/>
-            </a:pPr>
             <a:r>
               <a:rPr lang="en-US" sz="1200" dirty="0">
                 <a:solidFill>
                   <a:srgbClr val="1C2B3A"/>
                 </a:solidFill>
               </a:rPr>
-              <a:t>Models generate confident captions even for out-of-distribution images. In accessibility tools (screen reader alt-text), incorrect captions actively mislead visually impaired users. Human review required for high-stakes deployment.</a:t>
-            </a:r>
-            <a:endParaRPr lang="en-US" sz="1200" dirty="0"/>
+              <a:t>Models generate confident captions even for out-of-distribution images. In accessibility tools (screen reader alt-text), incorrect captions actively mislead visually impaired users </a:t>
+            </a:r>
+            <a:r>
+              <a:rPr lang="en-US" sz="1200" dirty="0">
+                <a:solidFill>
+                  <a:srgbClr val="1C2B3A"/>
+                </a:solidFill>
+                <a:sym typeface="Wingdings" pitchFamily="2" charset="2"/>
+              </a:rPr>
+              <a:t> Deploy with human-in-loop for high-impact accessibility applications</a:t>
+            </a:r>
           </a:p>
         </p:txBody>
       </p:sp>
@@ -6740,18 +6772,31 @@
           <a:bodyPr wrap="square" rtlCol="0" anchor="ctr"/>
           <a:lstStyle/>
           <a:p>
-            <a:pPr marL="0" indent="0">
-              <a:buNone/>
-            </a:pPr>
             <a:r>
               <a:rPr lang="en-US" sz="1200" dirty="0">
                 <a:solidFill>
                   <a:srgbClr val="1C2B3A"/>
                 </a:solidFill>
               </a:rPr>
-              <a:t>CIDEr 0.93 on common COCO scenes approaches usable quality for assistive technology. 253 million visually impaired people could benefit from automatic alt-text generation when deployed responsibly.</a:t>
-            </a:r>
-            <a:endParaRPr lang="en-US" sz="1200" dirty="0"/>
+              <a:t>CIDEr 0.93 on common COCO scenes approaches usable quality for assistive technology. 253 million visually impaired people could benefit from automatic alt-text generation when deployed responsibly </a:t>
+            </a:r>
+            <a:r>
+              <a:rPr lang="en-US" sz="1200" dirty="0">
+                <a:solidFill>
+                  <a:srgbClr val="1C2B3A"/>
+                </a:solidFill>
+                <a:sym typeface="Wingdings" pitchFamily="2" charset="2"/>
+              </a:rPr>
+              <a:t> </a:t>
+            </a:r>
+            <a:r>
+              <a:rPr lang="en-US" sz="1200" dirty="0">
+                <a:solidFill>
+                  <a:srgbClr val="1C2B3A"/>
+                </a:solidFill>
+              </a:rPr>
+              <a:t>Human review pipeline; confidence thresholds; grounding supervision</a:t>
+            </a:r>
           </a:p>
         </p:txBody>
       </p:sp>
@@ -6883,18 +6928,23 @@
           <a:bodyPr wrap="square" rtlCol="0" anchor="ctr"/>
           <a:lstStyle/>
           <a:p>
-            <a:pPr marL="0" indent="0">
-              <a:buNone/>
-            </a:pPr>
             <a:r>
               <a:rPr lang="en-US" sz="1200" dirty="0">
                 <a:solidFill>
                   <a:srgbClr val="1C2B3A"/>
                 </a:solidFill>
               </a:rPr>
-              <a:t>Automatic scene description at scale could enable mass surveillance by generating textual logs from camera feeds. Clear governance frameworks and use-case restrictions are required before production deployment.</a:t>
-            </a:r>
-            <a:endParaRPr lang="en-US" sz="1200" dirty="0"/>
+              <a:t>Automatic scene description at scale could enable mass surveillance by generating textual logs from camera feeds </a:t>
+            </a:r>
+            <a:r>
+              <a:rPr lang="en-US" sz="1200" dirty="0">
+                <a:solidFill>
+                  <a:srgbClr val="1C2B3A"/>
+                </a:solidFill>
+                <a:sym typeface="Wingdings" pitchFamily="2" charset="2"/>
+              </a:rPr>
+              <a:t> Consent frameworks; on-device processing; data minimization</a:t>
+            </a:r>
           </a:p>
         </p:txBody>
       </p:sp>
@@ -7186,7 +7236,7 @@
                   <a:srgbClr val="0D1B2A"/>
                 </a:solidFill>
               </a:rPr>
-              <a:t>Live Inference</a:t>
+              <a:t>Live Inference (Both CLI and Web)</a:t>
             </a:r>
             <a:endParaRPr lang="en-US" sz="1600" dirty="0"/>
           </a:p>
@@ -7805,7 +7855,7 @@
               <a:buNone/>
             </a:pPr>
             <a:r>
-              <a:rPr lang="en-US" sz="1200" dirty="0">
+              <a:rPr lang="en-US" sz="1200" b="1" dirty="0">
                 <a:solidFill>
                   <a:srgbClr val="1A936F"/>
                 </a:solidFill>
@@ -7813,9 +7863,8 @@
                 <a:ea typeface="Courier New" pitchFamily="34" charset="-122"/>
                 <a:cs typeface="Courier New" pitchFamily="34" charset="-120"/>
               </a:rPr>
-              <a:t>cd demo</a:t>
-            </a:r>
-            <a:endParaRPr lang="en-US" sz="1200" dirty="0"/>
+              <a:t>1. Web app:</a:t>
+            </a:r>
           </a:p>
           <a:p>
             <a:pPr marL="0" indent="0">
@@ -7839,7 +7888,7 @@
               <a:buNone/>
             </a:pPr>
             <a:r>
-              <a:rPr lang="en-US" sz="1200" dirty="0">
+              <a:rPr lang="en-US" sz="1200" b="1" dirty="0">
                 <a:solidFill>
                   <a:srgbClr val="1A936F"/>
                 </a:solidFill>
@@ -7847,7 +7896,22 @@
                 <a:ea typeface="Courier New" pitchFamily="34" charset="-122"/>
                 <a:cs typeface="Courier New" pitchFamily="34" charset="-120"/>
               </a:rPr>
-              <a:t># → http://localhost:5000</a:t>
+              <a:t>2. CLI</a:t>
+            </a:r>
+          </a:p>
+          <a:p>
+            <a:pPr marL="0" indent="0">
+              <a:buNone/>
+            </a:pPr>
+            <a:r>
+              <a:rPr lang="en-US" sz="1200" dirty="0" err="1">
+                <a:solidFill>
+                  <a:srgbClr val="1A936F"/>
+                </a:solidFill>
+                <a:latin typeface="Courier New" pitchFamily="34" charset="0"/>
+                <a:cs typeface="Courier New" pitchFamily="34" charset="-120"/>
+              </a:rPr>
+              <a:t>demo.ipynb</a:t>
             </a:r>
             <a:endParaRPr lang="en-US" sz="1200" dirty="0"/>
           </a:p>
@@ -14184,7 +14248,7 @@
             </a:pPr>
             <a:r>
               <a:rPr lang="en-US" sz="1200" dirty="0"/>
-              <a:t>Should change params for upgrade</a:t>
+              <a:t>Should change params</a:t>
             </a:r>
           </a:p>
         </p:txBody>
@@ -16216,7 +16280,7 @@
                   <a:srgbClr val="1C2B3A"/>
                 </a:solidFill>
               </a:rPr>
-              <a:t>Parametric efficiency trade-off -&gt; need upgrade</a:t>
+              <a:t>Parametric efficiency trade-off -&gt; upgrade by r=32</a:t>
             </a:r>
             <a:endParaRPr lang="en-US" sz="1400" dirty="0"/>
           </a:p>

--- a/reports/Generative_Presentation_Group8.pptx
+++ b/reports/Generative_Presentation_Group8.pptx
@@ -10041,7 +10041,7 @@
                   <a:srgbClr val="FFFFFF"/>
                 </a:solidFill>
               </a:rPr>
-              <a:t>253M</a:t>
+              <a:t>2.2B</a:t>
             </a:r>
             <a:endParaRPr lang="en-US" sz="3600" dirty="0"/>
           </a:p>
@@ -10091,6 +10091,42 @@
                 </a:solidFill>
               </a:rPr>
               <a:t>globally need alt-text</a:t>
+            </a:r>
+          </a:p>
+          <a:p>
+            <a:pPr marL="0" indent="0" algn="ctr">
+              <a:buNone/>
+            </a:pPr>
+            <a:r>
+              <a:rPr lang="en-US" sz="1400" dirty="0">
+                <a:solidFill>
+                  <a:schemeClr val="bg2"/>
+                </a:solidFill>
+              </a:rPr>
+              <a:t>(</a:t>
+            </a:r>
+            <a:r>
+              <a:rPr lang="en-US" sz="1400" dirty="0">
+                <a:solidFill>
+                  <a:schemeClr val="bg2"/>
+                </a:solidFill>
+                <a:hlinkClick r:id="rId3">
+                  <a:extLst>
+                    <a:ext uri="{A12FA001-AC4F-418D-AE19-62706E023703}">
+                      <ahyp:hlinkClr xmlns:ahyp="http://schemas.microsoft.com/office/drawing/2018/hyperlinkcolor" val="tx"/>
+                    </a:ext>
+                  </a:extLst>
+                </a:hlinkClick>
+              </a:rPr>
+              <a:t>WHO, 2026</a:t>
+            </a:r>
+            <a:r>
+              <a:rPr lang="en-US" sz="1400" dirty="0">
+                <a:solidFill>
+                  <a:schemeClr val="bg2"/>
+                </a:solidFill>
+              </a:rPr>
+              <a:t>)</a:t>
             </a:r>
           </a:p>
         </p:txBody>
@@ -10164,7 +10200,7 @@
                   <a:srgbClr val="FFFFFF"/>
                 </a:solidFill>
               </a:rPr>
-              <a:t>2X</a:t>
+              <a:t>10X</a:t>
             </a:r>
             <a:endParaRPr lang="en-US" sz="3600" dirty="0"/>
           </a:p>
@@ -10214,6 +10250,57 @@
                 </a:solidFill>
               </a:rPr>
               <a:t>with auto-generated metadata</a:t>
+            </a:r>
+          </a:p>
+          <a:p>
+            <a:pPr marL="0" indent="0" algn="ctr">
+              <a:buNone/>
+            </a:pPr>
+            <a:r>
+              <a:rPr lang="en-US" sz="1400" dirty="0">
+                <a:solidFill>
+                  <a:schemeClr val="bg2"/>
+                </a:solidFill>
+              </a:rPr>
+              <a:t>(</a:t>
+            </a:r>
+            <a:r>
+              <a:rPr lang="en-US" sz="1400" dirty="0" err="1">
+                <a:solidFill>
+                  <a:schemeClr val="bg2"/>
+                </a:solidFill>
+                <a:hlinkClick r:id="rId4">
+                  <a:extLst>
+                    <a:ext uri="{A12FA001-AC4F-418D-AE19-62706E023703}">
+                      <ahyp:hlinkClr xmlns:ahyp="http://schemas.microsoft.com/office/drawing/2018/hyperlinkcolor" val="tx"/>
+                    </a:ext>
+                  </a:extLst>
+                </a:hlinkClick>
+              </a:rPr>
+              <a:t>MomentsLab</a:t>
+            </a:r>
+            <a:r>
+              <a:rPr lang="en-US" sz="1400" dirty="0">
+                <a:solidFill>
+                  <a:schemeClr val="bg2"/>
+                </a:solidFill>
+                <a:hlinkClick r:id="rId4">
+                  <a:extLst>
+                    <a:ext uri="{A12FA001-AC4F-418D-AE19-62706E023703}">
+                      <ahyp:hlinkClr xmlns:ahyp="http://schemas.microsoft.com/office/drawing/2018/hyperlinkcolor" val="tx"/>
+                    </a:ext>
+                  </a:extLst>
+                </a:hlinkClick>
+              </a:rPr>
+              <a:t>, 2026</a:t>
+            </a:r>
+            <a:r>
+              <a:rPr lang="en-US" sz="1400" dirty="0">
+                <a:solidFill>
+                  <a:schemeClr val="bg2"/>
+                </a:solidFill>
+              </a:rPr>
+              <a:t>)</a:t>
             </a:r>
           </a:p>
         </p:txBody>
@@ -10287,7 +10374,7 @@
                   <a:srgbClr val="FFFFFF"/>
                 </a:solidFill>
               </a:rPr>
-              <a:t>90%</a:t>
+              <a:t>55.5%</a:t>
             </a:r>
             <a:endParaRPr lang="en-US" sz="3600" dirty="0"/>
           </a:p>
@@ -10337,6 +10424,55 @@
                 </a:solidFill>
               </a:rPr>
               <a:t>accessible descriptions</a:t>
+            </a:r>
+          </a:p>
+          <a:p>
+            <a:pPr algn="ctr"/>
+            <a:r>
+              <a:rPr lang="en-US" sz="1400" dirty="0">
+                <a:solidFill>
+                  <a:schemeClr val="bg2"/>
+                </a:solidFill>
+              </a:rPr>
+              <a:t>(</a:t>
+            </a:r>
+            <a:r>
+              <a:rPr lang="en-US" sz="1400" dirty="0" err="1">
+                <a:solidFill>
+                  <a:schemeClr val="bg2"/>
+                </a:solidFill>
+                <a:hlinkClick r:id="rId5">
+                  <a:extLst>
+                    <a:ext uri="{A12FA001-AC4F-418D-AE19-62706E023703}">
+                      <ahyp:hlinkClr xmlns:ahyp="http://schemas.microsoft.com/office/drawing/2018/hyperlinkcolor" val="tx"/>
+                    </a:ext>
+                  </a:extLst>
+                </a:hlinkClick>
+              </a:rPr>
+              <a:t>wearetenet</a:t>
+            </a:r>
+            <a:r>
+              <a:rPr lang="en-US" sz="1400" dirty="0">
+                <a:solidFill>
+                  <a:schemeClr val="bg2"/>
+                </a:solidFill>
+                <a:hlinkClick r:id="rId5">
+                  <a:extLst>
+                    <a:ext uri="{A12FA001-AC4F-418D-AE19-62706E023703}">
+                      <ahyp:hlinkClr xmlns:ahyp="http://schemas.microsoft.com/office/drawing/2018/hyperlinkcolor" val="tx"/>
+                    </a:ext>
+                  </a:extLst>
+                </a:hlinkClick>
+              </a:rPr>
+              <a:t>, 2026</a:t>
+            </a:r>
+            <a:r>
+              <a:rPr lang="en-US" sz="1400" dirty="0">
+                <a:solidFill>
+                  <a:schemeClr val="bg2"/>
+                </a:solidFill>
+              </a:rPr>
+              <a:t>)</a:t>
             </a:r>
           </a:p>
         </p:txBody>
@@ -11533,8 +11669,8 @@
         </p:nvSpPr>
         <p:spPr>
           <a:xfrm>
-            <a:off x="5728716" y="1042416"/>
-            <a:ext cx="914400" cy="201168"/>
+            <a:off x="5340096" y="1012286"/>
+            <a:ext cx="1816658" cy="201168"/>
           </a:xfrm>
           <a:prstGeom prst="rect">
             <a:avLst/>
@@ -11555,7 +11691,7 @@
                   <a:srgbClr val="0B6E4F"/>
                 </a:solidFill>
               </a:rPr>
-              <a:t>50 tokens</a:t>
+              <a:t>Dynamic tokens + sentences</a:t>
             </a:r>
             <a:endParaRPr lang="en-US" sz="1200" dirty="0"/>
           </a:p>
@@ -12630,7 +12766,7 @@
                   <a:srgbClr val="0D1B2A"/>
                 </a:solidFill>
               </a:rPr>
-              <a:t>0.6 M trainable</a:t>
+              <a:t>62.9M params</a:t>
             </a:r>
             <a:endParaRPr lang="en-US" sz="1400" dirty="0"/>
           </a:p>
@@ -12961,16 +13097,14 @@
           <a:bodyPr wrap="square" lIns="0" tIns="0" rIns="0" bIns="0" rtlCol="0" anchor="ctr"/>
           <a:lstStyle/>
           <a:p>
-            <a:pPr marL="0" indent="0" algn="ctr">
-              <a:buNone/>
-            </a:pPr>
+            <a:pPr algn="ctr"/>
             <a:r>
               <a:rPr lang="en-US" sz="1400" b="1" dirty="0">
                 <a:solidFill>
                   <a:srgbClr val="0B6E4F"/>
                 </a:solidFill>
               </a:rPr>
-              <a:t>67.6 M trainable</a:t>
+              <a:t>129.9M params</a:t>
             </a:r>
             <a:endParaRPr lang="en-US" sz="1400" dirty="0"/>
           </a:p>
@@ -13312,7 +13446,7 @@
                   <a:srgbClr val="E85D04"/>
                 </a:solidFill>
               </a:rPr>
-              <a:t>0.8 M trainable</a:t>
+              <a:t>63.76M params</a:t>
             </a:r>
             <a:endParaRPr lang="en-US" sz="1400" dirty="0"/>
           </a:p>
@@ -15556,7 +15690,7 @@
         <p:spPr>
           <a:xfrm>
             <a:off x="1470580" y="1239570"/>
-            <a:ext cx="6759019" cy="3379510"/>
+            <a:ext cx="6759019" cy="3100082"/>
           </a:xfrm>
           <a:prstGeom prst="rect">
             <a:avLst/>

--- a/reports/Generative_Presentation_Group8.pptx
+++ b/reports/Generative_Presentation_Group8.pptx
@@ -11872,7 +11872,7 @@
                   <a:srgbClr val="0B6E4F"/>
                 </a:solidFill>
               </a:rPr>
-              <a:t>(512→7680)</a:t>
+              <a:t>(512→3072)</a:t>
             </a:r>
             <a:endParaRPr lang="en-US" sz="1400" dirty="0"/>
           </a:p>
@@ -12198,7 +12198,7 @@
                   <a:srgbClr val="0B6E4F"/>
                 </a:solidFill>
               </a:rPr>
-              <a:t>(7680→7680)</a:t>
+              <a:t>(3072→7680)</a:t>
             </a:r>
             <a:endParaRPr lang="en-US" sz="1400" dirty="0"/>
           </a:p>

--- a/reports/Generative_Presentation_Group8.pptx
+++ b/reports/Generative_Presentation_Group8.pptx
@@ -14409,7 +14409,7 @@
         </p:blipFill>
         <p:spPr>
           <a:xfrm>
-            <a:off x="365760" y="1207008"/>
+            <a:off x="365760" y="1345558"/>
             <a:ext cx="5303520" cy="3006356"/>
           </a:xfrm>
           <a:prstGeom prst="rect">
@@ -15941,7 +15941,7 @@
         </p:blipFill>
         <p:spPr>
           <a:xfrm>
-            <a:off x="365760" y="1370920"/>
+            <a:off x="365760" y="1564890"/>
             <a:ext cx="5943600" cy="2286000"/>
           </a:xfrm>
           <a:prstGeom prst="rect">
